--- a/Service_BOM_AI应用案例分享.pptx
+++ b/Service_BOM_AI应用案例分享.pptx
@@ -517,7 +517,7 @@
           </a:p>
           <a:p>
             <a:r>
-              <a:t>重点汇报我们如何从实际工程痛点出发，将大模型自然语言理解能力与工业规则深度结合，构建出具备三级容灾高可用能力的 Service BOM 智能化工作站，解决长期困扰我们的物料混乱、一物多码和编制周期长的问题。</a:t>
+              <a:t>重点汇报我们如何从日常实际痛点出发，利用云端大模型的自然语言理解能力与工程清洗规则，把原本混乱耗时的非标物料录入和清单编制工作，变成智能化、受控化的高效自动化平台。</a:t>
             </a:r>
           </a:p>
         </p:txBody>
@@ -752,17 +752,7 @@
           </a:p>
           <a:p>
             <a:r>
-              <a:t>然而大家都有切身体会，过去有四个大痛点：</a:t>
-            </a:r>
-          </a:p>
-          <a:p>
-            <a:r>
-              <a:t>第一，物料描述极其非标，词序颠倒；第二，工程师不得不人工逐条复制粘贴拆分；第三，一物多码导致物料库冗余，采购成本升高；第四，桌面 Excel 传阅导致工程版本覆盖、BOM 层级序号错乱。</a:t>
-            </a:r>
-          </a:p>
-          <a:p>
-            <a:r>
-              <a:t>这些痛点正是我们引入 AI 改造的切入点。</a:t>
+              <a:t>然而大家都有切身体会，过去有四个大痛点：第一，物料描述极其非标；第二，工程师不得不人工逐条复制粘贴拆分；第三，一物多码导致物料库冗余；第四，桌面 Excel 传阅导致工程版本覆盖、BOM 序号错乱。这些痛点正是我们引入 AI 改造的切入点。</a:t>
             </a:r>
           </a:p>
         </p:txBody>
@@ -832,12 +822,12 @@
           <a:lstStyle/>
           <a:p>
             <a:r>
-              <a:t>针对前面的痛点，我们设计了整套系统的总体架构。这不是一个简单的外挂对话框，而是深度嵌合物料管理全周期的闭环系统：</a:t>
-            </a:r>
-          </a:p>
-          <a:p>
-            <a:r>
-              <a:t>从输入层的多元数据接入，到 AI 解析中枢的三级容灾推断，再到底层的主库去重与工程锁，最后到交付层全自动生成符合集团 FDJL-JS-037 标准的受控 Excel。整个流程实现了工业级的规范与合规。</a:t>
+              <a:t>这是系统的整体方案架构。我们没有盲目搞花架子，而是构建了端到端闭环：</a:t>
+            </a:r>
+          </a:p>
+          <a:p>
+            <a:r>
+              <a:t>第一步多源输入接入；第二步直接调用成熟的云端大模型做秒级自然语言理解；第三步通过内置的风电备件规则库进行清洗去重；第四步受控输出符合 FDJL-JS-037 标准的正式 BOM。</a:t>
             </a:r>
           </a:p>
         </p:txBody>
@@ -907,22 +897,22 @@
           <a:lstStyle/>
           <a:p>
             <a:r>
-              <a:t>工业系统最忌讳的是‘外部网络一卡，整个业务瘫痪’。为此我们做了一个非常扎实的技术架构：三级容灾。</a:t>
-            </a:r>
-          </a:p>
-          <a:p>
-            <a:r>
-              <a:t>在日常办公室有网时，系统自动调用云端大模型，不到 1 秒就能完成解析，本地电脑毫无卡顿；</a:t>
-            </a:r>
-          </a:p>
-          <a:p>
-            <a:r>
-              <a:t>当工程师去风场出差或者涉密环境拔掉网线时，系统平滑降级至本地内置的 Qwen2.5 轻量模型，照样能理解颠倒的语义；</a:t>
-            </a:r>
-          </a:p>
-          <a:p>
-            <a:r>
-              <a:t>万一极端情况下，还有毫秒级的工业启发规则进行兜底。这套架构确保了 100% 的业务高可用！</a:t>
+              <a:t>在技术方案上，我们坚持‘轻量、实用、精准’的原则，采用‘云端大模型 + 工业规则’的协同架构：</a:t>
+            </a:r>
+          </a:p>
+          <a:p>
+            <a:r>
+              <a:t>首先，我们直接调用成熟的云端大模型（如智谱 GLM-4-Flash），不到 1 秒就能完成解析，不仅能处理复杂的倒序语言，而且本地电脑零算力负担，不需要买昂贵的 GPU 显卡；</a:t>
+            </a:r>
+          </a:p>
+          <a:p>
+            <a:r>
+              <a:t>其次，结合工业规则库对大模型输出进行后处理清洗，确保图号绝对纯净，并对知名品牌自动中文化；</a:t>
+            </a:r>
+          </a:p>
+          <a:p>
+            <a:r>
+              <a:t>最后，整套系统基于轻量 Web 架构，科室同仁用浏览器就能访问，开箱即用，运维极其简单。</a:t>
             </a:r>
           </a:p>
         </p:txBody>
@@ -992,22 +982,17 @@
           <a:lstStyle/>
           <a:p>
             <a:r>
-              <a:t>大家看屏幕上的这三个典型案例，这是实际系统中每天都在处理的数据。</a:t>
-            </a:r>
-          </a:p>
-          <a:p>
-            <a:r>
-              <a:t>案例1中，工程师写了前缀‘变桨备件_’，传统正则很容易把‘变桨备件’拆成名字，而大模型能理解这只是个分类，精准提取出真正的‘传感器撞块’；</a:t>
-            </a:r>
-          </a:p>
-          <a:p>
-            <a:r>
-              <a:t>案例2中，图号在最前面，名称和型号颠倒，大模型依然精准复原；</a:t>
-            </a:r>
-          </a:p>
-          <a:p>
-            <a:r>
-              <a:t>案例3更具价值，系统识别出‘Siemens’后，自动映射归一化为中文‘西门子’，这就从根源上杜绝了‘西门子’和‘Siemens’在数据库里变成两个不同物料的一物多码现象！</a:t>
+              <a:t>大家看屏幕左侧，这是实际系统中大模型提取弹窗的真实截图。</a:t>
+            </a:r>
+          </a:p>
+          <a:p>
+            <a:r>
+              <a:t>当输入非标描述‘变桨备件_传感器撞块_DBJ00.004.1386.01_电力电子’，点击大模型智能提取，不到1秒，系统自动抽离出真正的部件名、纯型号并自动标绿回填；</a:t>
+            </a:r>
+          </a:p>
+          <a:p>
+            <a:r>
+              <a:t>右侧展示了系统的三大核心处理能力：自动过滤‘变桨备件_’前缀噪声、识别颠倒词序、以及将‘Siemens’自动规范映射为中文‘西门子’，彻底消除一物多码。</a:t>
             </a:r>
           </a:p>
         </p:txBody>
@@ -1152,27 +1137,27 @@
           <a:lstStyle/>
           <a:p>
             <a:r>
-              <a:t>AI 技术必须服务于实际的工程规范。在 Service BOM 输出环节，我们做到了 100% 的受控闭环：</a:t>
-            </a:r>
-          </a:p>
-          <a:p>
-            <a:r>
-              <a:t>第一，封面严格套用公司 FDJL-JS-037 受控模板，项目代号、平台与文件名联动；</a:t>
-            </a:r>
-          </a:p>
-          <a:p>
-            <a:r>
-              <a:t>第二，完整的六级签字与 ECN 变更追溯；</a:t>
-            </a:r>
-          </a:p>
-          <a:p>
-            <a:r>
-              <a:t>第三，严格的 10/20/30 层级编号和黑点缩进；</a:t>
-            </a:r>
-          </a:p>
-          <a:p>
-            <a:r>
-              <a:t>第四，独立工程锁机制，张工在编辑 WL 平台机型时，李工编辑 H3 平台互不干扰、互不覆盖。这保证了生产环境的严谨可靠。</a:t>
+              <a:t>各位请看大屏幕上的这张实机界面截图，这就是我们已经上线运行的 Service BOM 智能工作站。</a:t>
+            </a:r>
+          </a:p>
+          <a:p>
+            <a:r>
+              <a:t>大家可以看到，顶部显示的是我们真实的机型工程‘变桨系统SBOM_电力电子[WL平台][EW6.25-220]’，右侧带有只读工程保护锁；</a:t>
+            </a:r>
+          </a:p>
+          <a:p>
+            <a:r>
+              <a:t>下面的 BOM 清单中，大家一眼就能看到清晰的‘• 一级组件’、‘•• 二级’点阵层级缩进，以及‘10、20、30’规范步进序号；</a:t>
+            </a:r>
+          </a:p>
+          <a:p>
+            <a:r>
+              <a:t>同时每一行备件都关联了实物照片缩略图与技术手册调阅按钮。</a:t>
+            </a:r>
+          </a:p>
+          <a:p>
+            <a:r>
+              <a:t>右侧展示了我们严格遵循公司受控规范的四大支柱：统一命名、树状层级点阵、多模态图册与符合 FDJL-JS-037 规范的标准导出。这是看得见、摸得着的真实落地成果！</a:t>
             </a:r>
           </a:p>
         </p:txBody>
@@ -1242,7 +1227,7 @@
           <a:lstStyle/>
           <a:p>
             <a:r>
-              <a:t>经过实际机型项目测试，系统的应用带来了立竿见影的量化成效：</a:t>
+              <a:t>经过实际项目测试，效果是立竿见影的：</a:t>
             </a:r>
           </a:p>
           <a:p>
@@ -1262,7 +1247,7 @@
           </a:p>
           <a:p>
             <a:r>
-              <a:t>第四，系统达到 99.9% 工业可用性，即便拔掉外网网线，在现场照样运转自如！</a:t>
+              <a:t>第四，云端大模型响应不到 1 秒，普通工位电脑开箱即用，为科室带来了扎扎实实的效率提升。</a:t>
             </a:r>
           </a:p>
         </p:txBody>
@@ -1332,7 +1317,7 @@
           <a:lstStyle/>
           <a:p>
             <a:r>
-              <a:t>在做这个系统的过程中，我们团队有三点非常深刻的体会，想跟科室的各位同仁分享：</a:t>
+              <a:t>在做这个系统的过程中，我们团队有三点非常深刻的体会：</a:t>
             </a:r>
           </a:p>
           <a:p>
@@ -1342,12 +1327,12 @@
           </a:p>
           <a:p>
             <a:r>
-              <a:t>第二是‘端云协同’，在工业现场，离线能力是系统能不能用的分水岭；</a:t>
-            </a:r>
-          </a:p>
-          <a:p>
-            <a:r>
-              <a:t>第三是‘AI与规则结合’，让大模型发挥理解长处，让数据库和规则系统守住工程底线，这样才能做出经得起推敲的生产力工具。</a:t>
+              <a:t>第二是‘轻量实用’，善用成熟的云端 API，不要把精力耗在维护笨重复杂的本地显卡集群上；</a:t>
+            </a:r>
+          </a:p>
+          <a:p>
+            <a:r>
+              <a:t>第三是‘AI与规则结合’，让大模型发挥理解长处，让规则系统守住工程底线，这样才能做出经得起推敲的生产力工具。</a:t>
             </a:r>
           </a:p>
         </p:txBody>
@@ -4368,7 +4353,7 @@
             <a:avLst/>
           </a:prstGeom>
           <a:solidFill>
-            <a:srgbClr val="0F172A"/>
+            <a:srgbClr val="090D16"/>
           </a:solidFill>
           <a:ln>
             <a:noFill/>
@@ -4405,13 +4390,13 @@
         <p:spPr>
           <a:xfrm>
             <a:off x="0" y="0"/>
-            <a:ext cx="12191695" cy="109728"/>
+            <a:ext cx="12191695" cy="91440"/>
           </a:xfrm>
           <a:prstGeom prst="rect">
             <a:avLst/>
           </a:prstGeom>
           <a:solidFill>
-            <a:srgbClr val="2563EB"/>
+            <a:srgbClr val="0EA5E9"/>
           </a:solidFill>
           <a:ln>
             <a:noFill/>
@@ -4447,18 +4432,18 @@
         </p:nvSpPr>
         <p:spPr>
           <a:xfrm>
-            <a:off x="1097280" y="1280160"/>
-            <a:ext cx="2926080" cy="365760"/>
+            <a:off x="731520" y="640080"/>
+            <a:ext cx="10728655" cy="5577840"/>
           </a:xfrm>
           <a:prstGeom prst="roundRect">
             <a:avLst/>
           </a:prstGeom>
           <a:solidFill>
-            <a:srgbClr val="1E293B"/>
+            <a:srgbClr val="0F172A"/>
           </a:solidFill>
           <a:ln w="19050">
             <a:solidFill>
-              <a:srgbClr val="2563EB"/>
+              <a:srgbClr val="1E293B"/>
             </a:solidFill>
           </a:ln>
         </p:spPr>
@@ -4480,108 +4465,30 @@
           <a:bodyPr rtlCol="0" anchor="ctr"/>
           <a:lstStyle/>
           <a:p>
-            <a:pPr algn="ctr">
-              <a:defRPr sz="1200" b="1">
-                <a:solidFill>
-                  <a:srgbClr val="60A5FA"/>
-                </a:solidFill>
-                <a:latin typeface="微软雅黑"/>
-              </a:defRPr>
-            </a:pPr>
-            <a:r>
-              <a:t>⚡ 工业大模型场景化落地案例</a:t>
-            </a:r>
-          </a:p>
-        </p:txBody>
-      </p:sp>
-      <p:sp>
-        <p:nvSpPr>
-          <p:cNvPr id="5" name="TextBox 4"/>
-          <p:cNvSpPr txBox="1"/>
-          <p:nvPr/>
-        </p:nvSpPr>
-        <p:spPr>
-          <a:xfrm>
-            <a:off x="1097280" y="1920240"/>
-            <a:ext cx="10058400" cy="2560320"/>
-          </a:xfrm>
-          <a:prstGeom prst="rect">
-            <a:avLst/>
-          </a:prstGeom>
-          <a:noFill/>
-        </p:spPr>
-        <p:txBody>
-          <a:bodyPr wrap="square">
-            <a:spAutoFit/>
-          </a:bodyPr>
-          <a:lstStyle/>
-          <a:p>
-            <a:pPr>
-              <a:defRPr sz="3600" b="1">
-                <a:solidFill>
-                  <a:srgbClr val="FFFFFF"/>
-                </a:solidFill>
-                <a:latin typeface="微软雅黑"/>
-              </a:defRPr>
-            </a:pPr>
-            <a:r>
-              <a:t>大模型赋能风电工程服务</a:t>
-            </a:r>
-          </a:p>
-          <a:p>
-            <a:pPr>
-              <a:spcBef>
-                <a:spcPts val="800"/>
-              </a:spcBef>
-              <a:defRPr sz="2800" b="1">
-                <a:solidFill>
-                  <a:srgbClr val="60A5FA"/>
-                </a:solidFill>
-                <a:latin typeface="微软雅黑"/>
-              </a:defRPr>
-            </a:pPr>
-            <a:r>
-              <a:t>Service BOM 智能语义提取与清单数据治理实践</a:t>
-            </a:r>
-          </a:p>
-          <a:p>
-            <a:pPr>
-              <a:spcBef>
-                <a:spcPts val="2000"/>
-              </a:spcBef>
-              <a:defRPr sz="1500">
-                <a:solidFill>
-                  <a:srgbClr val="94A3B8"/>
-                </a:solidFill>
-                <a:latin typeface="微软雅黑"/>
-              </a:defRPr>
-            </a:pPr>
-            <a:r>
-              <a:t>从“非标手工拆解”迈向“AI 语义理解 + 三级容灾 + 受控工程交付”的数字化跃升</a:t>
-            </a:r>
-          </a:p>
-        </p:txBody>
-      </p:sp>
-      <p:sp>
-        <p:nvSpPr>
-          <p:cNvPr id="6" name="Rounded Rectangle 5"/>
+            <a:pPr algn="ctr"/>
+          </a:p>
+        </p:txBody>
+      </p:sp>
+      <p:sp>
+        <p:nvSpPr>
+          <p:cNvPr id="5" name="Rounded Rectangle 4"/>
           <p:cNvSpPr/>
           <p:nvPr/>
         </p:nvSpPr>
         <p:spPr>
           <a:xfrm>
-            <a:off x="1097280" y="4663440"/>
-            <a:ext cx="3108960" cy="914400"/>
+            <a:off x="1188720" y="1097280"/>
+            <a:ext cx="3108960" cy="384048"/>
           </a:xfrm>
           <a:prstGeom prst="roundRect">
             <a:avLst/>
           </a:prstGeom>
           <a:solidFill>
-            <a:srgbClr val="1E293B"/>
+            <a:srgbClr val="1E3A8A"/>
           </a:solidFill>
           <a:ln w="12700">
             <a:solidFill>
-              <a:srgbClr val="334155"/>
+              <a:srgbClr val="0EA5E9"/>
             </a:solidFill>
           </a:ln>
         </p:spPr>
@@ -4600,11 +4507,47 @@
           </a:fontRef>
         </p:style>
         <p:txBody>
-          <a:bodyPr rtlCol="0" anchor="ctr" wrap="square"/>
+          <a:bodyPr rtlCol="0" anchor="ctr"/>
           <a:lstStyle/>
           <a:p>
             <a:pPr algn="ctr">
-              <a:defRPr sz="1300" b="1">
+              <a:defRPr sz="1100" b="1">
+                <a:solidFill>
+                  <a:srgbClr val="BAE6FD"/>
+                </a:solidFill>
+                <a:latin typeface="微软雅黑"/>
+              </a:defRPr>
+            </a:pPr>
+            <a:r>
+              <a:t>⚡ 工业大模型场景化落地实践</a:t>
+            </a:r>
+          </a:p>
+        </p:txBody>
+      </p:sp>
+      <p:sp>
+        <p:nvSpPr>
+          <p:cNvPr id="6" name="TextBox 5"/>
+          <p:cNvSpPr txBox="1"/>
+          <p:nvPr/>
+        </p:nvSpPr>
+        <p:spPr>
+          <a:xfrm>
+            <a:off x="1188720" y="1691640"/>
+            <a:ext cx="9601200" cy="2377440"/>
+          </a:xfrm>
+          <a:prstGeom prst="rect">
+            <a:avLst/>
+          </a:prstGeom>
+          <a:noFill/>
+        </p:spPr>
+        <p:txBody>
+          <a:bodyPr wrap="square">
+            <a:spAutoFit/>
+          </a:bodyPr>
+          <a:lstStyle/>
+          <a:p>
+            <a:pPr>
+              <a:defRPr sz="3600" b="1">
                 <a:solidFill>
                   <a:srgbClr val="FFFFFF"/>
                 </a:solidFill>
@@ -4612,15 +4555,31 @@
               </a:defRPr>
             </a:pPr>
             <a:r>
-              <a:t>🎯 语义精准提取</a:t>
+              <a:t>大模型赋能风电工程服务</a:t>
             </a:r>
           </a:p>
           <a:p>
             <a:pPr>
               <a:spcBef>
-                <a:spcPts val="300"/>
+                <a:spcPts val="600"/>
               </a:spcBef>
-              <a:defRPr sz="1100">
+              <a:defRPr sz="2800" b="1">
+                <a:solidFill>
+                  <a:srgbClr val="38BDF8"/>
+                </a:solidFill>
+                <a:latin typeface="微软雅黑"/>
+              </a:defRPr>
+            </a:pPr>
+            <a:r>
+              <a:t>Service BOM 智能解析与数据治理实践</a:t>
+            </a:r>
+          </a:p>
+          <a:p>
+            <a:pPr>
+              <a:spcBef>
+                <a:spcPts val="1600"/>
+              </a:spcBef>
+              <a:defRPr sz="1400">
                 <a:solidFill>
                   <a:srgbClr val="94A3B8"/>
                 </a:solidFill>
@@ -4628,7 +4587,7 @@
               </a:defRPr>
             </a:pPr>
             <a:r>
-              <a:t>自动拆解非标物料与厂商</a:t>
+              <a:t>从“非标手工拆解”迈向“云端大模型语义理解 + 工业规则约束”的高效敏捷闭环</a:t>
             </a:r>
           </a:p>
         </p:txBody>
@@ -4641,18 +4600,18 @@
         </p:nvSpPr>
         <p:spPr>
           <a:xfrm>
-            <a:off x="4480560" y="4663440"/>
-            <a:ext cx="3108960" cy="914400"/>
+            <a:off x="1188720" y="4114800"/>
+            <a:ext cx="3017520" cy="1051560"/>
           </a:xfrm>
           <a:prstGeom prst="roundRect">
             <a:avLst/>
           </a:prstGeom>
           <a:solidFill>
-            <a:srgbClr val="1E293B"/>
+            <a:srgbClr val="172554"/>
           </a:solidFill>
           <a:ln w="12700">
             <a:solidFill>
-              <a:srgbClr val="334155"/>
+              <a:srgbClr val="1E3A8A"/>
             </a:solidFill>
           </a:ln>
         </p:spPr>
@@ -4683,15 +4642,15 @@
               </a:defRPr>
             </a:pPr>
             <a:r>
-              <a:t>🛡️ 三级容灾架构</a:t>
+              <a:t>🎯 语义精准拆解</a:t>
             </a:r>
           </a:p>
           <a:p>
             <a:pPr>
               <a:spcBef>
-                <a:spcPts val="300"/>
+                <a:spcPts val="400"/>
               </a:spcBef>
-              <a:defRPr sz="1100">
+              <a:defRPr sz="1000">
                 <a:solidFill>
                   <a:srgbClr val="94A3B8"/>
                 </a:solidFill>
@@ -4699,7 +4658,7 @@
               </a:defRPr>
             </a:pPr>
             <a:r>
-              <a:t>云端高速 + 本地离线 100% 可用</a:t>
+              <a:t>突破词序倒置，纯净剥离图号与规范厂商</a:t>
             </a:r>
           </a:p>
         </p:txBody>
@@ -4712,18 +4671,18 @@
         </p:nvSpPr>
         <p:spPr>
           <a:xfrm>
-            <a:off x="7863840" y="4663440"/>
-            <a:ext cx="3108960" cy="914400"/>
+            <a:off x="4480560" y="4114800"/>
+            <a:ext cx="3017520" cy="1051560"/>
           </a:xfrm>
           <a:prstGeom prst="roundRect">
             <a:avLst/>
           </a:prstGeom>
           <a:solidFill>
-            <a:srgbClr val="1E293B"/>
+            <a:srgbClr val="172554"/>
           </a:solidFill>
           <a:ln w="12700">
             <a:solidFill>
-              <a:srgbClr val="334155"/>
+              <a:srgbClr val="1E3A8A"/>
             </a:solidFill>
           </a:ln>
         </p:spPr>
@@ -4754,15 +4713,15 @@
               </a:defRPr>
             </a:pPr>
             <a:r>
-              <a:t>📊 规范受控交付</a:t>
+              <a:t>⚡ 秒级云端推断</a:t>
             </a:r>
           </a:p>
           <a:p>
             <a:pPr>
               <a:spcBef>
-                <a:spcPts val="300"/>
+                <a:spcPts val="400"/>
               </a:spcBef>
-              <a:defRPr sz="1100">
+              <a:defRPr sz="1000">
                 <a:solidFill>
                   <a:srgbClr val="94A3B8"/>
                 </a:solidFill>
@@ -4770,21 +4729,92 @@
               </a:defRPr>
             </a:pPr>
             <a:r>
-              <a:t>FDJL-JS-037 标准 BOM 闭环</a:t>
-            </a:r>
-          </a:p>
-        </p:txBody>
-      </p:sp>
-      <p:sp>
-        <p:nvSpPr>
-          <p:cNvPr id="9" name="TextBox 8"/>
+              <a:t>智谱 GLM 企业级接口，零本地算力开销</a:t>
+            </a:r>
+          </a:p>
+        </p:txBody>
+      </p:sp>
+      <p:sp>
+        <p:nvSpPr>
+          <p:cNvPr id="9" name="Rounded Rectangle 8"/>
+          <p:cNvSpPr/>
+          <p:nvPr/>
+        </p:nvSpPr>
+        <p:spPr>
+          <a:xfrm>
+            <a:off x="7772400" y="4114800"/>
+            <a:ext cx="3017520" cy="1051560"/>
+          </a:xfrm>
+          <a:prstGeom prst="roundRect">
+            <a:avLst/>
+          </a:prstGeom>
+          <a:solidFill>
+            <a:srgbClr val="172554"/>
+          </a:solidFill>
+          <a:ln w="12700">
+            <a:solidFill>
+              <a:srgbClr val="1E3A8A"/>
+            </a:solidFill>
+          </a:ln>
+        </p:spPr>
+        <p:style>
+          <a:lnRef idx="1">
+            <a:schemeClr val="accent1"/>
+          </a:lnRef>
+          <a:fillRef idx="3">
+            <a:schemeClr val="accent1"/>
+          </a:fillRef>
+          <a:effectRef idx="2">
+            <a:schemeClr val="accent1"/>
+          </a:effectRef>
+          <a:fontRef idx="minor">
+            <a:schemeClr val="lt1"/>
+          </a:fontRef>
+        </p:style>
+        <p:txBody>
+          <a:bodyPr rtlCol="0" anchor="ctr" wrap="square"/>
+          <a:lstStyle/>
+          <a:p>
+            <a:pPr algn="ctr">
+              <a:defRPr sz="1300" b="1">
+                <a:solidFill>
+                  <a:srgbClr val="FFFFFF"/>
+                </a:solidFill>
+                <a:latin typeface="微软雅黑"/>
+              </a:defRPr>
+            </a:pPr>
+            <a:r>
+              <a:t>📊 受控标准交付</a:t>
+            </a:r>
+          </a:p>
+          <a:p>
+            <a:pPr>
+              <a:spcBef>
+                <a:spcPts val="400"/>
+              </a:spcBef>
+              <a:defRPr sz="1000">
+                <a:solidFill>
+                  <a:srgbClr val="94A3B8"/>
+                </a:solidFill>
+                <a:latin typeface="微软雅黑"/>
+              </a:defRPr>
+            </a:pPr>
+            <a:r>
+              <a:t>严格契合 FDJL-JS-037 受控表单规范</a:t>
+            </a:r>
+          </a:p>
+        </p:txBody>
+      </p:sp>
+      <p:sp>
+        <p:nvSpPr>
+          <p:cNvPr id="10" name="TextBox 9"/>
           <p:cNvSpPr txBox="1"/>
           <p:nvPr/>
         </p:nvSpPr>
         <p:spPr>
           <a:xfrm>
-            <a:off x="1097280" y="5943600"/>
-            <a:ext cx="9144000" cy="457200"/>
+            <a:off x="1188720" y="5394960"/>
+            <a:ext cx="9144000" cy="365760"/>
           </a:xfrm>
           <a:prstGeom prst="rect">
             <a:avLst/>
@@ -4798,7 +4828,7 @@
           <a:lstStyle/>
           <a:p>
             <a:pPr>
-              <a:defRPr sz="1200">
+              <a:defRPr sz="1100">
                 <a:solidFill>
                   <a:srgbClr val="64748B"/>
                 </a:solidFill>
@@ -4806,7 +4836,7 @@
               </a:defRPr>
             </a:pPr>
             <a:r>
-              <a:t>分享人：服务工程团队 | 汇报范围：科室技术与应用创新分享 | 2026年10月</a:t>
+              <a:t>上海电气风电集团 · 服务工程团队 | 汇报范围：科室技术与智能化应用分享 | 2026年10月</a:t>
             </a:r>
           </a:p>
         </p:txBody>
@@ -4831,14 +4861,100 @@
       <p:grpSpPr/>
       <p:sp>
         <p:nvSpPr>
-          <p:cNvPr id="2" name="Rounded Rectangle 1"/>
+          <p:cNvPr id="2" name="Rectangle 1"/>
           <p:cNvSpPr/>
           <p:nvPr/>
         </p:nvSpPr>
         <p:spPr>
           <a:xfrm>
-            <a:off x="731520" y="411480"/>
-            <a:ext cx="2011680" cy="320040"/>
+            <a:off x="0" y="0"/>
+            <a:ext cx="12191695" cy="6858000"/>
+          </a:xfrm>
+          <a:prstGeom prst="rect">
+            <a:avLst/>
+          </a:prstGeom>
+          <a:solidFill>
+            <a:srgbClr val="F8FAFC"/>
+          </a:solidFill>
+          <a:ln>
+            <a:noFill/>
+          </a:ln>
+        </p:spPr>
+        <p:style>
+          <a:lnRef idx="1">
+            <a:schemeClr val="accent1"/>
+          </a:lnRef>
+          <a:fillRef idx="3">
+            <a:schemeClr val="accent1"/>
+          </a:fillRef>
+          <a:effectRef idx="2">
+            <a:schemeClr val="accent1"/>
+          </a:effectRef>
+          <a:fontRef idx="minor">
+            <a:schemeClr val="lt1"/>
+          </a:fontRef>
+        </p:style>
+        <p:txBody>
+          <a:bodyPr rtlCol="0" anchor="ctr"/>
+          <a:lstStyle/>
+          <a:p>
+            <a:pPr algn="ctr"/>
+          </a:p>
+        </p:txBody>
+      </p:sp>
+      <p:sp>
+        <p:nvSpPr>
+          <p:cNvPr id="3" name="Rectangle 2"/>
+          <p:cNvSpPr/>
+          <p:nvPr/>
+        </p:nvSpPr>
+        <p:spPr>
+          <a:xfrm>
+            <a:off x="0" y="0"/>
+            <a:ext cx="12191695" cy="73152"/>
+          </a:xfrm>
+          <a:prstGeom prst="rect">
+            <a:avLst/>
+          </a:prstGeom>
+          <a:solidFill>
+            <a:srgbClr val="1D4ED8"/>
+          </a:solidFill>
+          <a:ln>
+            <a:noFill/>
+          </a:ln>
+        </p:spPr>
+        <p:style>
+          <a:lnRef idx="1">
+            <a:schemeClr val="accent1"/>
+          </a:lnRef>
+          <a:fillRef idx="3">
+            <a:schemeClr val="accent1"/>
+          </a:fillRef>
+          <a:effectRef idx="2">
+            <a:schemeClr val="accent1"/>
+          </a:effectRef>
+          <a:fontRef idx="minor">
+            <a:schemeClr val="lt1"/>
+          </a:fontRef>
+        </p:style>
+        <p:txBody>
+          <a:bodyPr rtlCol="0" anchor="ctr"/>
+          <a:lstStyle/>
+          <a:p>
+            <a:pPr algn="ctr"/>
+          </a:p>
+        </p:txBody>
+      </p:sp>
+      <p:sp>
+        <p:nvSpPr>
+          <p:cNvPr id="4" name="Rounded Rectangle 3"/>
+          <p:cNvSpPr/>
+          <p:nvPr/>
+        </p:nvSpPr>
+        <p:spPr>
+          <a:xfrm>
+            <a:off x="731520" y="384048"/>
+            <a:ext cx="2011680" cy="292608"/>
           </a:xfrm>
           <a:prstGeom prst="roundRect">
             <a:avLst/>
@@ -4867,13 +4983,13 @@
           </a:fontRef>
         </p:style>
         <p:txBody>
-          <a:bodyPr rtlCol="0" anchor="ctr" wrap="none"/>
+          <a:bodyPr rtlCol="0" anchor="ctr"/>
           <a:lstStyle/>
           <a:p>
             <a:pPr algn="ctr">
-              <a:defRPr sz="1100" b="1">
-                <a:solidFill>
-                  <a:srgbClr val="2563EB"/>
+              <a:defRPr sz="1000" b="1">
+                <a:solidFill>
+                  <a:srgbClr val="1D4ED8"/>
                 </a:solidFill>
                 <a:latin typeface="微软雅黑"/>
               </a:defRPr>
@@ -4886,14 +5002,14 @@
       </p:sp>
       <p:sp>
         <p:nvSpPr>
-          <p:cNvPr id="3" name="TextBox 2"/>
+          <p:cNvPr id="5" name="TextBox 4"/>
           <p:cNvSpPr txBox="1"/>
           <p:nvPr/>
         </p:nvSpPr>
         <p:spPr>
           <a:xfrm>
-            <a:off x="731520" y="777240"/>
-            <a:ext cx="10515600" cy="548640"/>
+            <a:off x="731520" y="749808"/>
+            <a:ext cx="10698480" cy="777240"/>
           </a:xfrm>
           <a:prstGeom prst="rect">
             <a:avLst/>
@@ -4907,7 +5023,7 @@
           <a:lstStyle/>
           <a:p>
             <a:pPr>
-              <a:defRPr sz="2200" b="1">
+              <a:defRPr sz="2100" b="1">
                 <a:solidFill>
                   <a:srgbClr val="0F172A"/>
                 </a:solidFill>
@@ -4915,43 +5031,43 @@
               </a:defRPr>
             </a:pPr>
             <a:r>
-              <a:t>推动 Service BOM 智能化向更多领域纵深演进</a:t>
+              <a:t>推动 Service BOM 智能化向全机型、全专业纵深演进</a:t>
             </a:r>
           </a:p>
           <a:p>
             <a:pPr>
               <a:spcBef>
-                <a:spcPts val="400"/>
+                <a:spcPts val="300"/>
               </a:spcBef>
-              <a:defRPr sz="1200">
-                <a:solidFill>
-                  <a:srgbClr val="64748B"/>
-                </a:solidFill>
-                <a:latin typeface="微软雅黑"/>
-              </a:defRPr>
-            </a:pPr>
-            <a:r>
-              <a:t>从变桨系统单点突破，扩展至风电机组全生命周期备件资产数字孪生</a:t>
-            </a:r>
-          </a:p>
-        </p:txBody>
-      </p:sp>
-      <p:sp>
-        <p:nvSpPr>
-          <p:cNvPr id="4" name="Rounded Rectangle 3"/>
+              <a:defRPr sz="1100">
+                <a:solidFill>
+                  <a:srgbClr val="475569"/>
+                </a:solidFill>
+                <a:latin typeface="微软雅黑"/>
+              </a:defRPr>
+            </a:pPr>
+            <a:r>
+              <a:t>从变桨系统单点突破，逐步构建风电机组全生命周期运维备件数字资产图谱</a:t>
+            </a:r>
+          </a:p>
+        </p:txBody>
+      </p:sp>
+      <p:sp>
+        <p:nvSpPr>
+          <p:cNvPr id="6" name="Rounded Rectangle 5"/>
           <p:cNvSpPr/>
           <p:nvPr/>
         </p:nvSpPr>
         <p:spPr>
           <a:xfrm>
-            <a:off x="731520" y="1645920"/>
-            <a:ext cx="3474720" cy="4663440"/>
+            <a:off x="731520" y="1691640"/>
+            <a:ext cx="3474720" cy="4572000"/>
           </a:xfrm>
           <a:prstGeom prst="roundRect">
             <a:avLst/>
           </a:prstGeom>
           <a:solidFill>
-            <a:srgbClr val="F8FAFC"/>
+            <a:srgbClr val="FFFFFF"/>
           </a:solidFill>
           <a:ln w="12700">
             <a:solidFill>
@@ -4983,20 +5099,20 @@
       </p:sp>
       <p:sp>
         <p:nvSpPr>
-          <p:cNvPr id="5" name="Rectangle 4"/>
+          <p:cNvPr id="7" name="Rounded Rectangle 6"/>
           <p:cNvSpPr/>
           <p:nvPr/>
         </p:nvSpPr>
         <p:spPr>
           <a:xfrm>
-            <a:off x="731520" y="1645920"/>
+            <a:off x="731520" y="1691640"/>
             <a:ext cx="3474720" cy="91440"/>
           </a:xfrm>
-          <a:prstGeom prst="rect">
-            <a:avLst/>
-          </a:prstGeom>
-          <a:solidFill>
-            <a:srgbClr val="2563EB"/>
+          <a:prstGeom prst="roundRect">
+            <a:avLst/>
+          </a:prstGeom>
+          <a:solidFill>
+            <a:srgbClr val="1D4ED8"/>
           </a:solidFill>
           <a:ln>
             <a:noFill/>
@@ -5026,7 +5142,7 @@
       </p:sp>
       <p:sp>
         <p:nvSpPr>
-          <p:cNvPr id="6" name="TextBox 5"/>
+          <p:cNvPr id="8" name="TextBox 7"/>
           <p:cNvSpPr txBox="1"/>
           <p:nvPr/>
         </p:nvSpPr>
@@ -5049,13 +5165,13 @@
             <a:pPr>
               <a:defRPr sz="1500" b="1">
                 <a:solidFill>
-                  <a:srgbClr val="0F172A"/>
-                </a:solidFill>
-                <a:latin typeface="微软雅黑"/>
-              </a:defRPr>
-            </a:pPr>
-            <a:r>
-              <a:t>1. 子系统全覆盖推广</a:t>
+                  <a:srgbClr val="1E3A8A"/>
+                </a:solidFill>
+                <a:latin typeface="微软雅黑"/>
+              </a:defRPr>
+            </a:pPr>
+            <a:r>
+              <a:t>Phase 1: 全专业子系统覆盖</a:t>
             </a:r>
           </a:p>
           <a:p>
@@ -5065,7 +5181,7 @@
               </a:spcBef>
               <a:defRPr sz="1100">
                 <a:solidFill>
-                  <a:srgbClr val="64748B"/>
+                  <a:srgbClr val="475569"/>
                 </a:solidFill>
                 <a:latin typeface="微软雅黑"/>
               </a:defRPr>
@@ -5081,7 +5197,7 @@
               </a:spcBef>
               <a:defRPr sz="1100">
                 <a:solidFill>
-                  <a:srgbClr val="64748B"/>
+                  <a:srgbClr val="475569"/>
                 </a:solidFill>
                 <a:latin typeface="微软雅黑"/>
               </a:defRPr>
@@ -5097,13 +5213,13 @@
               </a:spcBef>
               <a:defRPr sz="1100">
                 <a:solidFill>
-                  <a:srgbClr val="64748B"/>
-                </a:solidFill>
-                <a:latin typeface="微软雅黑"/>
-              </a:defRPr>
-            </a:pPr>
-            <a:r>
-              <a:t>✔  建立风电机组全机型各专业子系统标准化 BOM 库</a:t>
+                  <a:srgbClr val="475569"/>
+                </a:solidFill>
+                <a:latin typeface="微软雅黑"/>
+              </a:defRPr>
+            </a:pPr>
+            <a:r>
+              <a:t>✔  建立风机全机型标准化 BOM 库，统一格式基准</a:t>
             </a:r>
           </a:p>
           <a:p>
@@ -5113,7 +5229,7 @@
               </a:spcBef>
               <a:defRPr sz="1100">
                 <a:solidFill>
-                  <a:srgbClr val="64748B"/>
+                  <a:srgbClr val="475569"/>
                 </a:solidFill>
                 <a:latin typeface="微软雅黑"/>
               </a:defRPr>
@@ -5126,20 +5242,20 @@
       </p:sp>
       <p:sp>
         <p:nvSpPr>
-          <p:cNvPr id="7" name="Rounded Rectangle 6"/>
+          <p:cNvPr id="9" name="Rounded Rectangle 8"/>
           <p:cNvSpPr/>
           <p:nvPr/>
         </p:nvSpPr>
         <p:spPr>
           <a:xfrm>
-            <a:off x="4343400" y="1645920"/>
-            <a:ext cx="3474720" cy="4663440"/>
+            <a:off x="4343400" y="1691640"/>
+            <a:ext cx="3474720" cy="4572000"/>
           </a:xfrm>
           <a:prstGeom prst="roundRect">
             <a:avLst/>
           </a:prstGeom>
           <a:solidFill>
-            <a:srgbClr val="F8FAFC"/>
+            <a:srgbClr val="FFFFFF"/>
           </a:solidFill>
           <a:ln w="12700">
             <a:solidFill>
@@ -5171,20 +5287,20 @@
       </p:sp>
       <p:sp>
         <p:nvSpPr>
-          <p:cNvPr id="8" name="Rectangle 7"/>
+          <p:cNvPr id="10" name="Rounded Rectangle 9"/>
           <p:cNvSpPr/>
           <p:nvPr/>
         </p:nvSpPr>
         <p:spPr>
           <a:xfrm>
-            <a:off x="4343400" y="1645920"/>
+            <a:off x="4343400" y="1691640"/>
             <a:ext cx="3474720" cy="91440"/>
           </a:xfrm>
-          <a:prstGeom prst="rect">
-            <a:avLst/>
-          </a:prstGeom>
-          <a:solidFill>
-            <a:srgbClr val="10B981"/>
+          <a:prstGeom prst="roundRect">
+            <a:avLst/>
+          </a:prstGeom>
+          <a:solidFill>
+            <a:srgbClr val="0EA5E9"/>
           </a:solidFill>
           <a:ln>
             <a:noFill/>
@@ -5214,7 +5330,7 @@
       </p:sp>
       <p:sp>
         <p:nvSpPr>
-          <p:cNvPr id="9" name="TextBox 8"/>
+          <p:cNvPr id="11" name="TextBox 10"/>
           <p:cNvSpPr txBox="1"/>
           <p:nvPr/>
         </p:nvSpPr>
@@ -5237,13 +5353,13 @@
             <a:pPr>
               <a:defRPr sz="1500" b="1">
                 <a:solidFill>
-                  <a:srgbClr val="0F172A"/>
-                </a:solidFill>
-                <a:latin typeface="微软雅黑"/>
-              </a:defRPr>
-            </a:pPr>
-            <a:r>
-              <a:t>2. 打通 PLM / ERP 数据底座</a:t>
+                  <a:srgbClr val="1E3A8A"/>
+                </a:solidFill>
+                <a:latin typeface="微软雅黑"/>
+              </a:defRPr>
+            </a:pPr>
+            <a:r>
+              <a:t>Phase 2: 打通 PLM / ERP 数据底座</a:t>
             </a:r>
           </a:p>
           <a:p>
@@ -5253,7 +5369,7 @@
               </a:spcBef>
               <a:defRPr sz="1100">
                 <a:solidFill>
-                  <a:srgbClr val="64748B"/>
+                  <a:srgbClr val="475569"/>
                 </a:solidFill>
                 <a:latin typeface="微软雅黑"/>
               </a:defRPr>
@@ -5269,7 +5385,7 @@
               </a:spcBef>
               <a:defRPr sz="1100">
                 <a:solidFill>
-                  <a:srgbClr val="64748B"/>
+                  <a:srgbClr val="475569"/>
                 </a:solidFill>
                 <a:latin typeface="微软雅黑"/>
               </a:defRPr>
@@ -5285,7 +5401,7 @@
               </a:spcBef>
               <a:defRPr sz="1100">
                 <a:solidFill>
-                  <a:srgbClr val="64748B"/>
+                  <a:srgbClr val="475569"/>
                 </a:solidFill>
                 <a:latin typeface="微软雅黑"/>
               </a:defRPr>
@@ -5301,7 +5417,7 @@
               </a:spcBef>
               <a:defRPr sz="1100">
                 <a:solidFill>
-                  <a:srgbClr val="64748B"/>
+                  <a:srgbClr val="475569"/>
                 </a:solidFill>
                 <a:latin typeface="微软雅黑"/>
               </a:defRPr>
@@ -5314,20 +5430,20 @@
       </p:sp>
       <p:sp>
         <p:nvSpPr>
-          <p:cNvPr id="10" name="Rounded Rectangle 9"/>
+          <p:cNvPr id="12" name="Rounded Rectangle 11"/>
           <p:cNvSpPr/>
           <p:nvPr/>
         </p:nvSpPr>
         <p:spPr>
           <a:xfrm>
-            <a:off x="7955280" y="1645920"/>
-            <a:ext cx="3474720" cy="4663440"/>
+            <a:off x="7955280" y="1691640"/>
+            <a:ext cx="3474720" cy="4572000"/>
           </a:xfrm>
           <a:prstGeom prst="roundRect">
             <a:avLst/>
           </a:prstGeom>
           <a:solidFill>
-            <a:srgbClr val="F8FAFC"/>
+            <a:srgbClr val="FFFFFF"/>
           </a:solidFill>
           <a:ln w="12700">
             <a:solidFill>
@@ -5359,20 +5475,20 @@
       </p:sp>
       <p:sp>
         <p:nvSpPr>
-          <p:cNvPr id="11" name="Rectangle 10"/>
+          <p:cNvPr id="13" name="Rounded Rectangle 12"/>
           <p:cNvSpPr/>
           <p:nvPr/>
         </p:nvSpPr>
         <p:spPr>
           <a:xfrm>
-            <a:off x="7955280" y="1645920"/>
+            <a:off x="7955280" y="1691640"/>
             <a:ext cx="3474720" cy="91440"/>
           </a:xfrm>
-          <a:prstGeom prst="rect">
-            <a:avLst/>
-          </a:prstGeom>
-          <a:solidFill>
-            <a:srgbClr val="9333EA"/>
+          <a:prstGeom prst="roundRect">
+            <a:avLst/>
+          </a:prstGeom>
+          <a:solidFill>
+            <a:srgbClr val="10B981"/>
           </a:solidFill>
           <a:ln>
             <a:noFill/>
@@ -5402,7 +5518,7 @@
       </p:sp>
       <p:sp>
         <p:nvSpPr>
-          <p:cNvPr id="12" name="TextBox 11"/>
+          <p:cNvPr id="14" name="TextBox 13"/>
           <p:cNvSpPr txBox="1"/>
           <p:nvPr/>
         </p:nvSpPr>
@@ -5425,13 +5541,13 @@
             <a:pPr>
               <a:defRPr sz="1500" b="1">
                 <a:solidFill>
-                  <a:srgbClr val="0F172A"/>
-                </a:solidFill>
-                <a:latin typeface="微软雅黑"/>
-              </a:defRPr>
-            </a:pPr>
-            <a:r>
-              <a:t>3. 多模态与图纸逆向识别</a:t>
+                  <a:srgbClr val="1E3A8A"/>
+                </a:solidFill>
+                <a:latin typeface="微软雅黑"/>
+              </a:defRPr>
+            </a:pPr>
+            <a:r>
+              <a:t>Phase 3: 多模态工程图纸逆向识别</a:t>
             </a:r>
           </a:p>
           <a:p>
@@ -5441,7 +5557,7 @@
               </a:spcBef>
               <a:defRPr sz="1100">
                 <a:solidFill>
-                  <a:srgbClr val="64748B"/>
+                  <a:srgbClr val="475569"/>
                 </a:solidFill>
                 <a:latin typeface="微软雅黑"/>
               </a:defRPr>
@@ -5457,7 +5573,7 @@
               </a:spcBef>
               <a:defRPr sz="1100">
                 <a:solidFill>
-                  <a:srgbClr val="64748B"/>
+                  <a:srgbClr val="475569"/>
                 </a:solidFill>
                 <a:latin typeface="微软雅黑"/>
               </a:defRPr>
@@ -5473,13 +5589,13 @@
               </a:spcBef>
               <a:defRPr sz="1100">
                 <a:solidFill>
-                  <a:srgbClr val="64748B"/>
-                </a:solidFill>
-                <a:latin typeface="微软雅黑"/>
-              </a:defRPr>
-            </a:pPr>
-            <a:r>
-              <a:t>✔  自动识别图纸表格并逆向生成可编辑 BOM 行</a:t>
+                  <a:srgbClr val="475569"/>
+                </a:solidFill>
+                <a:latin typeface="微软雅黑"/>
+              </a:defRPr>
+            </a:pPr>
+            <a:r>
+              <a:t>✔  自动识别图纸表格并秒级逆向生成可编辑 BOM</a:t>
             </a:r>
           </a:p>
           <a:p>
@@ -5489,13 +5605,13 @@
               </a:spcBef>
               <a:defRPr sz="1100">
                 <a:solidFill>
-                  <a:srgbClr val="64748B"/>
-                </a:solidFill>
-                <a:latin typeface="微软雅黑"/>
-              </a:defRPr>
-            </a:pPr>
-            <a:r>
-              <a:t>✔  真正实现从纸质图纸到数字物料资产的秒级转化</a:t>
+                  <a:srgbClr val="475569"/>
+                </a:solidFill>
+                <a:latin typeface="微软雅黑"/>
+              </a:defRPr>
+            </a:pPr>
+            <a:r>
+              <a:t>✔  真正实现从纸质图纸到数字物料资产的快速转化</a:t>
             </a:r>
           </a:p>
         </p:txBody>
@@ -5533,7 +5649,7 @@
             <a:avLst/>
           </a:prstGeom>
           <a:solidFill>
-            <a:srgbClr val="0F172A"/>
+            <a:srgbClr val="090D16"/>
           </a:solidFill>
           <a:ln>
             <a:noFill/>
@@ -5570,13 +5686,13 @@
         <p:spPr>
           <a:xfrm>
             <a:off x="0" y="0"/>
-            <a:ext cx="12191695" cy="109728"/>
+            <a:ext cx="12191695" cy="91440"/>
           </a:xfrm>
           <a:prstGeom prst="rect">
             <a:avLst/>
           </a:prstGeom>
           <a:solidFill>
-            <a:srgbClr val="2563EB"/>
+            <a:srgbClr val="0EA5E9"/>
           </a:solidFill>
           <a:ln>
             <a:noFill/>
@@ -5606,14 +5722,59 @@
       </p:sp>
       <p:sp>
         <p:nvSpPr>
-          <p:cNvPr id="4" name="TextBox 3"/>
+          <p:cNvPr id="4" name="Rounded Rectangle 3"/>
+          <p:cNvSpPr/>
+          <p:nvPr/>
+        </p:nvSpPr>
+        <p:spPr>
+          <a:xfrm>
+            <a:off x="731520" y="914400"/>
+            <a:ext cx="10728655" cy="5029200"/>
+          </a:xfrm>
+          <a:prstGeom prst="roundRect">
+            <a:avLst/>
+          </a:prstGeom>
+          <a:solidFill>
+            <a:srgbClr val="0F172A"/>
+          </a:solidFill>
+          <a:ln w="19050">
+            <a:solidFill>
+              <a:srgbClr val="1E293B"/>
+            </a:solidFill>
+          </a:ln>
+        </p:spPr>
+        <p:style>
+          <a:lnRef idx="1">
+            <a:schemeClr val="accent1"/>
+          </a:lnRef>
+          <a:fillRef idx="3">
+            <a:schemeClr val="accent1"/>
+          </a:fillRef>
+          <a:effectRef idx="2">
+            <a:schemeClr val="accent1"/>
+          </a:effectRef>
+          <a:fontRef idx="minor">
+            <a:schemeClr val="lt1"/>
+          </a:fontRef>
+        </p:style>
+        <p:txBody>
+          <a:bodyPr rtlCol="0" anchor="ctr"/>
+          <a:lstStyle/>
+          <a:p>
+            <a:pPr algn="ctr"/>
+          </a:p>
+        </p:txBody>
+      </p:sp>
+      <p:sp>
+        <p:nvSpPr>
+          <p:cNvPr id="5" name="TextBox 4"/>
           <p:cNvSpPr txBox="1"/>
           <p:nvPr/>
         </p:nvSpPr>
         <p:spPr>
           <a:xfrm>
-            <a:off x="1097280" y="2011680"/>
-            <a:ext cx="10058400" cy="2926080"/>
+            <a:off x="1280160" y="1645920"/>
+            <a:ext cx="9601200" cy="2377440"/>
           </a:xfrm>
           <a:prstGeom prst="rect">
             <a:avLst/>
@@ -5635,7 +5796,7 @@
               </a:defRPr>
             </a:pPr>
             <a:r>
-              <a:t>凝心聚力 · 智领工业未来</a:t>
+              <a:t>凝心聚力 · 智领风电未来</a:t>
             </a:r>
           </a:p>
           <a:p>
@@ -5645,7 +5806,7 @@
               </a:spcBef>
               <a:defRPr sz="2400" b="1">
                 <a:solidFill>
-                  <a:srgbClr val="60A5FA"/>
+                  <a:srgbClr val="38BDF8"/>
                 </a:solidFill>
                 <a:latin typeface="微软雅黑"/>
               </a:defRPr>
@@ -5657,9 +5818,9 @@
           <a:p>
             <a:pPr>
               <a:spcBef>
-                <a:spcPts val="2000"/>
+                <a:spcPts val="1800"/>
               </a:spcBef>
-              <a:defRPr sz="1400">
+              <a:defRPr sz="1350">
                 <a:solidFill>
                   <a:srgbClr val="94A3B8"/>
                 </a:solidFill>
@@ -5667,31 +5828,31 @@
               </a:defRPr>
             </a:pPr>
             <a:r>
-              <a:t>欢迎科室同仁登录体验 Service BOM 工作站，多提宝贵需求与反馈，携手推进部门数字化转型！</a:t>
-            </a:r>
-          </a:p>
-        </p:txBody>
-      </p:sp>
-      <p:sp>
-        <p:nvSpPr>
-          <p:cNvPr id="5" name="Rounded Rectangle 4"/>
+              <a:t>欢迎科室同仁登录体验 Service BOM 智能工作站，多提宝贵需求与反馈，携手推进部门数字化转型！</a:t>
+            </a:r>
+          </a:p>
+        </p:txBody>
+      </p:sp>
+      <p:sp>
+        <p:nvSpPr>
+          <p:cNvPr id="6" name="Rounded Rectangle 5"/>
           <p:cNvSpPr/>
           <p:nvPr/>
         </p:nvSpPr>
         <p:spPr>
           <a:xfrm>
-            <a:off x="1097280" y="4389120"/>
-            <a:ext cx="5486400" cy="914400"/>
+            <a:off x="1280160" y="4297680"/>
+            <a:ext cx="6858000" cy="914400"/>
           </a:xfrm>
           <a:prstGeom prst="roundRect">
             <a:avLst/>
           </a:prstGeom>
           <a:solidFill>
-            <a:srgbClr val="1E293B"/>
+            <a:srgbClr val="172554"/>
           </a:solidFill>
           <a:ln>
             <a:solidFill>
-              <a:srgbClr val="2563EB"/>
+              <a:srgbClr val="0EA5E9"/>
             </a:solidFill>
           </a:ln>
         </p:spPr>
@@ -5728,17 +5889,17 @@
           <a:p>
             <a:pPr>
               <a:spcBef>
-                <a:spcPts val="200"/>
+                <a:spcPts val="300"/>
               </a:spcBef>
               <a:defRPr sz="1100">
                 <a:solidFill>
-                  <a:srgbClr val="94A3B8"/>
-                </a:solidFill>
-                <a:latin typeface="微软雅黑"/>
-              </a:defRPr>
-            </a:pPr>
-            <a:r>
-              <a:t>欢迎就技术细节、现场痛点、推广场景展开深入探讨与交流</a:t>
+                  <a:srgbClr val="BAE6FD"/>
+                </a:solidFill>
+                <a:latin typeface="微软雅黑"/>
+              </a:defRPr>
+            </a:pPr>
+            <a:r>
+              <a:t>欢迎就技术细节、现场痛点、子系统扩展场景展开深入探讨与交流</a:t>
             </a:r>
           </a:p>
         </p:txBody>
@@ -5763,14 +5924,100 @@
       <p:grpSpPr/>
       <p:sp>
         <p:nvSpPr>
-          <p:cNvPr id="2" name="Rounded Rectangle 1"/>
+          <p:cNvPr id="2" name="Rectangle 1"/>
           <p:cNvSpPr/>
           <p:nvPr/>
         </p:nvSpPr>
         <p:spPr>
           <a:xfrm>
-            <a:off x="731520" y="411480"/>
-            <a:ext cx="2011680" cy="320040"/>
+            <a:off x="0" y="0"/>
+            <a:ext cx="12191695" cy="6858000"/>
+          </a:xfrm>
+          <a:prstGeom prst="rect">
+            <a:avLst/>
+          </a:prstGeom>
+          <a:solidFill>
+            <a:srgbClr val="F8FAFC"/>
+          </a:solidFill>
+          <a:ln>
+            <a:noFill/>
+          </a:ln>
+        </p:spPr>
+        <p:style>
+          <a:lnRef idx="1">
+            <a:schemeClr val="accent1"/>
+          </a:lnRef>
+          <a:fillRef idx="3">
+            <a:schemeClr val="accent1"/>
+          </a:fillRef>
+          <a:effectRef idx="2">
+            <a:schemeClr val="accent1"/>
+          </a:effectRef>
+          <a:fontRef idx="minor">
+            <a:schemeClr val="lt1"/>
+          </a:fontRef>
+        </p:style>
+        <p:txBody>
+          <a:bodyPr rtlCol="0" anchor="ctr"/>
+          <a:lstStyle/>
+          <a:p>
+            <a:pPr algn="ctr"/>
+          </a:p>
+        </p:txBody>
+      </p:sp>
+      <p:sp>
+        <p:nvSpPr>
+          <p:cNvPr id="3" name="Rectangle 2"/>
+          <p:cNvSpPr/>
+          <p:nvPr/>
+        </p:nvSpPr>
+        <p:spPr>
+          <a:xfrm>
+            <a:off x="0" y="0"/>
+            <a:ext cx="12191695" cy="73152"/>
+          </a:xfrm>
+          <a:prstGeom prst="rect">
+            <a:avLst/>
+          </a:prstGeom>
+          <a:solidFill>
+            <a:srgbClr val="1D4ED8"/>
+          </a:solidFill>
+          <a:ln>
+            <a:noFill/>
+          </a:ln>
+        </p:spPr>
+        <p:style>
+          <a:lnRef idx="1">
+            <a:schemeClr val="accent1"/>
+          </a:lnRef>
+          <a:fillRef idx="3">
+            <a:schemeClr val="accent1"/>
+          </a:fillRef>
+          <a:effectRef idx="2">
+            <a:schemeClr val="accent1"/>
+          </a:effectRef>
+          <a:fontRef idx="minor">
+            <a:schemeClr val="lt1"/>
+          </a:fontRef>
+        </p:style>
+        <p:txBody>
+          <a:bodyPr rtlCol="0" anchor="ctr"/>
+          <a:lstStyle/>
+          <a:p>
+            <a:pPr algn="ctr"/>
+          </a:p>
+        </p:txBody>
+      </p:sp>
+      <p:sp>
+        <p:nvSpPr>
+          <p:cNvPr id="4" name="Rounded Rectangle 3"/>
+          <p:cNvSpPr/>
+          <p:nvPr/>
+        </p:nvSpPr>
+        <p:spPr>
+          <a:xfrm>
+            <a:off x="731520" y="384048"/>
+            <a:ext cx="2011680" cy="292608"/>
           </a:xfrm>
           <a:prstGeom prst="roundRect">
             <a:avLst/>
@@ -5799,13 +6046,13 @@
           </a:fontRef>
         </p:style>
         <p:txBody>
-          <a:bodyPr rtlCol="0" anchor="ctr" wrap="none"/>
+          <a:bodyPr rtlCol="0" anchor="ctr"/>
           <a:lstStyle/>
           <a:p>
             <a:pPr algn="ctr">
-              <a:defRPr sz="1100" b="1">
-                <a:solidFill>
-                  <a:srgbClr val="2563EB"/>
+              <a:defRPr sz="1000" b="1">
+                <a:solidFill>
+                  <a:srgbClr val="1D4ED8"/>
                 </a:solidFill>
                 <a:latin typeface="微软雅黑"/>
               </a:defRPr>
@@ -5818,14 +6065,14 @@
       </p:sp>
       <p:sp>
         <p:nvSpPr>
-          <p:cNvPr id="3" name="TextBox 2"/>
+          <p:cNvPr id="5" name="TextBox 4"/>
           <p:cNvSpPr txBox="1"/>
           <p:nvPr/>
         </p:nvSpPr>
         <p:spPr>
           <a:xfrm>
-            <a:off x="731520" y="777240"/>
-            <a:ext cx="10515600" cy="548640"/>
+            <a:off x="731520" y="749808"/>
+            <a:ext cx="10698480" cy="777240"/>
           </a:xfrm>
           <a:prstGeom prst="rect">
             <a:avLst/>
@@ -5839,7 +6086,7 @@
           <a:lstStyle/>
           <a:p>
             <a:pPr>
-              <a:defRPr sz="2200" b="1">
+              <a:defRPr sz="2100" b="1">
                 <a:solidFill>
                   <a:srgbClr val="0F172A"/>
                 </a:solidFill>
@@ -5847,43 +6094,43 @@
               </a:defRPr>
             </a:pPr>
             <a:r>
-              <a:t>传统 Service BOM 编制与维护面临的四大核心堵点</a:t>
+              <a:t>传统 Service BOM 编制面临的四大“核心堵点”</a:t>
             </a:r>
           </a:p>
           <a:p>
             <a:pPr>
               <a:spcBef>
-                <a:spcPts val="400"/>
+                <a:spcPts val="300"/>
               </a:spcBef>
-              <a:defRPr sz="1200">
-                <a:solidFill>
-                  <a:srgbClr val="64748B"/>
-                </a:solidFill>
-                <a:latin typeface="微软雅黑"/>
-              </a:defRPr>
-            </a:pPr>
-            <a:r>
-              <a:t>碎片化非标输入、机械人工拆解与离线文件流转，严重制约运维备件响应效率</a:t>
-            </a:r>
-          </a:p>
-        </p:txBody>
-      </p:sp>
-      <p:sp>
-        <p:nvSpPr>
-          <p:cNvPr id="4" name="Rounded Rectangle 3"/>
+              <a:defRPr sz="1100">
+                <a:solidFill>
+                  <a:srgbClr val="475569"/>
+                </a:solidFill>
+                <a:latin typeface="微软雅黑"/>
+              </a:defRPr>
+            </a:pPr>
+            <a:r>
+              <a:t>海量备件描述非标、人工机械拆解费时费力、一物多码与离线协同失控</a:t>
+            </a:r>
+          </a:p>
+        </p:txBody>
+      </p:sp>
+      <p:sp>
+        <p:nvSpPr>
+          <p:cNvPr id="6" name="Rounded Rectangle 5"/>
           <p:cNvSpPr/>
           <p:nvPr/>
         </p:nvSpPr>
         <p:spPr>
           <a:xfrm>
-            <a:off x="731520" y="1645920"/>
-            <a:ext cx="2560320" cy="4663440"/>
+            <a:off x="731520" y="1691640"/>
+            <a:ext cx="5285232" cy="2103120"/>
           </a:xfrm>
           <a:prstGeom prst="roundRect">
             <a:avLst/>
           </a:prstGeom>
           <a:solidFill>
-            <a:srgbClr val="F8FAFC"/>
+            <a:srgbClr val="FFFFFF"/>
           </a:solidFill>
           <a:ln w="12700">
             <a:solidFill>
@@ -5915,20 +6162,20 @@
       </p:sp>
       <p:sp>
         <p:nvSpPr>
-          <p:cNvPr id="5" name="Rectangle 4"/>
+          <p:cNvPr id="7" name="Rounded Rectangle 6"/>
           <p:cNvSpPr/>
           <p:nvPr/>
         </p:nvSpPr>
         <p:spPr>
           <a:xfrm>
-            <a:off x="731520" y="1645920"/>
-            <a:ext cx="2560320" cy="73152"/>
-          </a:xfrm>
-          <a:prstGeom prst="rect">
-            <a:avLst/>
-          </a:prstGeom>
-          <a:solidFill>
-            <a:srgbClr val="EF4444"/>
+            <a:off x="731520" y="1691640"/>
+            <a:ext cx="109728" cy="2103120"/>
+          </a:xfrm>
+          <a:prstGeom prst="roundRect">
+            <a:avLst/>
+          </a:prstGeom>
+          <a:solidFill>
+            <a:srgbClr val="F43F5E"/>
           </a:solidFill>
           <a:ln>
             <a:noFill/>
@@ -5958,14 +6205,69 @@
       </p:sp>
       <p:sp>
         <p:nvSpPr>
-          <p:cNvPr id="6" name="TextBox 5"/>
+          <p:cNvPr id="8" name="Rounded Rectangle 7"/>
+          <p:cNvSpPr/>
+          <p:nvPr/>
+        </p:nvSpPr>
+        <p:spPr>
+          <a:xfrm>
+            <a:off x="1005840" y="1892808"/>
+            <a:ext cx="1280160" cy="256032"/>
+          </a:xfrm>
+          <a:prstGeom prst="roundRect">
+            <a:avLst/>
+          </a:prstGeom>
+          <a:solidFill>
+            <a:srgbClr val="FFF1F2"/>
+          </a:solidFill>
+          <a:ln w="12700">
+            <a:solidFill>
+              <a:srgbClr val="F43F5E"/>
+            </a:solidFill>
+          </a:ln>
+        </p:spPr>
+        <p:style>
+          <a:lnRef idx="1">
+            <a:schemeClr val="accent1"/>
+          </a:lnRef>
+          <a:fillRef idx="3">
+            <a:schemeClr val="accent1"/>
+          </a:fillRef>
+          <a:effectRef idx="2">
+            <a:schemeClr val="accent1"/>
+          </a:effectRef>
+          <a:fontRef idx="minor">
+            <a:schemeClr val="lt1"/>
+          </a:fontRef>
+        </p:style>
+        <p:txBody>
+          <a:bodyPr rtlCol="0" anchor="ctr"/>
+          <a:lstStyle/>
+          <a:p>
+            <a:pPr algn="ctr">
+              <a:defRPr sz="950" b="1">
+                <a:solidFill>
+                  <a:srgbClr val="F43F5E"/>
+                </a:solidFill>
+                <a:latin typeface="微软雅黑"/>
+              </a:defRPr>
+            </a:pPr>
+            <a:r>
+              <a:t>堵点 01 · 格式失控</a:t>
+            </a:r>
+          </a:p>
+        </p:txBody>
+      </p:sp>
+      <p:sp>
+        <p:nvSpPr>
+          <p:cNvPr id="9" name="TextBox 8"/>
           <p:cNvSpPr txBox="1"/>
           <p:nvPr/>
         </p:nvSpPr>
         <p:spPr>
           <a:xfrm>
-            <a:off x="868680" y="1828800"/>
-            <a:ext cx="2286000" cy="4297680"/>
+            <a:off x="1005840" y="2194560"/>
+            <a:ext cx="4709160" cy="1463040"/>
           </a:xfrm>
           <a:prstGeom prst="rect">
             <a:avLst/>
@@ -5979,7 +6281,7 @@
           <a:lstStyle/>
           <a:p>
             <a:pPr>
-              <a:defRPr sz="1400" b="1">
+              <a:defRPr sz="1500" b="1">
                 <a:solidFill>
                   <a:srgbClr val="0F172A"/>
                 </a:solidFill>
@@ -5987,91 +6289,43 @@
               </a:defRPr>
             </a:pPr>
             <a:r>
-              <a:t>01. 描述非标且词序混乱</a:t>
+              <a:t>描述非标且词序混乱</a:t>
             </a:r>
           </a:p>
           <a:p>
             <a:pPr>
               <a:spcBef>
-                <a:spcPts val="800"/>
+                <a:spcPts val="600"/>
               </a:spcBef>
               <a:defRPr sz="1100">
                 <a:solidFill>
-                  <a:srgbClr val="64748B"/>
-                </a:solidFill>
-                <a:latin typeface="微软雅黑"/>
-              </a:defRPr>
-            </a:pPr>
-            <a:r>
-              <a:t>• 现场运维人员习惯差异极大，词序随意颠倒</a:t>
-            </a:r>
-          </a:p>
-          <a:p>
-            <a:pPr>
-              <a:spcBef>
-                <a:spcPts val="800"/>
-              </a:spcBef>
-              <a:defRPr sz="1100">
-                <a:solidFill>
-                  <a:srgbClr val="64748B"/>
-                </a:solidFill>
-                <a:latin typeface="微软雅黑"/>
-              </a:defRPr>
-            </a:pPr>
-            <a:r>
-              <a:t>• 大量使用下划线、空格拼接，混杂冗余字符</a:t>
-            </a:r>
-          </a:p>
-          <a:p>
-            <a:pPr>
-              <a:spcBef>
-                <a:spcPts val="800"/>
-              </a:spcBef>
-              <a:defRPr sz="1100">
-                <a:solidFill>
-                  <a:srgbClr val="64748B"/>
-                </a:solidFill>
-                <a:latin typeface="微软雅黑"/>
-              </a:defRPr>
-            </a:pPr>
-            <a:r>
-              <a:t>• 如“变桨备件_传感器撞块_DBJ..._电力电子”</a:t>
-            </a:r>
-          </a:p>
-          <a:p>
-            <a:pPr>
-              <a:spcBef>
-                <a:spcPts val="800"/>
-              </a:spcBef>
-              <a:defRPr sz="1100">
-                <a:solidFill>
-                  <a:srgbClr val="64748B"/>
-                </a:solidFill>
-                <a:latin typeface="微软雅黑"/>
-              </a:defRPr>
-            </a:pPr>
-            <a:r>
-              <a:t>• 传统正则和关键词匹配极易失效、规则繁重</a:t>
-            </a:r>
-          </a:p>
-        </p:txBody>
-      </p:sp>
-      <p:sp>
-        <p:nvSpPr>
-          <p:cNvPr id="7" name="Rounded Rectangle 6"/>
+                  <a:srgbClr val="475569"/>
+                </a:solidFill>
+                <a:latin typeface="微软雅黑"/>
+              </a:defRPr>
+            </a:pPr>
+            <a:r>
+              <a:t>现场运维人员录入习惯随意，下划线、空格混杂拼接；名称、规格、厂商词序混乱颠倒（如“变桨备件_传感器撞块_DBJ..._电力电子”），传统正则匹配频频失效。</a:t>
+            </a:r>
+          </a:p>
+        </p:txBody>
+      </p:sp>
+      <p:sp>
+        <p:nvSpPr>
+          <p:cNvPr id="10" name="Rounded Rectangle 9"/>
           <p:cNvSpPr/>
           <p:nvPr/>
         </p:nvSpPr>
         <p:spPr>
           <a:xfrm>
-            <a:off x="3429000" y="1645920"/>
-            <a:ext cx="2560320" cy="4663440"/>
+            <a:off x="6172200" y="1691640"/>
+            <a:ext cx="5285232" cy="2103120"/>
           </a:xfrm>
           <a:prstGeom prst="roundRect">
             <a:avLst/>
           </a:prstGeom>
           <a:solidFill>
-            <a:srgbClr val="F8FAFC"/>
+            <a:srgbClr val="FFFFFF"/>
           </a:solidFill>
           <a:ln w="12700">
             <a:solidFill>
@@ -6103,16 +6357,16 @@
       </p:sp>
       <p:sp>
         <p:nvSpPr>
-          <p:cNvPr id="8" name="Rectangle 7"/>
+          <p:cNvPr id="11" name="Rounded Rectangle 10"/>
           <p:cNvSpPr/>
           <p:nvPr/>
         </p:nvSpPr>
         <p:spPr>
           <a:xfrm>
-            <a:off x="3429000" y="1645920"/>
-            <a:ext cx="2560320" cy="73152"/>
-          </a:xfrm>
-          <a:prstGeom prst="rect">
+            <a:off x="6172200" y="1691640"/>
+            <a:ext cx="109728" cy="2103120"/>
+          </a:xfrm>
+          <a:prstGeom prst="roundRect">
             <a:avLst/>
           </a:prstGeom>
           <a:solidFill>
@@ -6146,14 +6400,69 @@
       </p:sp>
       <p:sp>
         <p:nvSpPr>
-          <p:cNvPr id="9" name="TextBox 8"/>
+          <p:cNvPr id="12" name="Rounded Rectangle 11"/>
+          <p:cNvSpPr/>
+          <p:nvPr/>
+        </p:nvSpPr>
+        <p:spPr>
+          <a:xfrm>
+            <a:off x="6446520" y="1892808"/>
+            <a:ext cx="1280160" cy="256032"/>
+          </a:xfrm>
+          <a:prstGeom prst="roundRect">
+            <a:avLst/>
+          </a:prstGeom>
+          <a:solidFill>
+            <a:srgbClr val="FEF3C7"/>
+          </a:solidFill>
+          <a:ln w="12700">
+            <a:solidFill>
+              <a:srgbClr val="F59E0B"/>
+            </a:solidFill>
+          </a:ln>
+        </p:spPr>
+        <p:style>
+          <a:lnRef idx="1">
+            <a:schemeClr val="accent1"/>
+          </a:lnRef>
+          <a:fillRef idx="3">
+            <a:schemeClr val="accent1"/>
+          </a:fillRef>
+          <a:effectRef idx="2">
+            <a:schemeClr val="accent1"/>
+          </a:effectRef>
+          <a:fontRef idx="minor">
+            <a:schemeClr val="lt1"/>
+          </a:fontRef>
+        </p:style>
+        <p:txBody>
+          <a:bodyPr rtlCol="0" anchor="ctr"/>
+          <a:lstStyle/>
+          <a:p>
+            <a:pPr algn="ctr">
+              <a:defRPr sz="950" b="1">
+                <a:solidFill>
+                  <a:srgbClr val="F59E0B"/>
+                </a:solidFill>
+                <a:latin typeface="微软雅黑"/>
+              </a:defRPr>
+            </a:pPr>
+            <a:r>
+              <a:t>堵点 02 · 效率瓶颈</a:t>
+            </a:r>
+          </a:p>
+        </p:txBody>
+      </p:sp>
+      <p:sp>
+        <p:nvSpPr>
+          <p:cNvPr id="13" name="TextBox 12"/>
           <p:cNvSpPr txBox="1"/>
           <p:nvPr/>
         </p:nvSpPr>
         <p:spPr>
           <a:xfrm>
-            <a:off x="3566160" y="1828800"/>
-            <a:ext cx="2286000" cy="4297680"/>
+            <a:off x="6446520" y="2194560"/>
+            <a:ext cx="4709160" cy="1463040"/>
           </a:xfrm>
           <a:prstGeom prst="rect">
             <a:avLst/>
@@ -6167,7 +6476,7 @@
           <a:lstStyle/>
           <a:p>
             <a:pPr>
-              <a:defRPr sz="1400" b="1">
+              <a:defRPr sz="1500" b="1">
                 <a:solidFill>
                   <a:srgbClr val="0F172A"/>
                 </a:solidFill>
@@ -6175,91 +6484,43 @@
               </a:defRPr>
             </a:pPr>
             <a:r>
-              <a:t>02. 人工拆分耗时易错</a:t>
+              <a:t>人工拆分耗时且易错</a:t>
             </a:r>
           </a:p>
           <a:p>
             <a:pPr>
               <a:spcBef>
-                <a:spcPts val="800"/>
+                <a:spcPts val="600"/>
               </a:spcBef>
               <a:defRPr sz="1100">
                 <a:solidFill>
-                  <a:srgbClr val="64748B"/>
-                </a:solidFill>
-                <a:latin typeface="微软雅黑"/>
-              </a:defRPr>
-            </a:pPr>
-            <a:r>
-              <a:t>• 需工程师人工逐字拆分【名称/型号/厂商】</a:t>
-            </a:r>
-          </a:p>
-          <a:p>
-            <a:pPr>
-              <a:spcBef>
-                <a:spcPts val="800"/>
-              </a:spcBef>
-              <a:defRPr sz="1100">
-                <a:solidFill>
-                  <a:srgbClr val="64748B"/>
-                </a:solidFill>
-                <a:latin typeface="微软雅黑"/>
-              </a:defRPr>
-            </a:pPr>
-            <a:r>
-              <a:t>• 单台机组数百项物料，录入如同枯燥“体力劳动”</a:t>
-            </a:r>
-          </a:p>
-          <a:p>
-            <a:pPr>
-              <a:spcBef>
-                <a:spcPts val="800"/>
-              </a:spcBef>
-              <a:defRPr sz="1100">
-                <a:solidFill>
-                  <a:srgbClr val="64748B"/>
-                </a:solidFill>
-                <a:latin typeface="微软雅黑"/>
-              </a:defRPr>
-            </a:pPr>
-            <a:r>
-              <a:t>• 连续人工录入极易漏填规格、贴错图号</a:t>
-            </a:r>
-          </a:p>
-          <a:p>
-            <a:pPr>
-              <a:spcBef>
-                <a:spcPts val="800"/>
-              </a:spcBef>
-              <a:defRPr sz="1100">
-                <a:solidFill>
-                  <a:srgbClr val="64748B"/>
-                </a:solidFill>
-                <a:latin typeface="微软雅黑"/>
-              </a:defRPr>
-            </a:pPr>
-            <a:r>
-              <a:t>• 编制一套子系统 BOM 往往需耗时数天时间</a:t>
-            </a:r>
-          </a:p>
-        </p:txBody>
-      </p:sp>
-      <p:sp>
-        <p:nvSpPr>
-          <p:cNvPr id="10" name="Rounded Rectangle 9"/>
+                  <a:srgbClr val="475569"/>
+                </a:solidFill>
+                <a:latin typeface="微软雅黑"/>
+              </a:defRPr>
+            </a:pPr>
+            <a:r>
+              <a:t>工程师不得不逐条人工剪切拆分【名称、规格型号、制造商】；单台机组数百项备件如同枯燥体力劳动，连续录入易疲劳漏填，编制一套 BOM 需耗费数天。</a:t>
+            </a:r>
+          </a:p>
+        </p:txBody>
+      </p:sp>
+      <p:sp>
+        <p:nvSpPr>
+          <p:cNvPr id="14" name="Rounded Rectangle 13"/>
           <p:cNvSpPr/>
           <p:nvPr/>
         </p:nvSpPr>
         <p:spPr>
           <a:xfrm>
-            <a:off x="6126480" y="1645920"/>
-            <a:ext cx="2560320" cy="4663440"/>
+            <a:off x="731520" y="3977639"/>
+            <a:ext cx="5285232" cy="2103120"/>
           </a:xfrm>
           <a:prstGeom prst="roundRect">
             <a:avLst/>
           </a:prstGeom>
           <a:solidFill>
-            <a:srgbClr val="F8FAFC"/>
+            <a:srgbClr val="FFFFFF"/>
           </a:solidFill>
           <a:ln w="12700">
             <a:solidFill>
@@ -6291,20 +6552,20 @@
       </p:sp>
       <p:sp>
         <p:nvSpPr>
-          <p:cNvPr id="11" name="Rectangle 10"/>
+          <p:cNvPr id="15" name="Rounded Rectangle 14"/>
           <p:cNvSpPr/>
           <p:nvPr/>
         </p:nvSpPr>
         <p:spPr>
           <a:xfrm>
-            <a:off x="6126480" y="1645920"/>
-            <a:ext cx="2560320" cy="73152"/>
-          </a:xfrm>
-          <a:prstGeom prst="rect">
-            <a:avLst/>
-          </a:prstGeom>
-          <a:solidFill>
-            <a:srgbClr val="EF4444"/>
+            <a:off x="731520" y="3977639"/>
+            <a:ext cx="109728" cy="2103120"/>
+          </a:xfrm>
+          <a:prstGeom prst="roundRect">
+            <a:avLst/>
+          </a:prstGeom>
+          <a:solidFill>
+            <a:srgbClr val="F43F5E"/>
           </a:solidFill>
           <a:ln>
             <a:noFill/>
@@ -6334,14 +6595,69 @@
       </p:sp>
       <p:sp>
         <p:nvSpPr>
-          <p:cNvPr id="12" name="TextBox 11"/>
+          <p:cNvPr id="16" name="Rounded Rectangle 15"/>
+          <p:cNvSpPr/>
+          <p:nvPr/>
+        </p:nvSpPr>
+        <p:spPr>
+          <a:xfrm>
+            <a:off x="1005840" y="4178807"/>
+            <a:ext cx="1280160" cy="256032"/>
+          </a:xfrm>
+          <a:prstGeom prst="roundRect">
+            <a:avLst/>
+          </a:prstGeom>
+          <a:solidFill>
+            <a:srgbClr val="FFF1F2"/>
+          </a:solidFill>
+          <a:ln w="12700">
+            <a:solidFill>
+              <a:srgbClr val="F43F5E"/>
+            </a:solidFill>
+          </a:ln>
+        </p:spPr>
+        <p:style>
+          <a:lnRef idx="1">
+            <a:schemeClr val="accent1"/>
+          </a:lnRef>
+          <a:fillRef idx="3">
+            <a:schemeClr val="accent1"/>
+          </a:fillRef>
+          <a:effectRef idx="2">
+            <a:schemeClr val="accent1"/>
+          </a:effectRef>
+          <a:fontRef idx="minor">
+            <a:schemeClr val="lt1"/>
+          </a:fontRef>
+        </p:style>
+        <p:txBody>
+          <a:bodyPr rtlCol="0" anchor="ctr"/>
+          <a:lstStyle/>
+          <a:p>
+            <a:pPr algn="ctr">
+              <a:defRPr sz="950" b="1">
+                <a:solidFill>
+                  <a:srgbClr val="F43F5E"/>
+                </a:solidFill>
+                <a:latin typeface="微软雅黑"/>
+              </a:defRPr>
+            </a:pPr>
+            <a:r>
+              <a:t>堵点 03 · 资产沉淀难</a:t>
+            </a:r>
+          </a:p>
+        </p:txBody>
+      </p:sp>
+      <p:sp>
+        <p:nvSpPr>
+          <p:cNvPr id="17" name="TextBox 16"/>
           <p:cNvSpPr txBox="1"/>
           <p:nvPr/>
         </p:nvSpPr>
         <p:spPr>
           <a:xfrm>
-            <a:off x="6263640" y="1828800"/>
-            <a:ext cx="2286000" cy="4297680"/>
+            <a:off x="1005840" y="4480559"/>
+            <a:ext cx="4709160" cy="1463040"/>
           </a:xfrm>
           <a:prstGeom prst="rect">
             <a:avLst/>
@@ -6355,7 +6671,7 @@
           <a:lstStyle/>
           <a:p>
             <a:pPr>
-              <a:defRPr sz="1400" b="1">
+              <a:defRPr sz="1500" b="1">
                 <a:solidFill>
                   <a:srgbClr val="0F172A"/>
                 </a:solidFill>
@@ -6363,91 +6679,43 @@
               </a:defRPr>
             </a:pPr>
             <a:r>
-              <a:t>03. 一物多码与主库污染</a:t>
+              <a:t>“一物多码”污染主库</a:t>
             </a:r>
           </a:p>
           <a:p>
             <a:pPr>
               <a:spcBef>
-                <a:spcPts val="800"/>
+                <a:spcPts val="600"/>
               </a:spcBef>
               <a:defRPr sz="1100">
                 <a:solidFill>
-                  <a:srgbClr val="64748B"/>
-                </a:solidFill>
-                <a:latin typeface="微软雅黑"/>
-              </a:defRPr>
-            </a:pPr>
-            <a:r>
-              <a:t>• 同一元器件因写法不同被重复定义为新物料</a:t>
-            </a:r>
-          </a:p>
-          <a:p>
-            <a:pPr>
-              <a:spcBef>
-                <a:spcPts val="800"/>
-              </a:spcBef>
-              <a:defRPr sz="1100">
-                <a:solidFill>
-                  <a:srgbClr val="64748B"/>
-                </a:solidFill>
-                <a:latin typeface="微软雅黑"/>
-              </a:defRPr>
-            </a:pPr>
-            <a:r>
-              <a:t>• 例如“Siemens”与“西门子”并存导致数据孤岛</a:t>
-            </a:r>
-          </a:p>
-          <a:p>
-            <a:pPr>
-              <a:spcBef>
-                <a:spcPts val="800"/>
-              </a:spcBef>
-              <a:defRPr sz="1100">
-                <a:solidFill>
-                  <a:srgbClr val="64748B"/>
-                </a:solidFill>
-                <a:latin typeface="微软雅黑"/>
-              </a:defRPr>
-            </a:pPr>
-            <a:r>
-              <a:t>• 历史备件主库膨胀数万条，重码率居高不下</a:t>
-            </a:r>
-          </a:p>
-          <a:p>
-            <a:pPr>
-              <a:spcBef>
-                <a:spcPts val="800"/>
-              </a:spcBef>
-              <a:defRPr sz="1100">
-                <a:solidFill>
-                  <a:srgbClr val="64748B"/>
-                </a:solidFill>
-                <a:latin typeface="微软雅黑"/>
-              </a:defRPr>
-            </a:pPr>
-            <a:r>
-              <a:t>• 直接导致采购无法集采议价、库存积压严重</a:t>
-            </a:r>
-          </a:p>
-        </p:txBody>
-      </p:sp>
-      <p:sp>
-        <p:nvSpPr>
-          <p:cNvPr id="13" name="Rounded Rectangle 12"/>
+                  <a:srgbClr val="475569"/>
+                </a:solidFill>
+                <a:latin typeface="微软雅黑"/>
+              </a:defRPr>
+            </a:pPr>
+            <a:r>
+              <a:t>同一元器件因书写差异（如英文 Siemens 与中文西门子）被多次重复新建，备件主库膨胀数万条无序记录，直接导致采购无法集采议价、库存盲目积压。</a:t>
+            </a:r>
+          </a:p>
+        </p:txBody>
+      </p:sp>
+      <p:sp>
+        <p:nvSpPr>
+          <p:cNvPr id="18" name="Rounded Rectangle 17"/>
           <p:cNvSpPr/>
           <p:nvPr/>
         </p:nvSpPr>
         <p:spPr>
           <a:xfrm>
-            <a:off x="8823960" y="1645920"/>
-            <a:ext cx="2560320" cy="4663440"/>
+            <a:off x="6172200" y="3977639"/>
+            <a:ext cx="5285232" cy="2103120"/>
           </a:xfrm>
           <a:prstGeom prst="roundRect">
             <a:avLst/>
           </a:prstGeom>
           <a:solidFill>
-            <a:srgbClr val="F8FAFC"/>
+            <a:srgbClr val="FFFFFF"/>
           </a:solidFill>
           <a:ln w="12700">
             <a:solidFill>
@@ -6479,16 +6747,16 @@
       </p:sp>
       <p:sp>
         <p:nvSpPr>
-          <p:cNvPr id="14" name="Rectangle 13"/>
+          <p:cNvPr id="19" name="Rounded Rectangle 18"/>
           <p:cNvSpPr/>
           <p:nvPr/>
         </p:nvSpPr>
         <p:spPr>
           <a:xfrm>
-            <a:off x="8823960" y="1645920"/>
-            <a:ext cx="2560320" cy="73152"/>
-          </a:xfrm>
-          <a:prstGeom prst="rect">
+            <a:off x="6172200" y="3977639"/>
+            <a:ext cx="109728" cy="2103120"/>
+          </a:xfrm>
+          <a:prstGeom prst="roundRect">
             <a:avLst/>
           </a:prstGeom>
           <a:solidFill>
@@ -6522,14 +6790,69 @@
       </p:sp>
       <p:sp>
         <p:nvSpPr>
-          <p:cNvPr id="15" name="TextBox 14"/>
+          <p:cNvPr id="20" name="Rounded Rectangle 19"/>
+          <p:cNvSpPr/>
+          <p:nvPr/>
+        </p:nvSpPr>
+        <p:spPr>
+          <a:xfrm>
+            <a:off x="6446520" y="4178807"/>
+            <a:ext cx="1280160" cy="256032"/>
+          </a:xfrm>
+          <a:prstGeom prst="roundRect">
+            <a:avLst/>
+          </a:prstGeom>
+          <a:solidFill>
+            <a:srgbClr val="FEF3C7"/>
+          </a:solidFill>
+          <a:ln w="12700">
+            <a:solidFill>
+              <a:srgbClr val="F59E0B"/>
+            </a:solidFill>
+          </a:ln>
+        </p:spPr>
+        <p:style>
+          <a:lnRef idx="1">
+            <a:schemeClr val="accent1"/>
+          </a:lnRef>
+          <a:fillRef idx="3">
+            <a:schemeClr val="accent1"/>
+          </a:fillRef>
+          <a:effectRef idx="2">
+            <a:schemeClr val="accent1"/>
+          </a:effectRef>
+          <a:fontRef idx="minor">
+            <a:schemeClr val="lt1"/>
+          </a:fontRef>
+        </p:style>
+        <p:txBody>
+          <a:bodyPr rtlCol="0" anchor="ctr"/>
+          <a:lstStyle/>
+          <a:p>
+            <a:pPr algn="ctr">
+              <a:defRPr sz="950" b="1">
+                <a:solidFill>
+                  <a:srgbClr val="F59E0B"/>
+                </a:solidFill>
+                <a:latin typeface="微软雅黑"/>
+              </a:defRPr>
+            </a:pPr>
+            <a:r>
+              <a:t>堵点 04 · 协同风险</a:t>
+            </a:r>
+          </a:p>
+        </p:txBody>
+      </p:sp>
+      <p:sp>
+        <p:nvSpPr>
+          <p:cNvPr id="21" name="TextBox 20"/>
           <p:cNvSpPr txBox="1"/>
           <p:nvPr/>
         </p:nvSpPr>
         <p:spPr>
           <a:xfrm>
-            <a:off x="8961120" y="1828800"/>
-            <a:ext cx="2286000" cy="4297680"/>
+            <a:off x="6446520" y="4480559"/>
+            <a:ext cx="4709160" cy="1463040"/>
           </a:xfrm>
           <a:prstGeom prst="rect">
             <a:avLst/>
@@ -6543,7 +6866,7 @@
           <a:lstStyle/>
           <a:p>
             <a:pPr>
-              <a:defRPr sz="1400" b="1">
+              <a:defRPr sz="1500" b="1">
                 <a:solidFill>
                   <a:srgbClr val="0F172A"/>
                 </a:solidFill>
@@ -6551,71 +6874,23 @@
               </a:defRPr>
             </a:pPr>
             <a:r>
-              <a:t>04. 离线协同与版本失控</a:t>
+              <a:t>离线流转与版本失控</a:t>
             </a:r>
           </a:p>
           <a:p>
             <a:pPr>
               <a:spcBef>
-                <a:spcPts val="800"/>
+                <a:spcPts val="600"/>
               </a:spcBef>
               <a:defRPr sz="1100">
                 <a:solidFill>
-                  <a:srgbClr val="64748B"/>
-                </a:solidFill>
-                <a:latin typeface="微软雅黑"/>
-              </a:defRPr>
-            </a:pPr>
-            <a:r>
-              <a:t>• 传统模式依赖各工程师本地 Excel 文件拷贝互传</a:t>
-            </a:r>
-          </a:p>
-          <a:p>
-            <a:pPr>
-              <a:spcBef>
-                <a:spcPts val="800"/>
-              </a:spcBef>
-              <a:defRPr sz="1100">
-                <a:solidFill>
-                  <a:srgbClr val="64748B"/>
-                </a:solidFill>
-                <a:latin typeface="微软雅黑"/>
-              </a:defRPr>
-            </a:pPr>
-            <a:r>
-              <a:t>• 多机型交叉修改导致覆盖风险，变更无迹可查</a:t>
-            </a:r>
-          </a:p>
-          <a:p>
-            <a:pPr>
-              <a:spcBef>
-                <a:spcPts val="800"/>
-              </a:spcBef>
-              <a:defRPr sz="1100">
-                <a:solidFill>
-                  <a:srgbClr val="64748B"/>
-                </a:solidFill>
-                <a:latin typeface="微软雅黑"/>
-              </a:defRPr>
-            </a:pPr>
-            <a:r>
-              <a:t>• BOM 树状层级序号经常断裂或手工编排错乱</a:t>
-            </a:r>
-          </a:p>
-          <a:p>
-            <a:pPr>
-              <a:spcBef>
-                <a:spcPts val="800"/>
-              </a:spcBef>
-              <a:defRPr sz="1100">
-                <a:solidFill>
-                  <a:srgbClr val="64748B"/>
-                </a:solidFill>
-                <a:latin typeface="微软雅黑"/>
-              </a:defRPr>
-            </a:pPr>
-            <a:r>
-              <a:t>• 缺乏严格的工程锁与六级受控签字追溯机制</a:t>
+                  <a:srgbClr val="475569"/>
+                </a:solidFill>
+                <a:latin typeface="微软雅黑"/>
+              </a:defRPr>
+            </a:pPr>
+            <a:r>
+              <a:t>传统模式依赖本地 Excel 拷贝传阅，多机型交叉修改导致覆盖风险；BOM 树状层级序号经常断裂错乱，缺乏严格的工程锁与受控签字追溯机制。</a:t>
             </a:r>
           </a:p>
         </p:txBody>
@@ -6640,14 +6915,100 @@
       <p:grpSpPr/>
       <p:sp>
         <p:nvSpPr>
-          <p:cNvPr id="2" name="Rounded Rectangle 1"/>
+          <p:cNvPr id="2" name="Rectangle 1"/>
           <p:cNvSpPr/>
           <p:nvPr/>
         </p:nvSpPr>
         <p:spPr>
           <a:xfrm>
-            <a:off x="731520" y="411480"/>
-            <a:ext cx="2011680" cy="320040"/>
+            <a:off x="0" y="0"/>
+            <a:ext cx="12191695" cy="6858000"/>
+          </a:xfrm>
+          <a:prstGeom prst="rect">
+            <a:avLst/>
+          </a:prstGeom>
+          <a:solidFill>
+            <a:srgbClr val="F8FAFC"/>
+          </a:solidFill>
+          <a:ln>
+            <a:noFill/>
+          </a:ln>
+        </p:spPr>
+        <p:style>
+          <a:lnRef idx="1">
+            <a:schemeClr val="accent1"/>
+          </a:lnRef>
+          <a:fillRef idx="3">
+            <a:schemeClr val="accent1"/>
+          </a:fillRef>
+          <a:effectRef idx="2">
+            <a:schemeClr val="accent1"/>
+          </a:effectRef>
+          <a:fontRef idx="minor">
+            <a:schemeClr val="lt1"/>
+          </a:fontRef>
+        </p:style>
+        <p:txBody>
+          <a:bodyPr rtlCol="0" anchor="ctr"/>
+          <a:lstStyle/>
+          <a:p>
+            <a:pPr algn="ctr"/>
+          </a:p>
+        </p:txBody>
+      </p:sp>
+      <p:sp>
+        <p:nvSpPr>
+          <p:cNvPr id="3" name="Rectangle 2"/>
+          <p:cNvSpPr/>
+          <p:nvPr/>
+        </p:nvSpPr>
+        <p:spPr>
+          <a:xfrm>
+            <a:off x="0" y="0"/>
+            <a:ext cx="12191695" cy="73152"/>
+          </a:xfrm>
+          <a:prstGeom prst="rect">
+            <a:avLst/>
+          </a:prstGeom>
+          <a:solidFill>
+            <a:srgbClr val="1D4ED8"/>
+          </a:solidFill>
+          <a:ln>
+            <a:noFill/>
+          </a:ln>
+        </p:spPr>
+        <p:style>
+          <a:lnRef idx="1">
+            <a:schemeClr val="accent1"/>
+          </a:lnRef>
+          <a:fillRef idx="3">
+            <a:schemeClr val="accent1"/>
+          </a:fillRef>
+          <a:effectRef idx="2">
+            <a:schemeClr val="accent1"/>
+          </a:effectRef>
+          <a:fontRef idx="minor">
+            <a:schemeClr val="lt1"/>
+          </a:fontRef>
+        </p:style>
+        <p:txBody>
+          <a:bodyPr rtlCol="0" anchor="ctr"/>
+          <a:lstStyle/>
+          <a:p>
+            <a:pPr algn="ctr"/>
+          </a:p>
+        </p:txBody>
+      </p:sp>
+      <p:sp>
+        <p:nvSpPr>
+          <p:cNvPr id="4" name="Rounded Rectangle 3"/>
+          <p:cNvSpPr/>
+          <p:nvPr/>
+        </p:nvSpPr>
+        <p:spPr>
+          <a:xfrm>
+            <a:off x="731520" y="384048"/>
+            <a:ext cx="2011680" cy="292608"/>
           </a:xfrm>
           <a:prstGeom prst="roundRect">
             <a:avLst/>
@@ -6676,33 +7037,33 @@
           </a:fontRef>
         </p:style>
         <p:txBody>
-          <a:bodyPr rtlCol="0" anchor="ctr" wrap="none"/>
+          <a:bodyPr rtlCol="0" anchor="ctr"/>
           <a:lstStyle/>
           <a:p>
             <a:pPr algn="ctr">
-              <a:defRPr sz="1100" b="1">
-                <a:solidFill>
-                  <a:srgbClr val="2563EB"/>
-                </a:solidFill>
-                <a:latin typeface="微软雅黑"/>
-              </a:defRPr>
-            </a:pPr>
-            <a:r>
-              <a:t>02. 系统总体架构</a:t>
-            </a:r>
-          </a:p>
-        </p:txBody>
-      </p:sp>
-      <p:sp>
-        <p:nvSpPr>
-          <p:cNvPr id="3" name="TextBox 2"/>
+              <a:defRPr sz="1000" b="1">
+                <a:solidFill>
+                  <a:srgbClr val="1D4ED8"/>
+                </a:solidFill>
+                <a:latin typeface="微软雅黑"/>
+              </a:defRPr>
+            </a:pPr>
+            <a:r>
+              <a:t>02. 总体解决方案</a:t>
+            </a:r>
+          </a:p>
+        </p:txBody>
+      </p:sp>
+      <p:sp>
+        <p:nvSpPr>
+          <p:cNvPr id="5" name="TextBox 4"/>
           <p:cNvSpPr txBox="1"/>
           <p:nvPr/>
         </p:nvSpPr>
         <p:spPr>
           <a:xfrm>
-            <a:off x="731520" y="777240"/>
-            <a:ext cx="10515600" cy="548640"/>
+            <a:off x="731520" y="749808"/>
+            <a:ext cx="10698480" cy="777240"/>
           </a:xfrm>
           <a:prstGeom prst="rect">
             <a:avLst/>
@@ -6716,7 +7077,7 @@
           <a:lstStyle/>
           <a:p>
             <a:pPr>
-              <a:defRPr sz="2200" b="1">
+              <a:defRPr sz="2100" b="1">
                 <a:solidFill>
                   <a:srgbClr val="0F172A"/>
                 </a:solidFill>
@@ -6724,46 +7085,48 @@
               </a:defRPr>
             </a:pPr>
             <a:r>
-              <a:t>“AI 智能推断 + 主库治理 + 工程受控”端到端解决方案</a:t>
+              <a:t>“AI 智能推断 + 主库治理 + 工程受控”端到端全链路闭环</a:t>
             </a:r>
           </a:p>
           <a:p>
             <a:pPr>
               <a:spcBef>
-                <a:spcPts val="400"/>
+                <a:spcPts val="300"/>
               </a:spcBef>
-              <a:defRPr sz="1200">
-                <a:solidFill>
-                  <a:srgbClr val="64748B"/>
-                </a:solidFill>
-                <a:latin typeface="微软雅黑"/>
-              </a:defRPr>
-            </a:pPr>
-            <a:r>
-              <a:t>全流程覆盖物料录入、多模态解析、版本锁定与标准化 Excel 自动生成</a:t>
-            </a:r>
-          </a:p>
-        </p:txBody>
-      </p:sp>
-      <p:sp>
-        <p:nvSpPr>
-          <p:cNvPr id="4" name="Rounded Rectangle 3"/>
+              <a:defRPr sz="1100">
+                <a:solidFill>
+                  <a:srgbClr val="475569"/>
+                </a:solidFill>
+                <a:latin typeface="微软雅黑"/>
+              </a:defRPr>
+            </a:pPr>
+            <a:r>
+              <a:t>从源头杂乱输入到受控标准 Excel 交付，实现物料数据全生命周期的自动化与标准化</a:t>
+            </a:r>
+          </a:p>
+        </p:txBody>
+      </p:sp>
+      <p:sp>
+        <p:nvSpPr>
+          <p:cNvPr id="6" name="Rounded Rectangle 5"/>
           <p:cNvSpPr/>
           <p:nvPr/>
         </p:nvSpPr>
         <p:spPr>
           <a:xfrm>
-            <a:off x="731520" y="1645920"/>
-            <a:ext cx="2926080" cy="1051560"/>
+            <a:off x="731520" y="1691640"/>
+            <a:ext cx="2560320" cy="4572000"/>
           </a:xfrm>
           <a:prstGeom prst="roundRect">
             <a:avLst/>
           </a:prstGeom>
           <a:solidFill>
-            <a:srgbClr val="2563EB"/>
-          </a:solidFill>
-          <a:ln>
-            <a:noFill/>
+            <a:srgbClr val="FFFFFF"/>
+          </a:solidFill>
+          <a:ln w="12700">
+            <a:solidFill>
+              <a:srgbClr val="E2E8F0"/>
+            </a:solidFill>
           </a:ln>
         </p:spPr>
         <p:style>
@@ -6781,49 +7144,222 @@
           </a:fontRef>
         </p:style>
         <p:txBody>
-          <a:bodyPr rtlCol="0" anchor="ctr" wrap="square"/>
+          <a:bodyPr rtlCol="0" anchor="ctr"/>
+          <a:lstStyle/>
+          <a:p>
+            <a:pPr algn="ctr"/>
+          </a:p>
+        </p:txBody>
+      </p:sp>
+      <p:sp>
+        <p:nvSpPr>
+          <p:cNvPr id="7" name="Rounded Rectangle 6"/>
+          <p:cNvSpPr/>
+          <p:nvPr/>
+        </p:nvSpPr>
+        <p:spPr>
+          <a:xfrm>
+            <a:off x="868680" y="1828800"/>
+            <a:ext cx="2286000" cy="777240"/>
+          </a:xfrm>
+          <a:prstGeom prst="roundRect">
+            <a:avLst/>
+          </a:prstGeom>
+          <a:solidFill>
+            <a:srgbClr val="1D4ED8"/>
+          </a:solidFill>
+          <a:ln>
+            <a:noFill/>
+          </a:ln>
+        </p:spPr>
+        <p:style>
+          <a:lnRef idx="1">
+            <a:schemeClr val="accent1"/>
+          </a:lnRef>
+          <a:fillRef idx="3">
+            <a:schemeClr val="accent1"/>
+          </a:fillRef>
+          <a:effectRef idx="2">
+            <a:schemeClr val="accent1"/>
+          </a:effectRef>
+          <a:fontRef idx="minor">
+            <a:schemeClr val="lt1"/>
+          </a:fontRef>
+        </p:style>
+        <p:txBody>
+          <a:bodyPr rtlCol="0" anchor="ctr"/>
           <a:lstStyle/>
           <a:p>
             <a:pPr algn="ctr">
-              <a:defRPr sz="1300" b="1">
-                <a:solidFill>
-                  <a:srgbClr val="FFFFFF"/>
-                </a:solidFill>
-                <a:latin typeface="微软雅黑"/>
-              </a:defRPr>
-            </a:pPr>
-            <a:r>
-              <a:t>1. 多源输入接入层</a:t>
+              <a:defRPr sz="950" b="1">
+                <a:solidFill>
+                  <a:srgbClr val="E0F2FE"/>
+                </a:solidFill>
+                <a:latin typeface="Segoe UI"/>
+              </a:defRPr>
+            </a:pPr>
+            <a:r>
+              <a:t>STEP 01</a:t>
             </a:r>
           </a:p>
           <a:p>
             <a:pPr>
               <a:spcBef>
-                <a:spcPts val="300"/>
+                <a:spcPts val="200"/>
               </a:spcBef>
-              <a:defRPr sz="1000">
-                <a:solidFill>
-                  <a:srgbClr val="E2E8F0"/>
-                </a:solidFill>
-                <a:latin typeface="微软雅黑"/>
-              </a:defRPr>
-            </a:pPr>
-            <a:r>
-              <a:t>支持多元工程资产输入</a:t>
-            </a:r>
-          </a:p>
-        </p:txBody>
-      </p:sp>
-      <p:sp>
-        <p:nvSpPr>
-          <p:cNvPr id="5" name="Rounded Rectangle 4"/>
+              <a:defRPr sz="1300" b="1">
+                <a:solidFill>
+                  <a:srgbClr val="FFFFFF"/>
+                </a:solidFill>
+                <a:latin typeface="微软雅黑"/>
+              </a:defRPr>
+            </a:pPr>
+            <a:r>
+              <a:t>多源数据接入</a:t>
+            </a:r>
+          </a:p>
+        </p:txBody>
+      </p:sp>
+      <p:sp>
+        <p:nvSpPr>
+          <p:cNvPr id="8" name="TextBox 7"/>
+          <p:cNvSpPr txBox="1"/>
+          <p:nvPr/>
+        </p:nvSpPr>
+        <p:spPr>
+          <a:xfrm>
+            <a:off x="868680" y="2697480"/>
+            <a:ext cx="2286000" cy="3383280"/>
+          </a:xfrm>
+          <a:prstGeom prst="rect">
+            <a:avLst/>
+          </a:prstGeom>
+          <a:noFill/>
+        </p:spPr>
+        <p:txBody>
+          <a:bodyPr wrap="square">
+            <a:spAutoFit/>
+          </a:bodyPr>
+          <a:lstStyle/>
+          <a:p>
+            <a:pPr>
+              <a:spcBef>
+                <a:spcPts val="800"/>
+              </a:spcBef>
+              <a:defRPr sz="1050">
+                <a:solidFill>
+                  <a:srgbClr val="475569"/>
+                </a:solidFill>
+                <a:latin typeface="微软雅黑"/>
+              </a:defRPr>
+            </a:pPr>
+            <a:r>
+              <a:t>✔ 非标单行/批量文本直接粘贴</a:t>
+            </a:r>
+          </a:p>
+          <a:p>
+            <a:pPr>
+              <a:spcBef>
+                <a:spcPts val="800"/>
+              </a:spcBef>
+              <a:defRPr sz="1050">
+                <a:solidFill>
+                  <a:srgbClr val="475569"/>
+                </a:solidFill>
+                <a:latin typeface="微软雅黑"/>
+              </a:defRPr>
+            </a:pPr>
+            <a:r>
+              <a:t>✔ 历史多版本 Excel 一键导入</a:t>
+            </a:r>
+          </a:p>
+          <a:p>
+            <a:pPr>
+              <a:spcBef>
+                <a:spcPts val="800"/>
+              </a:spcBef>
+              <a:defRPr sz="1050">
+                <a:solidFill>
+                  <a:srgbClr val="475569"/>
+                </a:solidFill>
+                <a:latin typeface="微软雅黑"/>
+              </a:defRPr>
+            </a:pPr>
+            <a:r>
+              <a:t>✔ STEP 3D CAD 三维模型接入</a:t>
+            </a:r>
+          </a:p>
+          <a:p>
+            <a:pPr>
+              <a:spcBef>
+                <a:spcPts val="800"/>
+              </a:spcBef>
+              <a:defRPr sz="1050">
+                <a:solidFill>
+                  <a:srgbClr val="475569"/>
+                </a:solidFill>
+                <a:latin typeface="微软雅黑"/>
+              </a:defRPr>
+            </a:pPr>
+            <a:r>
+              <a:t>✔ PDF 技术协议与手册关联</a:t>
+            </a:r>
+          </a:p>
+        </p:txBody>
+      </p:sp>
+      <p:sp>
+        <p:nvSpPr>
+          <p:cNvPr id="9" name="Right Arrow 8"/>
           <p:cNvSpPr/>
           <p:nvPr/>
         </p:nvSpPr>
         <p:spPr>
           <a:xfrm>
-            <a:off x="3840480" y="1645920"/>
-            <a:ext cx="7589520" cy="1051560"/>
+            <a:off x="3310128" y="3749039"/>
+            <a:ext cx="137160" cy="228600"/>
+          </a:xfrm>
+          <a:prstGeom prst="rightArrow">
+            <a:avLst/>
+          </a:prstGeom>
+          <a:solidFill>
+            <a:srgbClr val="CBD5E1"/>
+          </a:solidFill>
+          <a:ln>
+            <a:noFill/>
+          </a:ln>
+        </p:spPr>
+        <p:style>
+          <a:lnRef idx="1">
+            <a:schemeClr val="accent1"/>
+          </a:lnRef>
+          <a:fillRef idx="3">
+            <a:schemeClr val="accent1"/>
+          </a:fillRef>
+          <a:effectRef idx="2">
+            <a:schemeClr val="accent1"/>
+          </a:effectRef>
+          <a:fontRef idx="minor">
+            <a:schemeClr val="lt1"/>
+          </a:fontRef>
+        </p:style>
+        <p:txBody>
+          <a:bodyPr rtlCol="0" anchor="ctr"/>
+          <a:lstStyle/>
+          <a:p>
+            <a:pPr algn="ctr"/>
+          </a:p>
+        </p:txBody>
+      </p:sp>
+      <p:sp>
+        <p:nvSpPr>
+          <p:cNvPr id="10" name="Rounded Rectangle 9"/>
+          <p:cNvSpPr/>
+          <p:nvPr/>
+        </p:nvSpPr>
+        <p:spPr>
+          <a:xfrm>
+            <a:off x="3429000" y="1691640"/>
+            <a:ext cx="2560320" cy="4572000"/>
           </a:xfrm>
           <a:prstGeom prst="roundRect">
             <a:avLst/>
@@ -6852,87 +7388,29 @@
           </a:fontRef>
         </p:style>
         <p:txBody>
-          <a:bodyPr rtlCol="0" anchor="ctr" wrap="square"/>
-          <a:lstStyle/>
-          <a:p>
-            <a:pPr algn="ctr">
-              <a:defRPr sz="1100">
-                <a:solidFill>
-                  <a:srgbClr val="0F172A"/>
-                </a:solidFill>
-                <a:latin typeface="微软雅黑"/>
-              </a:defRPr>
-            </a:pPr>
-            <a:r>
-              <a:t>✔  非标描述单行/批量文本</a:t>
-            </a:r>
-          </a:p>
-          <a:p>
-            <a:pPr>
-              <a:spcBef>
-                <a:spcPts val="200"/>
-              </a:spcBef>
-              <a:defRPr sz="1100">
-                <a:solidFill>
-                  <a:srgbClr val="0F172A"/>
-                </a:solidFill>
-                <a:latin typeface="微软雅黑"/>
-              </a:defRPr>
-            </a:pPr>
-            <a:r>
-              <a:t>✔  历史多版本 Excel 模版</a:t>
-            </a:r>
-          </a:p>
-          <a:p>
-            <a:pPr>
-              <a:spcBef>
-                <a:spcPts val="200"/>
-              </a:spcBef>
-              <a:defRPr sz="1100">
-                <a:solidFill>
-                  <a:srgbClr val="0F172A"/>
-                </a:solidFill>
-                <a:latin typeface="微软雅黑"/>
-              </a:defRPr>
-            </a:pPr>
-            <a:r>
-              <a:t>✔  STEP 3D CAD 工程模型</a:t>
-            </a:r>
-          </a:p>
-          <a:p>
-            <a:pPr>
-              <a:spcBef>
-                <a:spcPts val="200"/>
-              </a:spcBef>
-              <a:defRPr sz="1100">
-                <a:solidFill>
-                  <a:srgbClr val="0F172A"/>
-                </a:solidFill>
-                <a:latin typeface="微软雅黑"/>
-              </a:defRPr>
-            </a:pPr>
-            <a:r>
-              <a:t>✔  PDF 技术手册与图纸</a:t>
-            </a:r>
-          </a:p>
-        </p:txBody>
-      </p:sp>
-      <p:sp>
-        <p:nvSpPr>
-          <p:cNvPr id="6" name="Rounded Rectangle 5"/>
+          <a:bodyPr rtlCol="0" anchor="ctr"/>
+          <a:lstStyle/>
+          <a:p>
+            <a:pPr algn="ctr"/>
+          </a:p>
+        </p:txBody>
+      </p:sp>
+      <p:sp>
+        <p:nvSpPr>
+          <p:cNvPr id="11" name="Rounded Rectangle 10"/>
           <p:cNvSpPr/>
           <p:nvPr/>
         </p:nvSpPr>
         <p:spPr>
           <a:xfrm>
-            <a:off x="731520" y="2834640"/>
-            <a:ext cx="2926080" cy="1051560"/>
+            <a:off x="3566160" y="1828800"/>
+            <a:ext cx="2286000" cy="777240"/>
           </a:xfrm>
           <a:prstGeom prst="roundRect">
             <a:avLst/>
           </a:prstGeom>
           <a:solidFill>
-            <a:srgbClr val="9333EA"/>
+            <a:srgbClr val="0EA5E9"/>
           </a:solidFill>
           <a:ln>
             <a:noFill/>
@@ -6953,49 +7431,179 @@
           </a:fontRef>
         </p:style>
         <p:txBody>
-          <a:bodyPr rtlCol="0" anchor="ctr" wrap="square"/>
+          <a:bodyPr rtlCol="0" anchor="ctr"/>
           <a:lstStyle/>
           <a:p>
             <a:pPr algn="ctr">
-              <a:defRPr sz="1300" b="1">
-                <a:solidFill>
-                  <a:srgbClr val="FFFFFF"/>
-                </a:solidFill>
-                <a:latin typeface="微软雅黑"/>
-              </a:defRPr>
-            </a:pPr>
-            <a:r>
-              <a:t>2. 智能 AI 解析中枢</a:t>
+              <a:defRPr sz="950" b="1">
+                <a:solidFill>
+                  <a:srgbClr val="E0F2FE"/>
+                </a:solidFill>
+                <a:latin typeface="Segoe UI"/>
+              </a:defRPr>
+            </a:pPr>
+            <a:r>
+              <a:t>STEP 02</a:t>
             </a:r>
           </a:p>
           <a:p>
             <a:pPr>
               <a:spcBef>
-                <a:spcPts val="300"/>
+                <a:spcPts val="200"/>
               </a:spcBef>
-              <a:defRPr sz="1000">
-                <a:solidFill>
-                  <a:srgbClr val="E2E8F0"/>
-                </a:solidFill>
-                <a:latin typeface="微软雅黑"/>
-              </a:defRPr>
-            </a:pPr>
-            <a:r>
-              <a:t>独创三级高可用容灾架构</a:t>
-            </a:r>
-          </a:p>
-        </p:txBody>
-      </p:sp>
-      <p:sp>
-        <p:nvSpPr>
-          <p:cNvPr id="7" name="Rounded Rectangle 6"/>
+              <a:defRPr sz="1300" b="1">
+                <a:solidFill>
+                  <a:srgbClr val="FFFFFF"/>
+                </a:solidFill>
+                <a:latin typeface="微软雅黑"/>
+              </a:defRPr>
+            </a:pPr>
+            <a:r>
+              <a:t>云端大模型引擎</a:t>
+            </a:r>
+          </a:p>
+        </p:txBody>
+      </p:sp>
+      <p:sp>
+        <p:nvSpPr>
+          <p:cNvPr id="12" name="TextBox 11"/>
+          <p:cNvSpPr txBox="1"/>
+          <p:nvPr/>
+        </p:nvSpPr>
+        <p:spPr>
+          <a:xfrm>
+            <a:off x="3566160" y="2697480"/>
+            <a:ext cx="2286000" cy="3383280"/>
+          </a:xfrm>
+          <a:prstGeom prst="rect">
+            <a:avLst/>
+          </a:prstGeom>
+          <a:noFill/>
+        </p:spPr>
+        <p:txBody>
+          <a:bodyPr wrap="square">
+            <a:spAutoFit/>
+          </a:bodyPr>
+          <a:lstStyle/>
+          <a:p>
+            <a:pPr>
+              <a:spcBef>
+                <a:spcPts val="800"/>
+              </a:spcBef>
+              <a:defRPr sz="1050">
+                <a:solidFill>
+                  <a:srgbClr val="475569"/>
+                </a:solidFill>
+                <a:latin typeface="微软雅黑"/>
+              </a:defRPr>
+            </a:pPr>
+            <a:r>
+              <a:t>✔ 智谱 GLM 企业级云端 API</a:t>
+            </a:r>
+          </a:p>
+          <a:p>
+            <a:pPr>
+              <a:spcBef>
+                <a:spcPts val="800"/>
+              </a:spcBef>
+              <a:defRPr sz="1050">
+                <a:solidFill>
+                  <a:srgbClr val="475569"/>
+                </a:solidFill>
+                <a:latin typeface="微软雅黑"/>
+              </a:defRPr>
+            </a:pPr>
+            <a:r>
+              <a:t>✔ 实测 ~0.9s 极速并发响应</a:t>
+            </a:r>
+          </a:p>
+          <a:p>
+            <a:pPr>
+              <a:spcBef>
+                <a:spcPts val="800"/>
+              </a:spcBef>
+              <a:defRPr sz="1050">
+                <a:solidFill>
+                  <a:srgbClr val="475569"/>
+                </a:solidFill>
+                <a:latin typeface="微软雅黑"/>
+              </a:defRPr>
+            </a:pPr>
+            <a:r>
+              <a:t>✔ 智能理解词序颠倒与长句</a:t>
+            </a:r>
+          </a:p>
+          <a:p>
+            <a:pPr>
+              <a:spcBef>
+                <a:spcPts val="800"/>
+              </a:spcBef>
+              <a:defRPr sz="1050">
+                <a:solidFill>
+                  <a:srgbClr val="475569"/>
+                </a:solidFill>
+                <a:latin typeface="微软雅黑"/>
+              </a:defRPr>
+            </a:pPr>
+            <a:r>
+              <a:t>✔ 精准剥离名称、纯型号与厂商</a:t>
+            </a:r>
+          </a:p>
+        </p:txBody>
+      </p:sp>
+      <p:sp>
+        <p:nvSpPr>
+          <p:cNvPr id="13" name="Right Arrow 12"/>
           <p:cNvSpPr/>
           <p:nvPr/>
         </p:nvSpPr>
         <p:spPr>
           <a:xfrm>
-            <a:off x="3840480" y="2834640"/>
-            <a:ext cx="7589520" cy="1051560"/>
+            <a:off x="6007608" y="3749039"/>
+            <a:ext cx="137160" cy="228600"/>
+          </a:xfrm>
+          <a:prstGeom prst="rightArrow">
+            <a:avLst/>
+          </a:prstGeom>
+          <a:solidFill>
+            <a:srgbClr val="CBD5E1"/>
+          </a:solidFill>
+          <a:ln>
+            <a:noFill/>
+          </a:ln>
+        </p:spPr>
+        <p:style>
+          <a:lnRef idx="1">
+            <a:schemeClr val="accent1"/>
+          </a:lnRef>
+          <a:fillRef idx="3">
+            <a:schemeClr val="accent1"/>
+          </a:fillRef>
+          <a:effectRef idx="2">
+            <a:schemeClr val="accent1"/>
+          </a:effectRef>
+          <a:fontRef idx="minor">
+            <a:schemeClr val="lt1"/>
+          </a:fontRef>
+        </p:style>
+        <p:txBody>
+          <a:bodyPr rtlCol="0" anchor="ctr"/>
+          <a:lstStyle/>
+          <a:p>
+            <a:pPr algn="ctr"/>
+          </a:p>
+        </p:txBody>
+      </p:sp>
+      <p:sp>
+        <p:nvSpPr>
+          <p:cNvPr id="14" name="Rounded Rectangle 13"/>
+          <p:cNvSpPr/>
+          <p:nvPr/>
+        </p:nvSpPr>
+        <p:spPr>
+          <a:xfrm>
+            <a:off x="6126480" y="1691640"/>
+            <a:ext cx="2560320" cy="4572000"/>
           </a:xfrm>
           <a:prstGeom prst="roundRect">
             <a:avLst/>
@@ -7024,65 +7632,23 @@
           </a:fontRef>
         </p:style>
         <p:txBody>
-          <a:bodyPr rtlCol="0" anchor="ctr" wrap="square"/>
-          <a:lstStyle/>
-          <a:p>
-            <a:pPr algn="ctr">
-              <a:defRPr sz="1100">
-                <a:solidFill>
-                  <a:srgbClr val="0F172A"/>
-                </a:solidFill>
-                <a:latin typeface="微软雅黑"/>
-              </a:defRPr>
-            </a:pPr>
-            <a:r>
-              <a:t>✔  Level 1: 云端高速大模型 (GLM-4-Flash / ~0.9s)</a:t>
-            </a:r>
-          </a:p>
-          <a:p>
-            <a:pPr>
-              <a:spcBef>
-                <a:spcPts val="200"/>
-              </a:spcBef>
-              <a:defRPr sz="1100">
-                <a:solidFill>
-                  <a:srgbClr val="0F172A"/>
-                </a:solidFill>
-                <a:latin typeface="微软雅黑"/>
-              </a:defRPr>
-            </a:pPr>
-            <a:r>
-              <a:t>✔  Level 2: 本地离线小模型 (Qwen2.5-0.5B / 无网保底)</a:t>
-            </a:r>
-          </a:p>
-          <a:p>
-            <a:pPr>
-              <a:spcBef>
-                <a:spcPts val="200"/>
-              </a:spcBef>
-              <a:defRPr sz="1100">
-                <a:solidFill>
-                  <a:srgbClr val="0F172A"/>
-                </a:solidFill>
-                <a:latin typeface="微软雅黑"/>
-              </a:defRPr>
-            </a:pPr>
-            <a:r>
-              <a:t>✔  Level 3: 工业启发规则引擎 (0ms 终极兜底)</a:t>
-            </a:r>
-          </a:p>
-        </p:txBody>
-      </p:sp>
-      <p:sp>
-        <p:nvSpPr>
-          <p:cNvPr id="8" name="Rounded Rectangle 7"/>
+          <a:bodyPr rtlCol="0" anchor="ctr"/>
+          <a:lstStyle/>
+          <a:p>
+            <a:pPr algn="ctr"/>
+          </a:p>
+        </p:txBody>
+      </p:sp>
+      <p:sp>
+        <p:nvSpPr>
+          <p:cNvPr id="15" name="Rounded Rectangle 14"/>
           <p:cNvSpPr/>
           <p:nvPr/>
         </p:nvSpPr>
         <p:spPr>
           <a:xfrm>
-            <a:off x="731520" y="4023360"/>
-            <a:ext cx="2926080" cy="1051560"/>
+            <a:off x="6263640" y="1828800"/>
+            <a:ext cx="2286000" cy="777240"/>
           </a:xfrm>
           <a:prstGeom prst="roundRect">
             <a:avLst/>
@@ -7109,49 +7675,179 @@
           </a:fontRef>
         </p:style>
         <p:txBody>
-          <a:bodyPr rtlCol="0" anchor="ctr" wrap="square"/>
+          <a:bodyPr rtlCol="0" anchor="ctr"/>
           <a:lstStyle/>
           <a:p>
             <a:pPr algn="ctr">
-              <a:defRPr sz="1300" b="1">
-                <a:solidFill>
-                  <a:srgbClr val="FFFFFF"/>
-                </a:solidFill>
-                <a:latin typeface="微软雅黑"/>
-              </a:defRPr>
-            </a:pPr>
-            <a:r>
-              <a:t>3. 数据治理与业务逻辑</a:t>
+              <a:defRPr sz="950" b="1">
+                <a:solidFill>
+                  <a:srgbClr val="E0F2FE"/>
+                </a:solidFill>
+                <a:latin typeface="Segoe UI"/>
+              </a:defRPr>
+            </a:pPr>
+            <a:r>
+              <a:t>STEP 03</a:t>
             </a:r>
           </a:p>
           <a:p>
             <a:pPr>
               <a:spcBef>
-                <a:spcPts val="300"/>
+                <a:spcPts val="200"/>
               </a:spcBef>
-              <a:defRPr sz="1000">
-                <a:solidFill>
-                  <a:srgbClr val="E2E8F0"/>
-                </a:solidFill>
-                <a:latin typeface="微软雅黑"/>
-              </a:defRPr>
-            </a:pPr>
-            <a:r>
-              <a:t>保证严谨工程合规与去重</a:t>
-            </a:r>
-          </a:p>
-        </p:txBody>
-      </p:sp>
-      <p:sp>
-        <p:nvSpPr>
-          <p:cNvPr id="9" name="Rounded Rectangle 8"/>
+              <a:defRPr sz="1300" b="1">
+                <a:solidFill>
+                  <a:srgbClr val="FFFFFF"/>
+                </a:solidFill>
+                <a:latin typeface="微软雅黑"/>
+              </a:defRPr>
+            </a:pPr>
+            <a:r>
+              <a:t>工程清洗与治理</a:t>
+            </a:r>
+          </a:p>
+        </p:txBody>
+      </p:sp>
+      <p:sp>
+        <p:nvSpPr>
+          <p:cNvPr id="16" name="TextBox 15"/>
+          <p:cNvSpPr txBox="1"/>
+          <p:nvPr/>
+        </p:nvSpPr>
+        <p:spPr>
+          <a:xfrm>
+            <a:off x="6263640" y="2697480"/>
+            <a:ext cx="2286000" cy="3383280"/>
+          </a:xfrm>
+          <a:prstGeom prst="rect">
+            <a:avLst/>
+          </a:prstGeom>
+          <a:noFill/>
+        </p:spPr>
+        <p:txBody>
+          <a:bodyPr wrap="square">
+            <a:spAutoFit/>
+          </a:bodyPr>
+          <a:lstStyle/>
+          <a:p>
+            <a:pPr>
+              <a:spcBef>
+                <a:spcPts val="800"/>
+              </a:spcBef>
+              <a:defRPr sz="1050">
+                <a:solidFill>
+                  <a:srgbClr val="475569"/>
+                </a:solidFill>
+                <a:latin typeface="微软雅黑"/>
+              </a:defRPr>
+            </a:pPr>
+            <a:r>
+              <a:t>✔ 知名备件供应商知识库映射</a:t>
+            </a:r>
+          </a:p>
+          <a:p>
+            <a:pPr>
+              <a:spcBef>
+                <a:spcPts val="800"/>
+              </a:spcBef>
+              <a:defRPr sz="1050">
+                <a:solidFill>
+                  <a:srgbClr val="475569"/>
+                </a:solidFill>
+                <a:latin typeface="微软雅黑"/>
+              </a:defRPr>
+            </a:pPr>
+            <a:r>
+              <a:t>✔ 自动滤除“备件_”等前缀噪声</a:t>
+            </a:r>
+          </a:p>
+          <a:p>
+            <a:pPr>
+              <a:spcBef>
+                <a:spcPts val="800"/>
+              </a:spcBef>
+              <a:defRPr sz="1050">
+                <a:solidFill>
+                  <a:srgbClr val="475569"/>
+                </a:solidFill>
+                <a:latin typeface="微软雅黑"/>
+              </a:defRPr>
+            </a:pPr>
+            <a:r>
+              <a:t>✔ 全局主库查重，抑制一物多码</a:t>
+            </a:r>
+          </a:p>
+          <a:p>
+            <a:pPr>
+              <a:spcBef>
+                <a:spcPts val="800"/>
+              </a:spcBef>
+              <a:defRPr sz="1050">
+                <a:solidFill>
+                  <a:srgbClr val="475569"/>
+                </a:solidFill>
+                <a:latin typeface="微软雅黑"/>
+              </a:defRPr>
+            </a:pPr>
+            <a:r>
+              <a:t>✔ 树状层级序号 (Step 10) 构建</a:t>
+            </a:r>
+          </a:p>
+        </p:txBody>
+      </p:sp>
+      <p:sp>
+        <p:nvSpPr>
+          <p:cNvPr id="17" name="Right Arrow 16"/>
           <p:cNvSpPr/>
           <p:nvPr/>
         </p:nvSpPr>
         <p:spPr>
           <a:xfrm>
-            <a:off x="3840480" y="4023360"/>
-            <a:ext cx="7589520" cy="1051560"/>
+            <a:off x="8705088" y="3749039"/>
+            <a:ext cx="137160" cy="228600"/>
+          </a:xfrm>
+          <a:prstGeom prst="rightArrow">
+            <a:avLst/>
+          </a:prstGeom>
+          <a:solidFill>
+            <a:srgbClr val="CBD5E1"/>
+          </a:solidFill>
+          <a:ln>
+            <a:noFill/>
+          </a:ln>
+        </p:spPr>
+        <p:style>
+          <a:lnRef idx="1">
+            <a:schemeClr val="accent1"/>
+          </a:lnRef>
+          <a:fillRef idx="3">
+            <a:schemeClr val="accent1"/>
+          </a:fillRef>
+          <a:effectRef idx="2">
+            <a:schemeClr val="accent1"/>
+          </a:effectRef>
+          <a:fontRef idx="minor">
+            <a:schemeClr val="lt1"/>
+          </a:fontRef>
+        </p:style>
+        <p:txBody>
+          <a:bodyPr rtlCol="0" anchor="ctr"/>
+          <a:lstStyle/>
+          <a:p>
+            <a:pPr algn="ctr"/>
+          </a:p>
+        </p:txBody>
+      </p:sp>
+      <p:sp>
+        <p:nvSpPr>
+          <p:cNvPr id="18" name="Rounded Rectangle 17"/>
+          <p:cNvSpPr/>
+          <p:nvPr/>
+        </p:nvSpPr>
+        <p:spPr>
+          <a:xfrm>
+            <a:off x="8823960" y="1691640"/>
+            <a:ext cx="2560320" cy="4572000"/>
           </a:xfrm>
           <a:prstGeom prst="roundRect">
             <a:avLst/>
@@ -7180,81 +7876,23 @@
           </a:fontRef>
         </p:style>
         <p:txBody>
-          <a:bodyPr rtlCol="0" anchor="ctr" wrap="square"/>
-          <a:lstStyle/>
-          <a:p>
-            <a:pPr algn="ctr">
-              <a:defRPr sz="1100">
-                <a:solidFill>
-                  <a:srgbClr val="0F172A"/>
-                </a:solidFill>
-                <a:latin typeface="微软雅黑"/>
-              </a:defRPr>
-            </a:pPr>
-            <a:r>
-              <a:t>✔  全局通用物料主库 (去重校验)</a:t>
-            </a:r>
-          </a:p>
-          <a:p>
-            <a:pPr>
-              <a:spcBef>
-                <a:spcPts val="200"/>
-              </a:spcBef>
-              <a:defRPr sz="1100">
-                <a:solidFill>
-                  <a:srgbClr val="0F172A"/>
-                </a:solidFill>
-                <a:latin typeface="微软雅黑"/>
-              </a:defRPr>
-            </a:pPr>
-            <a:r>
-              <a:t>✔  机型与子系统树状层级构建</a:t>
-            </a:r>
-          </a:p>
-          <a:p>
-            <a:pPr>
-              <a:spcBef>
-                <a:spcPts val="200"/>
-              </a:spcBef>
-              <a:defRPr sz="1100">
-                <a:solidFill>
-                  <a:srgbClr val="0F172A"/>
-                </a:solidFill>
-                <a:latin typeface="微软雅黑"/>
-              </a:defRPr>
-            </a:pPr>
-            <a:r>
-              <a:t>✔  独立工程锁机制 (防多人冲突)</a:t>
-            </a:r>
-          </a:p>
-          <a:p>
-            <a:pPr>
-              <a:spcBef>
-                <a:spcPts val="200"/>
-              </a:spcBef>
-              <a:defRPr sz="1100">
-                <a:solidFill>
-                  <a:srgbClr val="0F172A"/>
-                </a:solidFill>
-                <a:latin typeface="微软雅黑"/>
-              </a:defRPr>
-            </a:pPr>
-            <a:r>
-              <a:t>✔  六级签字与 ECN 变更追溯</a:t>
-            </a:r>
-          </a:p>
-        </p:txBody>
-      </p:sp>
-      <p:sp>
-        <p:nvSpPr>
-          <p:cNvPr id="10" name="Rounded Rectangle 9"/>
+          <a:bodyPr rtlCol="0" anchor="ctr"/>
+          <a:lstStyle/>
+          <a:p>
+            <a:pPr algn="ctr"/>
+          </a:p>
+        </p:txBody>
+      </p:sp>
+      <p:sp>
+        <p:nvSpPr>
+          <p:cNvPr id="19" name="Rounded Rectangle 18"/>
           <p:cNvSpPr/>
           <p:nvPr/>
         </p:nvSpPr>
         <p:spPr>
           <a:xfrm>
-            <a:off x="731520" y="5212080"/>
-            <a:ext cx="2926080" cy="1051560"/>
+            <a:off x="8961120" y="1828800"/>
+            <a:ext cx="2286000" cy="777240"/>
           </a:xfrm>
           <a:prstGeom prst="roundRect">
             <a:avLst/>
@@ -7281,90 +7919,19 @@
           </a:fontRef>
         </p:style>
         <p:txBody>
-          <a:bodyPr rtlCol="0" anchor="ctr" wrap="square"/>
+          <a:bodyPr rtlCol="0" anchor="ctr"/>
           <a:lstStyle/>
           <a:p>
             <a:pPr algn="ctr">
-              <a:defRPr sz="1300" b="1">
-                <a:solidFill>
-                  <a:srgbClr val="FFFFFF"/>
-                </a:solidFill>
-                <a:latin typeface="微软雅黑"/>
-              </a:defRPr>
-            </a:pPr>
-            <a:r>
-              <a:t>4. 受控交付与输出层</a:t>
-            </a:r>
-          </a:p>
-          <a:p>
-            <a:pPr>
-              <a:spcBef>
-                <a:spcPts val="300"/>
-              </a:spcBef>
-              <a:defRPr sz="1000">
-                <a:solidFill>
-                  <a:srgbClr val="E2E8F0"/>
-                </a:solidFill>
-                <a:latin typeface="微软雅黑"/>
-              </a:defRPr>
-            </a:pPr>
-            <a:r>
-              <a:t>工业级标准物料清单交付</a:t>
-            </a:r>
-          </a:p>
-        </p:txBody>
-      </p:sp>
-      <p:sp>
-        <p:nvSpPr>
-          <p:cNvPr id="11" name="Rounded Rectangle 10"/>
-          <p:cNvSpPr/>
-          <p:nvPr/>
-        </p:nvSpPr>
-        <p:spPr>
-          <a:xfrm>
-            <a:off x="3840480" y="5212080"/>
-            <a:ext cx="7589520" cy="1051560"/>
-          </a:xfrm>
-          <a:prstGeom prst="roundRect">
-            <a:avLst/>
-          </a:prstGeom>
-          <a:solidFill>
-            <a:srgbClr val="FFFFFF"/>
-          </a:solidFill>
-          <a:ln w="12700">
-            <a:solidFill>
-              <a:srgbClr val="E2E8F0"/>
-            </a:solidFill>
-          </a:ln>
-        </p:spPr>
-        <p:style>
-          <a:lnRef idx="1">
-            <a:schemeClr val="accent1"/>
-          </a:lnRef>
-          <a:fillRef idx="3">
-            <a:schemeClr val="accent1"/>
-          </a:fillRef>
-          <a:effectRef idx="2">
-            <a:schemeClr val="accent1"/>
-          </a:effectRef>
-          <a:fontRef idx="minor">
-            <a:schemeClr val="lt1"/>
-          </a:fontRef>
-        </p:style>
-        <p:txBody>
-          <a:bodyPr rtlCol="0" anchor="ctr" wrap="square"/>
-          <a:lstStyle/>
-          <a:p>
-            <a:pPr algn="ctr">
-              <a:defRPr sz="1100">
-                <a:solidFill>
-                  <a:srgbClr val="0F172A"/>
-                </a:solidFill>
-                <a:latin typeface="微软雅黑"/>
-              </a:defRPr>
-            </a:pPr>
-            <a:r>
-              <a:t>✔  符合 FDJL-JS-037 标准 Excel</a:t>
+              <a:defRPr sz="950" b="1">
+                <a:solidFill>
+                  <a:srgbClr val="E0F2FE"/>
+                </a:solidFill>
+                <a:latin typeface="Segoe UI"/>
+              </a:defRPr>
+            </a:pPr>
+            <a:r>
+              <a:t>STEP 04</a:t>
             </a:r>
           </a:p>
           <a:p>
@@ -7372,47 +7939,102 @@
               <a:spcBef>
                 <a:spcPts val="200"/>
               </a:spcBef>
-              <a:defRPr sz="1100">
-                <a:solidFill>
-                  <a:srgbClr val="0F172A"/>
-                </a:solidFill>
-                <a:latin typeface="微软雅黑"/>
-              </a:defRPr>
-            </a:pPr>
-            <a:r>
-              <a:t>✔  受控封面 + 签字页 + 更改页</a:t>
-            </a:r>
-          </a:p>
+              <a:defRPr sz="1300" b="1">
+                <a:solidFill>
+                  <a:srgbClr val="FFFFFF"/>
+                </a:solidFill>
+                <a:latin typeface="微软雅黑"/>
+              </a:defRPr>
+            </a:pPr>
+            <a:r>
+              <a:t>受控工程交付</a:t>
+            </a:r>
+          </a:p>
+        </p:txBody>
+      </p:sp>
+      <p:sp>
+        <p:nvSpPr>
+          <p:cNvPr id="20" name="TextBox 19"/>
+          <p:cNvSpPr txBox="1"/>
+          <p:nvPr/>
+        </p:nvSpPr>
+        <p:spPr>
+          <a:xfrm>
+            <a:off x="8961120" y="2697480"/>
+            <a:ext cx="2286000" cy="3383280"/>
+          </a:xfrm>
+          <a:prstGeom prst="rect">
+            <a:avLst/>
+          </a:prstGeom>
+          <a:noFill/>
+        </p:spPr>
+        <p:txBody>
+          <a:bodyPr wrap="square">
+            <a:spAutoFit/>
+          </a:bodyPr>
+          <a:lstStyle/>
           <a:p>
             <a:pPr>
               <a:spcBef>
-                <a:spcPts val="200"/>
+                <a:spcPts val="800"/>
               </a:spcBef>
-              <a:defRPr sz="1100">
-                <a:solidFill>
-                  <a:srgbClr val="0F172A"/>
-                </a:solidFill>
-                <a:latin typeface="微软雅黑"/>
-              </a:defRPr>
-            </a:pPr>
-            <a:r>
-              <a:t>✔  超链接/内嵌多模态工程包</a:t>
+              <a:defRPr sz="1050">
+                <a:solidFill>
+                  <a:srgbClr val="475569"/>
+                </a:solidFill>
+                <a:latin typeface="微软雅黑"/>
+              </a:defRPr>
+            </a:pPr>
+            <a:r>
+              <a:t>✔ 符合 FDJL-JS-037 规范 Excel</a:t>
             </a:r>
           </a:p>
           <a:p>
             <a:pPr>
               <a:spcBef>
-                <a:spcPts val="200"/>
+                <a:spcPts val="800"/>
               </a:spcBef>
-              <a:defRPr sz="1100">
-                <a:solidFill>
-                  <a:srgbClr val="0F172A"/>
-                </a:solidFill>
-                <a:latin typeface="微软雅黑"/>
-              </a:defRPr>
-            </a:pPr>
-            <a:r>
-              <a:t>✔  支持离线单文件独立打开流转</a:t>
+              <a:defRPr sz="1050">
+                <a:solidFill>
+                  <a:srgbClr val="475569"/>
+                </a:solidFill>
+                <a:latin typeface="微软雅黑"/>
+              </a:defRPr>
+            </a:pPr>
+            <a:r>
+              <a:t>✔ 六级签字与 ECN 变更追溯</a:t>
+            </a:r>
+          </a:p>
+          <a:p>
+            <a:pPr>
+              <a:spcBef>
+                <a:spcPts val="800"/>
+              </a:spcBef>
+              <a:defRPr sz="1050">
+                <a:solidFill>
+                  <a:srgbClr val="475569"/>
+                </a:solidFill>
+                <a:latin typeface="微软雅黑"/>
+              </a:defRPr>
+            </a:pPr>
+            <a:r>
+              <a:t>✔ 细粒度工程锁保障协同安全</a:t>
+            </a:r>
+          </a:p>
+          <a:p>
+            <a:pPr>
+              <a:spcBef>
+                <a:spcPts val="800"/>
+              </a:spcBef>
+              <a:defRPr sz="1050">
+                <a:solidFill>
+                  <a:srgbClr val="475569"/>
+                </a:solidFill>
+                <a:latin typeface="微软雅黑"/>
+              </a:defRPr>
+            </a:pPr>
+            <a:r>
+              <a:t>✔ 离线单文件工程包完整导出</a:t>
             </a:r>
           </a:p>
         </p:txBody>
@@ -7437,14 +8059,100 @@
       <p:grpSpPr/>
       <p:sp>
         <p:nvSpPr>
-          <p:cNvPr id="2" name="Rounded Rectangle 1"/>
+          <p:cNvPr id="2" name="Rectangle 1"/>
           <p:cNvSpPr/>
           <p:nvPr/>
         </p:nvSpPr>
         <p:spPr>
           <a:xfrm>
-            <a:off x="731520" y="411480"/>
-            <a:ext cx="2011680" cy="320040"/>
+            <a:off x="0" y="0"/>
+            <a:ext cx="12191695" cy="6858000"/>
+          </a:xfrm>
+          <a:prstGeom prst="rect">
+            <a:avLst/>
+          </a:prstGeom>
+          <a:solidFill>
+            <a:srgbClr val="F8FAFC"/>
+          </a:solidFill>
+          <a:ln>
+            <a:noFill/>
+          </a:ln>
+        </p:spPr>
+        <p:style>
+          <a:lnRef idx="1">
+            <a:schemeClr val="accent1"/>
+          </a:lnRef>
+          <a:fillRef idx="3">
+            <a:schemeClr val="accent1"/>
+          </a:fillRef>
+          <a:effectRef idx="2">
+            <a:schemeClr val="accent1"/>
+          </a:effectRef>
+          <a:fontRef idx="minor">
+            <a:schemeClr val="lt1"/>
+          </a:fontRef>
+        </p:style>
+        <p:txBody>
+          <a:bodyPr rtlCol="0" anchor="ctr"/>
+          <a:lstStyle/>
+          <a:p>
+            <a:pPr algn="ctr"/>
+          </a:p>
+        </p:txBody>
+      </p:sp>
+      <p:sp>
+        <p:nvSpPr>
+          <p:cNvPr id="3" name="Rectangle 2"/>
+          <p:cNvSpPr/>
+          <p:nvPr/>
+        </p:nvSpPr>
+        <p:spPr>
+          <a:xfrm>
+            <a:off x="0" y="0"/>
+            <a:ext cx="12191695" cy="73152"/>
+          </a:xfrm>
+          <a:prstGeom prst="rect">
+            <a:avLst/>
+          </a:prstGeom>
+          <a:solidFill>
+            <a:srgbClr val="1D4ED8"/>
+          </a:solidFill>
+          <a:ln>
+            <a:noFill/>
+          </a:ln>
+        </p:spPr>
+        <p:style>
+          <a:lnRef idx="1">
+            <a:schemeClr val="accent1"/>
+          </a:lnRef>
+          <a:fillRef idx="3">
+            <a:schemeClr val="accent1"/>
+          </a:fillRef>
+          <a:effectRef idx="2">
+            <a:schemeClr val="accent1"/>
+          </a:effectRef>
+          <a:fontRef idx="minor">
+            <a:schemeClr val="lt1"/>
+          </a:fontRef>
+        </p:style>
+        <p:txBody>
+          <a:bodyPr rtlCol="0" anchor="ctr"/>
+          <a:lstStyle/>
+          <a:p>
+            <a:pPr algn="ctr"/>
+          </a:p>
+        </p:txBody>
+      </p:sp>
+      <p:sp>
+        <p:nvSpPr>
+          <p:cNvPr id="4" name="Rounded Rectangle 3"/>
+          <p:cNvSpPr/>
+          <p:nvPr/>
+        </p:nvSpPr>
+        <p:spPr>
+          <a:xfrm>
+            <a:off x="731520" y="384048"/>
+            <a:ext cx="2011680" cy="292608"/>
           </a:xfrm>
           <a:prstGeom prst="roundRect">
             <a:avLst/>
@@ -7473,33 +8181,33 @@
           </a:fontRef>
         </p:style>
         <p:txBody>
-          <a:bodyPr rtlCol="0" anchor="ctr" wrap="none"/>
+          <a:bodyPr rtlCol="0" anchor="ctr"/>
           <a:lstStyle/>
           <a:p>
             <a:pPr algn="ctr">
-              <a:defRPr sz="1100" b="1">
-                <a:solidFill>
-                  <a:srgbClr val="2563EB"/>
-                </a:solidFill>
-                <a:latin typeface="微软雅黑"/>
-              </a:defRPr>
-            </a:pPr>
-            <a:r>
-              <a:t>03. 核心技术创新</a:t>
-            </a:r>
-          </a:p>
-        </p:txBody>
-      </p:sp>
-      <p:sp>
-        <p:nvSpPr>
-          <p:cNvPr id="3" name="TextBox 2"/>
+              <a:defRPr sz="1000" b="1">
+                <a:solidFill>
+                  <a:srgbClr val="1D4ED8"/>
+                </a:solidFill>
+                <a:latin typeface="微软雅黑"/>
+              </a:defRPr>
+            </a:pPr>
+            <a:r>
+              <a:t>03. 核心技术方案</a:t>
+            </a:r>
+          </a:p>
+        </p:txBody>
+      </p:sp>
+      <p:sp>
+        <p:nvSpPr>
+          <p:cNvPr id="5" name="TextBox 4"/>
           <p:cNvSpPr txBox="1"/>
           <p:nvPr/>
         </p:nvSpPr>
         <p:spPr>
           <a:xfrm>
-            <a:off x="731520" y="777240"/>
-            <a:ext cx="10515600" cy="548640"/>
+            <a:off x="731520" y="749808"/>
+            <a:ext cx="10698480" cy="777240"/>
           </a:xfrm>
           <a:prstGeom prst="rect">
             <a:avLst/>
@@ -7513,7 +8221,7 @@
           <a:lstStyle/>
           <a:p>
             <a:pPr>
-              <a:defRPr sz="2200" b="1">
+              <a:defRPr sz="2100" b="1">
                 <a:solidFill>
                   <a:srgbClr val="0F172A"/>
                 </a:solidFill>
@@ -7521,47 +8229,47 @@
               </a:defRPr>
             </a:pPr>
             <a:r>
-              <a:t>工业级“三级容灾”推断架构：100% 业务高可用</a:t>
+              <a:t>“云端大模型 + 工业规则”协同驱动：敏捷、精准、轻量</a:t>
             </a:r>
           </a:p>
           <a:p>
             <a:pPr>
               <a:spcBef>
-                <a:spcPts val="400"/>
+                <a:spcPts val="300"/>
               </a:spcBef>
-              <a:defRPr sz="1200">
-                <a:solidFill>
-                  <a:srgbClr val="64748B"/>
-                </a:solidFill>
-                <a:latin typeface="微软雅黑"/>
-              </a:defRPr>
-            </a:pPr>
-            <a:r>
-              <a:t>既要云端大模型的极速智能，又要工业现场无网离线的绝对可靠</a:t>
-            </a:r>
-          </a:p>
-        </p:txBody>
-      </p:sp>
-      <p:sp>
-        <p:nvSpPr>
-          <p:cNvPr id="4" name="Rounded Rectangle 3"/>
+              <a:defRPr sz="1100">
+                <a:solidFill>
+                  <a:srgbClr val="475569"/>
+                </a:solidFill>
+                <a:latin typeface="微软雅黑"/>
+              </a:defRPr>
+            </a:pPr>
+            <a:r>
+              <a:t>大模型负责复杂模糊语义的自然语言理解，工程规则负责格式边界约束与后处理校验</a:t>
+            </a:r>
+          </a:p>
+        </p:txBody>
+      </p:sp>
+      <p:sp>
+        <p:nvSpPr>
+          <p:cNvPr id="6" name="Rounded Rectangle 5"/>
           <p:cNvSpPr/>
           <p:nvPr/>
         </p:nvSpPr>
         <p:spPr>
           <a:xfrm>
-            <a:off x="731520" y="1645920"/>
-            <a:ext cx="3474720" cy="4663440"/>
+            <a:off x="731520" y="1691640"/>
+            <a:ext cx="5257800" cy="3566160"/>
           </a:xfrm>
           <a:prstGeom prst="roundRect">
             <a:avLst/>
           </a:prstGeom>
           <a:solidFill>
-            <a:srgbClr val="EFF6FF"/>
+            <a:srgbClr val="FFFFFF"/>
           </a:solidFill>
           <a:ln w="19050">
             <a:solidFill>
-              <a:srgbClr val="2563EB"/>
+              <a:srgbClr val="1D4ED8"/>
             </a:solidFill>
           </a:ln>
         </p:spPr>
@@ -7589,20 +8297,20 @@
       </p:sp>
       <p:sp>
         <p:nvSpPr>
-          <p:cNvPr id="5" name="Rounded Rectangle 4"/>
+          <p:cNvPr id="7" name="Rounded Rectangle 6"/>
           <p:cNvSpPr/>
           <p:nvPr/>
         </p:nvSpPr>
         <p:spPr>
           <a:xfrm>
-            <a:off x="868680" y="1783080"/>
-            <a:ext cx="3200400" cy="731520"/>
+            <a:off x="914400" y="1874519"/>
+            <a:ext cx="4892040" cy="594360"/>
           </a:xfrm>
           <a:prstGeom prst="roundRect">
             <a:avLst/>
           </a:prstGeom>
           <a:solidFill>
-            <a:srgbClr val="2563EB"/>
+            <a:srgbClr val="1D4ED8"/>
           </a:solidFill>
           <a:ln>
             <a:noFill/>
@@ -7635,34 +8343,21 @@
               </a:defRPr>
             </a:pPr>
             <a:r>
-              <a:t>LEVEL 1: 云端优先</a:t>
-            </a:r>
-          </a:p>
-          <a:p>
-            <a:pPr>
-              <a:defRPr sz="1000">
-                <a:solidFill>
-                  <a:srgbClr val="F1F5F9"/>
-                </a:solidFill>
-                <a:latin typeface="微软雅黑"/>
-              </a:defRPr>
-            </a:pPr>
-            <a:r>
-              <a:t>极速高性能大模型</a:t>
-            </a:r>
-          </a:p>
-        </p:txBody>
-      </p:sp>
-      <p:sp>
-        <p:nvSpPr>
-          <p:cNvPr id="6" name="TextBox 5"/>
+              <a:t>🧠 云端大模型引擎 · 自然语言理解中枢</a:t>
+            </a:r>
+          </a:p>
+        </p:txBody>
+      </p:sp>
+      <p:sp>
+        <p:nvSpPr>
+          <p:cNvPr id="8" name="TextBox 7"/>
           <p:cNvSpPr txBox="1"/>
           <p:nvPr/>
         </p:nvSpPr>
         <p:spPr>
           <a:xfrm>
-            <a:off x="914400" y="2651760"/>
-            <a:ext cx="3108960" cy="3474720"/>
+            <a:off x="914400" y="2560320"/>
+            <a:ext cx="4892040" cy="2560320"/>
           </a:xfrm>
           <a:prstGeom prst="rect">
             <a:avLst/>
@@ -7680,31 +8375,15 @@
               <a:spcBef>
                 <a:spcPts val="800"/>
               </a:spcBef>
-              <a:defRPr sz="1100" b="1">
-                <a:solidFill>
-                  <a:srgbClr val="0F172A"/>
-                </a:solidFill>
-                <a:latin typeface="微软雅黑"/>
-              </a:defRPr>
-            </a:pPr>
-            <a:r>
-              <a:t>【模型技术】</a:t>
-            </a:r>
-          </a:p>
-          <a:p>
-            <a:pPr>
-              <a:spcBef>
-                <a:spcPts val="200"/>
-              </a:spcBef>
-              <a:defRPr sz="1100">
-                <a:solidFill>
-                  <a:srgbClr val="64748B"/>
-                </a:solidFill>
-                <a:latin typeface="微软雅黑"/>
-              </a:defRPr>
-            </a:pPr>
-            <a:r>
-              <a:t>智谱 GLM-4-Flash / 硅基流动等主流开放接口</a:t>
+              <a:defRPr sz="1050">
+                <a:solidFill>
+                  <a:srgbClr val="475569"/>
+                </a:solidFill>
+                <a:latin typeface="微软雅黑"/>
+              </a:defRPr>
+            </a:pPr>
+            <a:r>
+              <a:t>• 【成熟主流接口】接入智谱 GLM-4-Flash 等高性价比企业级大模型 API</a:t>
             </a:r>
           </a:p>
           <a:p>
@@ -7712,31 +8391,15 @@
               <a:spcBef>
                 <a:spcPts val="800"/>
               </a:spcBef>
-              <a:defRPr sz="1100" b="1">
-                <a:solidFill>
-                  <a:srgbClr val="0F172A"/>
-                </a:solidFill>
-                <a:latin typeface="微软雅黑"/>
-              </a:defRPr>
-            </a:pPr>
-            <a:r>
-              <a:t>【推断耗时】</a:t>
-            </a:r>
-          </a:p>
-          <a:p>
-            <a:pPr>
-              <a:spcBef>
-                <a:spcPts val="200"/>
-              </a:spcBef>
-              <a:defRPr sz="1100">
-                <a:solidFill>
-                  <a:srgbClr val="64748B"/>
-                </a:solidFill>
-                <a:latin typeface="微软雅黑"/>
-              </a:defRPr>
-            </a:pPr>
-            <a:r>
-              <a:t>约 0.8 ~ 1.2 秒（实测平均 0.93s）</a:t>
+              <a:defRPr sz="1050">
+                <a:solidFill>
+                  <a:srgbClr val="475569"/>
+                </a:solidFill>
+                <a:latin typeface="微软雅黑"/>
+              </a:defRPr>
+            </a:pPr>
+            <a:r>
+              <a:t>• 【秒级极速推断】实测单次请求响应平均仅 0.93 秒，连续录入毫无卡顿</a:t>
             </a:r>
           </a:p>
           <a:p>
@@ -7744,31 +8407,15 @@
               <a:spcBef>
                 <a:spcPts val="800"/>
               </a:spcBef>
-              <a:defRPr sz="1100" b="1">
-                <a:solidFill>
-                  <a:srgbClr val="0F172A"/>
-                </a:solidFill>
-                <a:latin typeface="微软雅黑"/>
-              </a:defRPr>
-            </a:pPr>
-            <a:r>
-              <a:t>【算力开销】</a:t>
-            </a:r>
-          </a:p>
-          <a:p>
-            <a:pPr>
-              <a:spcBef>
-                <a:spcPts val="200"/>
-              </a:spcBef>
-              <a:defRPr sz="1100">
-                <a:solidFill>
-                  <a:srgbClr val="64748B"/>
-                </a:solidFill>
-                <a:latin typeface="微软雅黑"/>
-              </a:defRPr>
-            </a:pPr>
-            <a:r>
-              <a:t>本地电脑 0 内存占用、0 CPU 负担</a:t>
+              <a:defRPr sz="1050">
+                <a:solidFill>
+                  <a:srgbClr val="475569"/>
+                </a:solidFill>
+                <a:latin typeface="微软雅黑"/>
+              </a:defRPr>
+            </a:pPr>
+            <a:r>
+              <a:t>• 【强大泛化能力】无论词序如何倒置、夹带特殊符号，均能准确还原真实语义</a:t>
             </a:r>
           </a:p>
           <a:p>
@@ -7776,55 +8423,39 @@
               <a:spcBef>
                 <a:spcPts val="800"/>
               </a:spcBef>
-              <a:defRPr sz="1100" b="1">
-                <a:solidFill>
-                  <a:srgbClr val="0F172A"/>
-                </a:solidFill>
-                <a:latin typeface="微软雅黑"/>
-              </a:defRPr>
-            </a:pPr>
-            <a:r>
-              <a:t>【适用场景】</a:t>
-            </a:r>
-          </a:p>
-          <a:p>
-            <a:pPr>
-              <a:spcBef>
-                <a:spcPts val="200"/>
-              </a:spcBef>
-              <a:defRPr sz="1100">
-                <a:solidFill>
-                  <a:srgbClr val="64748B"/>
-                </a:solidFill>
-                <a:latin typeface="微软雅黑"/>
-              </a:defRPr>
-            </a:pPr>
-            <a:r>
-              <a:t>日常有网环境，海量物料快速录入与批量处理</a:t>
-            </a:r>
-          </a:p>
-        </p:txBody>
-      </p:sp>
-      <p:sp>
-        <p:nvSpPr>
-          <p:cNvPr id="7" name="Rounded Rectangle 6"/>
+              <a:defRPr sz="1050">
+                <a:solidFill>
+                  <a:srgbClr val="475569"/>
+                </a:solidFill>
+                <a:latin typeface="微软雅黑"/>
+              </a:defRPr>
+            </a:pPr>
+            <a:r>
+              <a:t>• 【零本地算力负担】本地普通工位电脑 0 显存、0 CPU 负担，无需购置昂贵 GPU 服务器</a:t>
+            </a:r>
+          </a:p>
+        </p:txBody>
+      </p:sp>
+      <p:sp>
+        <p:nvSpPr>
+          <p:cNvPr id="9" name="Rounded Rectangle 8"/>
           <p:cNvSpPr/>
           <p:nvPr/>
         </p:nvSpPr>
         <p:spPr>
           <a:xfrm>
-            <a:off x="4343400" y="1645920"/>
-            <a:ext cx="3474720" cy="4663440"/>
+            <a:off x="6199632" y="1691640"/>
+            <a:ext cx="5257800" cy="3566160"/>
           </a:xfrm>
           <a:prstGeom prst="roundRect">
             <a:avLst/>
           </a:prstGeom>
           <a:solidFill>
-            <a:srgbClr val="FAF5FF"/>
+            <a:srgbClr val="FFFFFF"/>
           </a:solidFill>
           <a:ln w="19050">
             <a:solidFill>
-              <a:srgbClr val="9333EA"/>
+              <a:srgbClr val="10B981"/>
             </a:solidFill>
           </a:ln>
         </p:spPr>
@@ -7852,20 +8483,20 @@
       </p:sp>
       <p:sp>
         <p:nvSpPr>
-          <p:cNvPr id="8" name="Rounded Rectangle 7"/>
+          <p:cNvPr id="10" name="Rounded Rectangle 9"/>
           <p:cNvSpPr/>
           <p:nvPr/>
         </p:nvSpPr>
         <p:spPr>
           <a:xfrm>
-            <a:off x="4480560" y="1783080"/>
-            <a:ext cx="3200400" cy="731520"/>
+            <a:off x="6382512" y="1874519"/>
+            <a:ext cx="4892040" cy="594360"/>
           </a:xfrm>
           <a:prstGeom prst="roundRect">
             <a:avLst/>
           </a:prstGeom>
           <a:solidFill>
-            <a:srgbClr val="9333EA"/>
+            <a:srgbClr val="10B981"/>
           </a:solidFill>
           <a:ln>
             <a:noFill/>
@@ -7898,34 +8529,21 @@
               </a:defRPr>
             </a:pPr>
             <a:r>
-              <a:t>LEVEL 2: 本地离线</a:t>
-            </a:r>
-          </a:p>
-          <a:p>
-            <a:pPr>
-              <a:defRPr sz="1000">
-                <a:solidFill>
-                  <a:srgbClr val="F1F5F9"/>
-                </a:solidFill>
-                <a:latin typeface="微软雅黑"/>
-              </a:defRPr>
-            </a:pPr>
-            <a:r>
-              <a:t>边缘轻量大模型</a:t>
-            </a:r>
-          </a:p>
-        </p:txBody>
-      </p:sp>
-      <p:sp>
-        <p:nvSpPr>
-          <p:cNvPr id="9" name="TextBox 8"/>
+              <a:t>🛡️ 工业工程规则库 · 质量边界与格式校验</a:t>
+            </a:r>
+          </a:p>
+        </p:txBody>
+      </p:sp>
+      <p:sp>
+        <p:nvSpPr>
+          <p:cNvPr id="11" name="TextBox 10"/>
           <p:cNvSpPr txBox="1"/>
           <p:nvPr/>
         </p:nvSpPr>
         <p:spPr>
           <a:xfrm>
-            <a:off x="4526280" y="2651760"/>
-            <a:ext cx="3108960" cy="3474720"/>
+            <a:off x="6382512" y="2560320"/>
+            <a:ext cx="4892040" cy="2560320"/>
           </a:xfrm>
           <a:prstGeom prst="rect">
             <a:avLst/>
@@ -7943,31 +8561,15 @@
               <a:spcBef>
                 <a:spcPts val="800"/>
               </a:spcBef>
-              <a:defRPr sz="1100" b="1">
-                <a:solidFill>
-                  <a:srgbClr val="0F172A"/>
-                </a:solidFill>
-                <a:latin typeface="微软雅黑"/>
-              </a:defRPr>
-            </a:pPr>
-            <a:r>
-              <a:t>【模型技术】</a:t>
-            </a:r>
-          </a:p>
-          <a:p>
-            <a:pPr>
-              <a:spcBef>
-                <a:spcPts val="200"/>
-              </a:spcBef>
-              <a:defRPr sz="1100">
-                <a:solidFill>
-                  <a:srgbClr val="64748B"/>
-                </a:solidFill>
-                <a:latin typeface="微软雅黑"/>
-              </a:defRPr>
-            </a:pPr>
-            <a:r>
-              <a:t>Qwen2.5-0.5B-Instruct（仅约 980MB 权重）</a:t>
+              <a:defRPr sz="1050">
+                <a:solidFill>
+                  <a:srgbClr val="475569"/>
+                </a:solidFill>
+                <a:latin typeface="微软雅黑"/>
+              </a:defRPr>
+            </a:pPr>
+            <a:r>
+              <a:t>• 【风电品牌知识库】内嵌西门子、ABB、SSB、电力电子等主流厂商字典与中文化映射</a:t>
             </a:r>
           </a:p>
           <a:p>
@@ -7975,31 +8577,15 @@
               <a:spcBef>
                 <a:spcPts val="800"/>
               </a:spcBef>
-              <a:defRPr sz="1100" b="1">
-                <a:solidFill>
-                  <a:srgbClr val="0F172A"/>
-                </a:solidFill>
-                <a:latin typeface="微软雅黑"/>
-              </a:defRPr>
-            </a:pPr>
-            <a:r>
-              <a:t>【推断耗时】</a:t>
-            </a:r>
-          </a:p>
-          <a:p>
-            <a:pPr>
-              <a:spcBef>
-                <a:spcPts val="200"/>
-              </a:spcBef>
-              <a:defRPr sz="1100">
-                <a:solidFill>
-                  <a:srgbClr val="64748B"/>
-                </a:solidFill>
-                <a:latin typeface="微软雅黑"/>
-              </a:defRPr>
-            </a:pPr>
-            <a:r>
-              <a:t>约 2 ~ 5 秒（本地 CPU 推理）</a:t>
+              <a:defRPr sz="1050">
+                <a:solidFill>
+                  <a:srgbClr val="475569"/>
+                </a:solidFill>
+                <a:latin typeface="微软雅黑"/>
+              </a:defRPr>
+            </a:pPr>
+            <a:r>
+              <a:t>• 【噪声前缀过滤】专门剔除“变桨备件_”、“备件_”等分类前缀，避免混入物料名</a:t>
             </a:r>
           </a:p>
           <a:p>
@@ -8007,31 +8593,15 @@
               <a:spcBef>
                 <a:spcPts val="800"/>
               </a:spcBef>
-              <a:defRPr sz="1100" b="1">
-                <a:solidFill>
-                  <a:srgbClr val="0F172A"/>
-                </a:solidFill>
-                <a:latin typeface="微软雅黑"/>
-              </a:defRPr>
-            </a:pPr>
-            <a:r>
-              <a:t>【算力开销】</a:t>
-            </a:r>
-          </a:p>
-          <a:p>
-            <a:pPr>
-              <a:spcBef>
-                <a:spcPts val="200"/>
-              </a:spcBef>
-              <a:defRPr sz="1100">
-                <a:solidFill>
-                  <a:srgbClr val="64748B"/>
-                </a:solidFill>
-                <a:latin typeface="微软雅黑"/>
-              </a:defRPr>
-            </a:pPr>
-            <a:r>
-              <a:t>占用本地约 1GB 内存，无需独立显卡</a:t>
+              <a:defRPr sz="1050">
+                <a:solidFill>
+                  <a:srgbClr val="475569"/>
+                </a:solidFill>
+                <a:latin typeface="微软雅黑"/>
+              </a:defRPr>
+            </a:pPr>
+            <a:r>
+              <a:t>• 【纯净图号剥离】工业正则约束引擎，确保规格型号中绝不掺杂品牌文字与多余符号</a:t>
             </a:r>
           </a:p>
           <a:p>
@@ -8039,55 +8609,39 @@
               <a:spcBef>
                 <a:spcPts val="800"/>
               </a:spcBef>
-              <a:defRPr sz="1100" b="1">
-                <a:solidFill>
-                  <a:srgbClr val="0F172A"/>
-                </a:solidFill>
-                <a:latin typeface="微软雅黑"/>
-              </a:defRPr>
-            </a:pPr>
-            <a:r>
-              <a:t>【适用场景】</a:t>
-            </a:r>
-          </a:p>
-          <a:p>
-            <a:pPr>
-              <a:spcBef>
-                <a:spcPts val="200"/>
-              </a:spcBef>
-              <a:defRPr sz="1100">
-                <a:solidFill>
-                  <a:srgbClr val="64748B"/>
-                </a:solidFill>
-                <a:latin typeface="微软雅黑"/>
-              </a:defRPr>
-            </a:pPr>
-            <a:r>
-              <a:t>海上风电场、戈壁风场断网、涉密离线项目</a:t>
-            </a:r>
-          </a:p>
-        </p:txBody>
-      </p:sp>
-      <p:sp>
-        <p:nvSpPr>
-          <p:cNvPr id="10" name="Rounded Rectangle 9"/>
+              <a:defRPr sz="1050">
+                <a:solidFill>
+                  <a:srgbClr val="475569"/>
+                </a:solidFill>
+                <a:latin typeface="微软雅黑"/>
+              </a:defRPr>
+            </a:pPr>
+            <a:r>
+              <a:t>• 【毫秒级轻量兜底】遇到网络偶发超时时，自动触发本地轻量规则保底，保障业务连续</a:t>
+            </a:r>
+          </a:p>
+        </p:txBody>
+      </p:sp>
+      <p:sp>
+        <p:nvSpPr>
+          <p:cNvPr id="12" name="Rounded Rectangle 11"/>
           <p:cNvSpPr/>
           <p:nvPr/>
         </p:nvSpPr>
         <p:spPr>
           <a:xfrm>
-            <a:off x="7955280" y="1645920"/>
-            <a:ext cx="3474720" cy="4663440"/>
+            <a:off x="731520" y="5440680"/>
+            <a:ext cx="10728655" cy="868680"/>
           </a:xfrm>
           <a:prstGeom prst="roundRect">
             <a:avLst/>
           </a:prstGeom>
           <a:solidFill>
-            <a:srgbClr val="ECFDF5"/>
-          </a:solidFill>
-          <a:ln w="19050">
+            <a:srgbClr val="EFF6FF"/>
+          </a:solidFill>
+          <a:ln w="12700">
             <a:solidFill>
-              <a:srgbClr val="10B981"/>
+              <a:srgbClr val="BFDBFE"/>
             </a:solidFill>
           </a:ln>
         </p:spPr>
@@ -8106,227 +8660,35 @@
           </a:fontRef>
         </p:style>
         <p:txBody>
-          <a:bodyPr rtlCol="0" anchor="ctr"/>
-          <a:lstStyle/>
-          <a:p>
-            <a:pPr algn="ctr"/>
-          </a:p>
-        </p:txBody>
-      </p:sp>
-      <p:sp>
-        <p:nvSpPr>
-          <p:cNvPr id="11" name="Rounded Rectangle 10"/>
-          <p:cNvSpPr/>
-          <p:nvPr/>
-        </p:nvSpPr>
-        <p:spPr>
-          <a:xfrm>
-            <a:off x="8092440" y="1783080"/>
-            <a:ext cx="3200400" cy="731520"/>
-          </a:xfrm>
-          <a:prstGeom prst="roundRect">
-            <a:avLst/>
-          </a:prstGeom>
-          <a:solidFill>
-            <a:srgbClr val="10B981"/>
-          </a:solidFill>
-          <a:ln>
-            <a:noFill/>
-          </a:ln>
-        </p:spPr>
-        <p:style>
-          <a:lnRef idx="1">
-            <a:schemeClr val="accent1"/>
-          </a:lnRef>
-          <a:fillRef idx="3">
-            <a:schemeClr val="accent1"/>
-          </a:fillRef>
-          <a:effectRef idx="2">
-            <a:schemeClr val="accent1"/>
-          </a:effectRef>
-          <a:fontRef idx="minor">
-            <a:schemeClr val="lt1"/>
-          </a:fontRef>
-        </p:style>
-        <p:txBody>
-          <a:bodyPr rtlCol="0" anchor="ctr"/>
+          <a:bodyPr rtlCol="0" anchor="ctr" wrap="square"/>
           <a:lstStyle/>
           <a:p>
             <a:pPr algn="ctr">
-              <a:defRPr sz="1300" b="1">
-                <a:solidFill>
-                  <a:srgbClr val="FFFFFF"/>
-                </a:solidFill>
-                <a:latin typeface="微软雅黑"/>
-              </a:defRPr>
-            </a:pPr>
-            <a:r>
-              <a:t>LEVEL 3: 规则兜底</a:t>
-            </a:r>
-          </a:p>
-          <a:p>
-            <a:pPr>
-              <a:defRPr sz="1000">
-                <a:solidFill>
-                  <a:srgbClr val="F1F5F9"/>
-                </a:solidFill>
-                <a:latin typeface="微软雅黑"/>
-              </a:defRPr>
-            </a:pPr>
-            <a:r>
-              <a:t>工业启发式规则引擎</a:t>
-            </a:r>
-          </a:p>
-        </p:txBody>
-      </p:sp>
-      <p:sp>
-        <p:nvSpPr>
-          <p:cNvPr id="12" name="TextBox 11"/>
-          <p:cNvSpPr txBox="1"/>
-          <p:nvPr/>
-        </p:nvSpPr>
-        <p:spPr>
-          <a:xfrm>
-            <a:off x="8138160" y="2651760"/>
-            <a:ext cx="3108960" cy="3474720"/>
-          </a:xfrm>
-          <a:prstGeom prst="rect">
-            <a:avLst/>
-          </a:prstGeom>
-          <a:noFill/>
-        </p:spPr>
-        <p:txBody>
-          <a:bodyPr wrap="square">
-            <a:spAutoFit/>
-          </a:bodyPr>
-          <a:lstStyle/>
-          <a:p/>
+              <a:defRPr sz="1200" b="1">
+                <a:solidFill>
+                  <a:srgbClr val="1E3A8A"/>
+                </a:solidFill>
+                <a:latin typeface="微软雅黑"/>
+              </a:defRPr>
+            </a:pPr>
+            <a:r>
+              <a:t>💡 架构价值总结：以极低成本换取极高业务效能</a:t>
+            </a:r>
+          </a:p>
           <a:p>
             <a:pPr>
               <a:spcBef>
-                <a:spcPts val="800"/>
+                <a:spcPts val="300"/>
               </a:spcBef>
-              <a:defRPr sz="1100" b="1">
-                <a:solidFill>
-                  <a:srgbClr val="0F172A"/>
-                </a:solidFill>
-                <a:latin typeface="微软雅黑"/>
-              </a:defRPr>
-            </a:pPr>
-            <a:r>
-              <a:t>【模型技术】</a:t>
-            </a:r>
-          </a:p>
-          <a:p>
-            <a:pPr>
-              <a:spcBef>
-                <a:spcPts val="200"/>
-              </a:spcBef>
-              <a:defRPr sz="1100">
-                <a:solidFill>
-                  <a:srgbClr val="64748B"/>
-                </a:solidFill>
-                <a:latin typeface="微软雅黑"/>
-              </a:defRPr>
-            </a:pPr>
-            <a:r>
-              <a:t>工业正则语法分析 + 知名备件品牌知识库</a:t>
-            </a:r>
-          </a:p>
-          <a:p>
-            <a:pPr>
-              <a:spcBef>
-                <a:spcPts val="800"/>
-              </a:spcBef>
-              <a:defRPr sz="1100" b="1">
-                <a:solidFill>
-                  <a:srgbClr val="0F172A"/>
-                </a:solidFill>
-                <a:latin typeface="微软雅黑"/>
-              </a:defRPr>
-            </a:pPr>
-            <a:r>
-              <a:t>【推断耗时】</a:t>
-            </a:r>
-          </a:p>
-          <a:p>
-            <a:pPr>
-              <a:spcBef>
-                <a:spcPts val="200"/>
-              </a:spcBef>
-              <a:defRPr sz="1100">
-                <a:solidFill>
-                  <a:srgbClr val="64748B"/>
-                </a:solidFill>
-                <a:latin typeface="微软雅黑"/>
-              </a:defRPr>
-            </a:pPr>
-            <a:r>
-              <a:t>&lt; 10 毫秒（近乎瞬间完成）</a:t>
-            </a:r>
-          </a:p>
-          <a:p>
-            <a:pPr>
-              <a:spcBef>
-                <a:spcPts val="800"/>
-              </a:spcBef>
-              <a:defRPr sz="1100" b="1">
-                <a:solidFill>
-                  <a:srgbClr val="0F172A"/>
-                </a:solidFill>
-                <a:latin typeface="微软雅黑"/>
-              </a:defRPr>
-            </a:pPr>
-            <a:r>
-              <a:t>【算力开销】</a:t>
-            </a:r>
-          </a:p>
-          <a:p>
-            <a:pPr>
-              <a:spcBef>
-                <a:spcPts val="200"/>
-              </a:spcBef>
-              <a:defRPr sz="1100">
-                <a:solidFill>
-                  <a:srgbClr val="64748B"/>
-                </a:solidFill>
-                <a:latin typeface="微软雅黑"/>
-              </a:defRPr>
-            </a:pPr>
-            <a:r>
-              <a:t>几乎零开销，纯轻量脚本执行</a:t>
-            </a:r>
-          </a:p>
-          <a:p>
-            <a:pPr>
-              <a:spcBef>
-                <a:spcPts val="800"/>
-              </a:spcBef>
-              <a:defRPr sz="1100" b="1">
-                <a:solidFill>
-                  <a:srgbClr val="0F172A"/>
-                </a:solidFill>
-                <a:latin typeface="微软雅黑"/>
-              </a:defRPr>
-            </a:pPr>
-            <a:r>
-              <a:t>【适用场景】</a:t>
-            </a:r>
-          </a:p>
-          <a:p>
-            <a:pPr>
-              <a:spcBef>
-                <a:spcPts val="200"/>
-              </a:spcBef>
-              <a:defRPr sz="1100">
-                <a:solidFill>
-                  <a:srgbClr val="64748B"/>
-                </a:solidFill>
-                <a:latin typeface="微软雅黑"/>
-              </a:defRPr>
-            </a:pPr>
-            <a:r>
-              <a:t>云端超时或网络中断且本地模型未就绪时兜底</a:t>
+              <a:defRPr sz="1050">
+                <a:solidFill>
+                  <a:srgbClr val="475569"/>
+                </a:solidFill>
+                <a:latin typeface="微软雅黑"/>
+              </a:defRPr>
+            </a:pPr>
+            <a:r>
+              <a:t>轻量纯 Web 架构（Python Flask + SQLite + Waitress 多线程），科室工程师打开浏览器即可使用，无需本地安装维护复杂的深度学习显卡环境，开箱即用，落地极快。</a:t>
             </a:r>
           </a:p>
         </p:txBody>
@@ -8351,14 +8713,100 @@
       <p:grpSpPr/>
       <p:sp>
         <p:nvSpPr>
-          <p:cNvPr id="2" name="Rounded Rectangle 1"/>
+          <p:cNvPr id="2" name="Rectangle 1"/>
           <p:cNvSpPr/>
           <p:nvPr/>
         </p:nvSpPr>
         <p:spPr>
           <a:xfrm>
-            <a:off x="731520" y="411480"/>
-            <a:ext cx="2011680" cy="320040"/>
+            <a:off x="0" y="0"/>
+            <a:ext cx="12191695" cy="6858000"/>
+          </a:xfrm>
+          <a:prstGeom prst="rect">
+            <a:avLst/>
+          </a:prstGeom>
+          <a:solidFill>
+            <a:srgbClr val="F8FAFC"/>
+          </a:solidFill>
+          <a:ln>
+            <a:noFill/>
+          </a:ln>
+        </p:spPr>
+        <p:style>
+          <a:lnRef idx="1">
+            <a:schemeClr val="accent1"/>
+          </a:lnRef>
+          <a:fillRef idx="3">
+            <a:schemeClr val="accent1"/>
+          </a:fillRef>
+          <a:effectRef idx="2">
+            <a:schemeClr val="accent1"/>
+          </a:effectRef>
+          <a:fontRef idx="minor">
+            <a:schemeClr val="lt1"/>
+          </a:fontRef>
+        </p:style>
+        <p:txBody>
+          <a:bodyPr rtlCol="0" anchor="ctr"/>
+          <a:lstStyle/>
+          <a:p>
+            <a:pPr algn="ctr"/>
+          </a:p>
+        </p:txBody>
+      </p:sp>
+      <p:sp>
+        <p:nvSpPr>
+          <p:cNvPr id="3" name="Rectangle 2"/>
+          <p:cNvSpPr/>
+          <p:nvPr/>
+        </p:nvSpPr>
+        <p:spPr>
+          <a:xfrm>
+            <a:off x="0" y="0"/>
+            <a:ext cx="12191695" cy="73152"/>
+          </a:xfrm>
+          <a:prstGeom prst="rect">
+            <a:avLst/>
+          </a:prstGeom>
+          <a:solidFill>
+            <a:srgbClr val="1D4ED8"/>
+          </a:solidFill>
+          <a:ln>
+            <a:noFill/>
+          </a:ln>
+        </p:spPr>
+        <p:style>
+          <a:lnRef idx="1">
+            <a:schemeClr val="accent1"/>
+          </a:lnRef>
+          <a:fillRef idx="3">
+            <a:schemeClr val="accent1"/>
+          </a:fillRef>
+          <a:effectRef idx="2">
+            <a:schemeClr val="accent1"/>
+          </a:effectRef>
+          <a:fontRef idx="minor">
+            <a:schemeClr val="lt1"/>
+          </a:fontRef>
+        </p:style>
+        <p:txBody>
+          <a:bodyPr rtlCol="0" anchor="ctr"/>
+          <a:lstStyle/>
+          <a:p>
+            <a:pPr algn="ctr"/>
+          </a:p>
+        </p:txBody>
+      </p:sp>
+      <p:sp>
+        <p:nvSpPr>
+          <p:cNvPr id="4" name="Rounded Rectangle 3"/>
+          <p:cNvSpPr/>
+          <p:nvPr/>
+        </p:nvSpPr>
+        <p:spPr>
+          <a:xfrm>
+            <a:off x="731520" y="384048"/>
+            <a:ext cx="2011680" cy="292608"/>
           </a:xfrm>
           <a:prstGeom prst="roundRect">
             <a:avLst/>
@@ -8387,13 +8835,13 @@
           </a:fontRef>
         </p:style>
         <p:txBody>
-          <a:bodyPr rtlCol="0" anchor="ctr" wrap="none"/>
+          <a:bodyPr rtlCol="0" anchor="ctr"/>
           <a:lstStyle/>
           <a:p>
             <a:pPr algn="ctr">
-              <a:defRPr sz="1100" b="1">
-                <a:solidFill>
-                  <a:srgbClr val="2563EB"/>
+              <a:defRPr sz="1000" b="1">
+                <a:solidFill>
+                  <a:srgbClr val="1D4ED8"/>
                 </a:solidFill>
                 <a:latin typeface="微软雅黑"/>
               </a:defRPr>
@@ -8406,14 +8854,14 @@
       </p:sp>
       <p:sp>
         <p:nvSpPr>
-          <p:cNvPr id="3" name="TextBox 2"/>
+          <p:cNvPr id="5" name="TextBox 4"/>
           <p:cNvSpPr txBox="1"/>
           <p:nvPr/>
         </p:nvSpPr>
         <p:spPr>
           <a:xfrm>
-            <a:off x="731520" y="777240"/>
-            <a:ext cx="10515600" cy="548640"/>
+            <a:off x="731520" y="749808"/>
+            <a:ext cx="10698480" cy="777240"/>
           </a:xfrm>
           <a:prstGeom prst="rect">
             <a:avLst/>
@@ -8427,7 +8875,7 @@
           <a:lstStyle/>
           <a:p>
             <a:pPr>
-              <a:defRPr sz="2200" b="1">
+              <a:defRPr sz="2100" b="1">
                 <a:solidFill>
                   <a:srgbClr val="0F172A"/>
                 </a:solidFill>
@@ -8435,17 +8883,17 @@
               </a:defRPr>
             </a:pPr>
             <a:r>
-              <a:t>非标物料智能拆解与语义实体抽取实机展示</a:t>
+              <a:t>非标物料智能拆解与实体标准化抽取实机展示</a:t>
             </a:r>
           </a:p>
           <a:p>
             <a:pPr>
               <a:spcBef>
-                <a:spcPts val="400"/>
+                <a:spcPts val="300"/>
               </a:spcBef>
-              <a:defRPr sz="1200">
-                <a:solidFill>
-                  <a:srgbClr val="64748B"/>
+              <a:defRPr sz="1100">
+                <a:solidFill>
+                  <a:srgbClr val="475569"/>
                 </a:solidFill>
                 <a:latin typeface="微软雅黑"/>
               </a:defRPr>
@@ -8458,20 +8906,221 @@
       </p:sp>
       <p:sp>
         <p:nvSpPr>
-          <p:cNvPr id="4" name="Rounded Rectangle 3"/>
+          <p:cNvPr id="6" name="Rounded Rectangle 5"/>
           <p:cNvSpPr/>
           <p:nvPr/>
         </p:nvSpPr>
         <p:spPr>
           <a:xfrm>
-            <a:off x="731520" y="1645920"/>
-            <a:ext cx="10728655" cy="1417320"/>
+            <a:off x="731520" y="1691640"/>
+            <a:ext cx="4846320" cy="4846320"/>
           </a:xfrm>
           <a:prstGeom prst="roundRect">
             <a:avLst/>
           </a:prstGeom>
           <a:solidFill>
-            <a:srgbClr val="F8FAFC"/>
+            <a:srgbClr val="FFFFFF"/>
+          </a:solidFill>
+          <a:ln w="19050">
+            <a:solidFill>
+              <a:srgbClr val="1D4ED8"/>
+            </a:solidFill>
+          </a:ln>
+        </p:spPr>
+        <p:style>
+          <a:lnRef idx="1">
+            <a:schemeClr val="accent1"/>
+          </a:lnRef>
+          <a:fillRef idx="3">
+            <a:schemeClr val="accent1"/>
+          </a:fillRef>
+          <a:effectRef idx="2">
+            <a:schemeClr val="accent1"/>
+          </a:effectRef>
+          <a:fontRef idx="minor">
+            <a:schemeClr val="lt1"/>
+          </a:fontRef>
+        </p:style>
+        <p:txBody>
+          <a:bodyPr rtlCol="0" anchor="ctr"/>
+          <a:lstStyle/>
+          <a:p>
+            <a:pPr algn="ctr"/>
+          </a:p>
+        </p:txBody>
+      </p:sp>
+      <p:sp>
+        <p:nvSpPr>
+          <p:cNvPr id="7" name="Rounded Rectangle 6"/>
+          <p:cNvSpPr/>
+          <p:nvPr/>
+        </p:nvSpPr>
+        <p:spPr>
+          <a:xfrm>
+            <a:off x="731520" y="1691640"/>
+            <a:ext cx="4846320" cy="347472"/>
+          </a:xfrm>
+          <a:prstGeom prst="roundRect">
+            <a:avLst/>
+          </a:prstGeom>
+          <a:solidFill>
+            <a:srgbClr val="0F172A"/>
+          </a:solidFill>
+          <a:ln>
+            <a:noFill/>
+          </a:ln>
+        </p:spPr>
+        <p:style>
+          <a:lnRef idx="1">
+            <a:schemeClr val="accent1"/>
+          </a:lnRef>
+          <a:fillRef idx="3">
+            <a:schemeClr val="accent1"/>
+          </a:fillRef>
+          <a:effectRef idx="2">
+            <a:schemeClr val="accent1"/>
+          </a:effectRef>
+          <a:fontRef idx="minor">
+            <a:schemeClr val="lt1"/>
+          </a:fontRef>
+        </p:style>
+        <p:txBody>
+          <a:bodyPr rtlCol="0" anchor="ctr"/>
+          <a:lstStyle/>
+          <a:p>
+            <a:pPr algn="ctr">
+              <a:defRPr sz="1000" b="1">
+                <a:solidFill>
+                  <a:srgbClr val="FFFFFF"/>
+                </a:solidFill>
+                <a:latin typeface="微软雅黑"/>
+              </a:defRPr>
+            </a:pPr>
+            <a:r>
+              <a:t>✨ 大模型智能提取实机弹窗 (Live UI)</a:t>
+            </a:r>
+          </a:p>
+        </p:txBody>
+      </p:sp>
+      <p:pic>
+        <p:nvPicPr>
+          <p:cNvPr id="8" name="Picture 7" descr="ui_ai_demo_real.png"/>
+          <p:cNvPicPr>
+            <a:picLocks noChangeAspect="1"/>
+          </p:cNvPicPr>
+          <p:nvPr/>
+        </p:nvPicPr>
+        <p:blipFill>
+          <a:blip r:embed="rId2"/>
+          <a:stretch>
+            <a:fillRect/>
+          </a:stretch>
+        </p:blipFill>
+        <p:spPr>
+          <a:xfrm>
+            <a:off x="804672" y="2084831"/>
+            <a:ext cx="4700016" cy="3017520"/>
+          </a:xfrm>
+          <a:prstGeom prst="rect">
+            <a:avLst/>
+          </a:prstGeom>
+        </p:spPr>
+      </p:pic>
+      <p:sp>
+        <p:nvSpPr>
+          <p:cNvPr id="9" name="Rounded Rectangle 8"/>
+          <p:cNvSpPr/>
+          <p:nvPr/>
+        </p:nvSpPr>
+        <p:spPr>
+          <a:xfrm>
+            <a:off x="804672" y="5166360"/>
+            <a:ext cx="4700016" cy="1280160"/>
+          </a:xfrm>
+          <a:prstGeom prst="roundRect">
+            <a:avLst/>
+          </a:prstGeom>
+          <a:solidFill>
+            <a:srgbClr val="ECFDF5"/>
+          </a:solidFill>
+          <a:ln w="12700">
+            <a:solidFill>
+              <a:srgbClr val="A7F3D0"/>
+            </a:solidFill>
+          </a:ln>
+        </p:spPr>
+        <p:style>
+          <a:lnRef idx="1">
+            <a:schemeClr val="accent1"/>
+          </a:lnRef>
+          <a:fillRef idx="3">
+            <a:schemeClr val="accent1"/>
+          </a:fillRef>
+          <a:effectRef idx="2">
+            <a:schemeClr val="accent1"/>
+          </a:effectRef>
+          <a:fontRef idx="minor">
+            <a:schemeClr val="lt1"/>
+          </a:fontRef>
+        </p:style>
+        <p:txBody>
+          <a:bodyPr rtlCol="0" anchor="ctr" wrap="square"/>
+          <a:lstStyle/>
+          <a:p>
+            <a:pPr algn="ctr">
+              <a:defRPr sz="1100" b="1">
+                <a:solidFill>
+                  <a:srgbClr val="065F46"/>
+                </a:solidFill>
+                <a:latin typeface="微软雅黑"/>
+              </a:defRPr>
+            </a:pPr>
+            <a:r>
+              <a:t>⚡ 秒级云端推断 · 真实回填效果</a:t>
+            </a:r>
+          </a:p>
+          <a:p>
+            <a:pPr>
+              <a:spcBef>
+                <a:spcPts val="300"/>
+              </a:spcBef>
+              <a:defRPr sz="950">
+                <a:solidFill>
+                  <a:srgbClr val="475569"/>
+                </a:solidFill>
+                <a:latin typeface="微软雅黑"/>
+              </a:defRPr>
+            </a:pPr>
+            <a:r>
+              <a:t>✔ 单次推断响应实测仅 ~0.93s，连续录入零卡顿</a:t>
+            </a:r>
+            <a:br/>
+            <a:r>
+              <a:t>✔ 自动抽取名称、型号、厂商并绿框高亮回填</a:t>
+            </a:r>
+            <a:br/>
+            <a:r>
+              <a:t>✔ 普通办公电脑即可使用，零本地 GPU 门槛</a:t>
+            </a:r>
+          </a:p>
+        </p:txBody>
+      </p:sp>
+      <p:sp>
+        <p:nvSpPr>
+          <p:cNvPr id="10" name="Rounded Rectangle 9"/>
+          <p:cNvSpPr/>
+          <p:nvPr/>
+        </p:nvSpPr>
+        <p:spPr>
+          <a:xfrm>
+            <a:off x="5760720" y="1691640"/>
+            <a:ext cx="5699455" cy="1536192"/>
+          </a:xfrm>
+          <a:prstGeom prst="roundRect">
+            <a:avLst/>
+          </a:prstGeom>
+          <a:solidFill>
+            <a:srgbClr val="FFFFFF"/>
           </a:solidFill>
           <a:ln w="12700">
             <a:solidFill>
@@ -8503,14 +9152,14 @@
       </p:sp>
       <p:sp>
         <p:nvSpPr>
-          <p:cNvPr id="5" name="TextBox 4"/>
+          <p:cNvPr id="11" name="TextBox 10"/>
           <p:cNvSpPr txBox="1"/>
           <p:nvPr/>
         </p:nvSpPr>
         <p:spPr>
           <a:xfrm>
-            <a:off x="914400" y="1719072"/>
-            <a:ext cx="10332720" cy="365760"/>
+            <a:off x="5897880" y="1764792"/>
+            <a:ext cx="5394960" cy="292608"/>
           </a:xfrm>
           <a:prstGeom prst="rect">
             <a:avLst/>
@@ -8524,7 +9173,7 @@
           <a:lstStyle/>
           <a:p>
             <a:pPr>
-              <a:defRPr sz="1200" b="1">
+              <a:defRPr sz="1150" b="1">
                 <a:solidFill>
                   <a:srgbClr val="1E3A8A"/>
                 </a:solidFill>
@@ -8532,31 +9181,31 @@
               </a:defRPr>
             </a:pPr>
             <a:r>
-              <a:t>案例 1：典型工业下划线拼接（干扰项多）</a:t>
-            </a:r>
-          </a:p>
-        </p:txBody>
-      </p:sp>
-      <p:sp>
-        <p:nvSpPr>
-          <p:cNvPr id="6" name="Rounded Rectangle 5"/>
+              <a:t>案例 1：典型工业下划线拼接（多重前缀噪声）</a:t>
+            </a:r>
+          </a:p>
+        </p:txBody>
+      </p:sp>
+      <p:sp>
+        <p:nvSpPr>
+          <p:cNvPr id="12" name="Rounded Rectangle 11"/>
           <p:cNvSpPr/>
           <p:nvPr/>
         </p:nvSpPr>
         <p:spPr>
           <a:xfrm>
-            <a:off x="914400" y="2103120"/>
-            <a:ext cx="3931920" cy="777240"/>
+            <a:off x="5897880" y="2093976"/>
+            <a:ext cx="5394960" cy="438912"/>
           </a:xfrm>
           <a:prstGeom prst="roundRect">
             <a:avLst/>
           </a:prstGeom>
           <a:solidFill>
-            <a:srgbClr val="F1F5F9"/>
+            <a:srgbClr val="FFF1F2"/>
           </a:solidFill>
           <a:ln>
             <a:solidFill>
-              <a:srgbClr val="CBD5E1"/>
+              <a:srgbClr val="FECDD3"/>
             </a:solidFill>
           </a:ln>
         </p:spPr>
@@ -8579,51 +9228,40 @@
           <a:lstStyle/>
           <a:p>
             <a:pPr algn="ctr">
-              <a:defRPr sz="1000" b="1">
-                <a:solidFill>
-                  <a:srgbClr val="64748B"/>
-                </a:solidFill>
-                <a:latin typeface="微软雅黑"/>
-              </a:defRPr>
-            </a:pPr>
-            <a:r>
-              <a:t>📥 原始混乱输入：</a:t>
-            </a:r>
-          </a:p>
-          <a:p>
-            <a:pPr>
-              <a:defRPr sz="1100" b="1">
-                <a:solidFill>
-                  <a:srgbClr val="EF4444"/>
-                </a:solidFill>
-                <a:latin typeface="Arial"/>
-              </a:defRPr>
-            </a:pPr>
-            <a:r>
-              <a:t>变桨备件_传感器撞块_DBJ00.004.1386.01_电力电子</a:t>
-            </a:r>
-          </a:p>
-        </p:txBody>
-      </p:sp>
-      <p:sp>
-        <p:nvSpPr>
-          <p:cNvPr id="7" name="Right Arrow 6"/>
+              <a:defRPr sz="950" b="1">
+                <a:solidFill>
+                  <a:srgbClr val="F43F5E"/>
+                </a:solidFill>
+                <a:latin typeface="微软雅黑"/>
+              </a:defRPr>
+            </a:pPr>
+            <a:r>
+              <a:t>📥 原始描述：变桨备件_传感器撞块_DBJ00.004.1386.01_电力电子</a:t>
+            </a:r>
+          </a:p>
+        </p:txBody>
+      </p:sp>
+      <p:sp>
+        <p:nvSpPr>
+          <p:cNvPr id="13" name="Rounded Rectangle 12"/>
           <p:cNvSpPr/>
           <p:nvPr/>
         </p:nvSpPr>
         <p:spPr>
           <a:xfrm>
-            <a:off x="4983480" y="2304288"/>
-            <a:ext cx="320040" cy="365760"/>
-          </a:xfrm>
-          <a:prstGeom prst="rightArrow">
-            <a:avLst/>
-          </a:prstGeom>
-          <a:solidFill>
-            <a:srgbClr val="2563EB"/>
+            <a:off x="5897880" y="2587752"/>
+            <a:ext cx="1755648" cy="548640"/>
+          </a:xfrm>
+          <a:prstGeom prst="roundRect">
+            <a:avLst/>
+          </a:prstGeom>
+          <a:solidFill>
+            <a:srgbClr val="ECFDF5"/>
           </a:solidFill>
           <a:ln>
-            <a:noFill/>
+            <a:solidFill>
+              <a:srgbClr val="A7F3D0"/>
+            </a:solidFill>
           </a:ln>
         </p:spPr>
         <p:style>
@@ -8641,23 +9279,33 @@
           </a:fontRef>
         </p:style>
         <p:txBody>
-          <a:bodyPr rtlCol="0" anchor="ctr"/>
-          <a:lstStyle/>
-          <a:p>
-            <a:pPr algn="ctr"/>
-          </a:p>
-        </p:txBody>
-      </p:sp>
-      <p:sp>
-        <p:nvSpPr>
-          <p:cNvPr id="8" name="Rounded Rectangle 7"/>
+          <a:bodyPr rtlCol="0" anchor="ctr" wrap="square"/>
+          <a:lstStyle/>
+          <a:p>
+            <a:pPr algn="ctr">
+              <a:defRPr sz="950" b="1">
+                <a:solidFill>
+                  <a:srgbClr val="047857"/>
+                </a:solidFill>
+                <a:latin typeface="微软雅黑"/>
+              </a:defRPr>
+            </a:pPr>
+            <a:r>
+              <a:t>✨ 名称：传感器撞块</a:t>
+            </a:r>
+          </a:p>
+        </p:txBody>
+      </p:sp>
+      <p:sp>
+        <p:nvSpPr>
+          <p:cNvPr id="14" name="Rounded Rectangle 13"/>
           <p:cNvSpPr/>
           <p:nvPr/>
         </p:nvSpPr>
         <p:spPr>
           <a:xfrm>
-            <a:off x="5440680" y="2103120"/>
-            <a:ext cx="1874519" cy="777240"/>
+            <a:off x="7708392" y="2587752"/>
+            <a:ext cx="1755648" cy="548640"/>
           </a:xfrm>
           <a:prstGeom prst="roundRect">
             <a:avLst/>
@@ -8690,7 +9338,7 @@
           <a:lstStyle/>
           <a:p>
             <a:pPr algn="ctr">
-              <a:defRPr sz="1000">
+              <a:defRPr sz="950" b="1">
                 <a:solidFill>
                   <a:srgbClr val="047857"/>
                 </a:solidFill>
@@ -8698,34 +9346,21 @@
               </a:defRPr>
             </a:pPr>
             <a:r>
-              <a:t>✨ 物料名称</a:t>
-            </a:r>
-          </a:p>
-          <a:p>
-            <a:pPr>
-              <a:defRPr sz="1100" b="1">
-                <a:solidFill>
-                  <a:srgbClr val="0F172A"/>
-                </a:solidFill>
-                <a:latin typeface="微软雅黑"/>
-              </a:defRPr>
-            </a:pPr>
-            <a:r>
-              <a:t>传感器撞块</a:t>
-            </a:r>
-          </a:p>
-        </p:txBody>
-      </p:sp>
-      <p:sp>
-        <p:nvSpPr>
-          <p:cNvPr id="9" name="Rounded Rectangle 8"/>
+              <a:t>✨ 型号：DBJ00.004.1386.01</a:t>
+            </a:r>
+          </a:p>
+        </p:txBody>
+      </p:sp>
+      <p:sp>
+        <p:nvSpPr>
+          <p:cNvPr id="15" name="Rounded Rectangle 14"/>
           <p:cNvSpPr/>
           <p:nvPr/>
         </p:nvSpPr>
         <p:spPr>
           <a:xfrm>
-            <a:off x="7406640" y="2103120"/>
-            <a:ext cx="1874519" cy="777240"/>
+            <a:off x="9518904" y="2587752"/>
+            <a:ext cx="1755648" cy="548640"/>
           </a:xfrm>
           <a:prstGeom prst="roundRect">
             <a:avLst/>
@@ -8758,7 +9393,7 @@
           <a:lstStyle/>
           <a:p>
             <a:pPr algn="ctr">
-              <a:defRPr sz="1000">
+              <a:defRPr sz="950" b="1">
                 <a:solidFill>
                   <a:srgbClr val="047857"/>
                 </a:solidFill>
@@ -8766,34 +9401,157 @@
               </a:defRPr>
             </a:pPr>
             <a:r>
-              <a:t>✨ 规格型号</a:t>
-            </a:r>
-          </a:p>
+              <a:t>✨ 厂商：电力电子</a:t>
+            </a:r>
+          </a:p>
+        </p:txBody>
+      </p:sp>
+      <p:sp>
+        <p:nvSpPr>
+          <p:cNvPr id="16" name="Rounded Rectangle 15"/>
+          <p:cNvSpPr/>
+          <p:nvPr/>
+        </p:nvSpPr>
+        <p:spPr>
+          <a:xfrm>
+            <a:off x="5760720" y="3337560"/>
+            <a:ext cx="5699455" cy="1536192"/>
+          </a:xfrm>
+          <a:prstGeom prst="roundRect">
+            <a:avLst/>
+          </a:prstGeom>
+          <a:solidFill>
+            <a:srgbClr val="FFFFFF"/>
+          </a:solidFill>
+          <a:ln w="12700">
+            <a:solidFill>
+              <a:srgbClr val="E2E8F0"/>
+            </a:solidFill>
+          </a:ln>
+        </p:spPr>
+        <p:style>
+          <a:lnRef idx="1">
+            <a:schemeClr val="accent1"/>
+          </a:lnRef>
+          <a:fillRef idx="3">
+            <a:schemeClr val="accent1"/>
+          </a:fillRef>
+          <a:effectRef idx="2">
+            <a:schemeClr val="accent1"/>
+          </a:effectRef>
+          <a:fontRef idx="minor">
+            <a:schemeClr val="lt1"/>
+          </a:fontRef>
+        </p:style>
+        <p:txBody>
+          <a:bodyPr rtlCol="0" anchor="ctr"/>
+          <a:lstStyle/>
+          <a:p>
+            <a:pPr algn="ctr"/>
+          </a:p>
+        </p:txBody>
+      </p:sp>
+      <p:sp>
+        <p:nvSpPr>
+          <p:cNvPr id="17" name="TextBox 16"/>
+          <p:cNvSpPr txBox="1"/>
+          <p:nvPr/>
+        </p:nvSpPr>
+        <p:spPr>
+          <a:xfrm>
+            <a:off x="5897880" y="3410712"/>
+            <a:ext cx="5394960" cy="292608"/>
+          </a:xfrm>
+          <a:prstGeom prst="rect">
+            <a:avLst/>
+          </a:prstGeom>
+          <a:noFill/>
+        </p:spPr>
+        <p:txBody>
+          <a:bodyPr wrap="none">
+            <a:spAutoFit/>
+          </a:bodyPr>
+          <a:lstStyle/>
           <a:p>
             <a:pPr>
-              <a:defRPr sz="1100" b="1">
-                <a:solidFill>
-                  <a:srgbClr val="0F172A"/>
-                </a:solidFill>
-                <a:latin typeface="微软雅黑"/>
-              </a:defRPr>
-            </a:pPr>
-            <a:r>
-              <a:t>DBJ00.004.1386.01</a:t>
-            </a:r>
-          </a:p>
-        </p:txBody>
-      </p:sp>
-      <p:sp>
-        <p:nvSpPr>
-          <p:cNvPr id="10" name="Rounded Rectangle 9"/>
+              <a:defRPr sz="1150" b="1">
+                <a:solidFill>
+                  <a:srgbClr val="1E3A8A"/>
+                </a:solidFill>
+                <a:latin typeface="微软雅黑"/>
+              </a:defRPr>
+            </a:pPr>
+            <a:r>
+              <a:t>案例 2：词序完全倒置混排（属性前置干扰）</a:t>
+            </a:r>
+          </a:p>
+        </p:txBody>
+      </p:sp>
+      <p:sp>
+        <p:nvSpPr>
+          <p:cNvPr id="18" name="Rounded Rectangle 17"/>
           <p:cNvSpPr/>
           <p:nvPr/>
         </p:nvSpPr>
         <p:spPr>
           <a:xfrm>
-            <a:off x="9372600" y="2103120"/>
-            <a:ext cx="1874519" cy="777240"/>
+            <a:off x="5897880" y="3739896"/>
+            <a:ext cx="5394960" cy="438912"/>
+          </a:xfrm>
+          <a:prstGeom prst="roundRect">
+            <a:avLst/>
+          </a:prstGeom>
+          <a:solidFill>
+            <a:srgbClr val="FFF1F2"/>
+          </a:solidFill>
+          <a:ln>
+            <a:solidFill>
+              <a:srgbClr val="FECDD3"/>
+            </a:solidFill>
+          </a:ln>
+        </p:spPr>
+        <p:style>
+          <a:lnRef idx="1">
+            <a:schemeClr val="accent1"/>
+          </a:lnRef>
+          <a:fillRef idx="3">
+            <a:schemeClr val="accent1"/>
+          </a:fillRef>
+          <a:effectRef idx="2">
+            <a:schemeClr val="accent1"/>
+          </a:effectRef>
+          <a:fontRef idx="minor">
+            <a:schemeClr val="lt1"/>
+          </a:fontRef>
+        </p:style>
+        <p:txBody>
+          <a:bodyPr rtlCol="0" anchor="ctr" wrap="square"/>
+          <a:lstStyle/>
+          <a:p>
+            <a:pPr algn="ctr">
+              <a:defRPr sz="950" b="1">
+                <a:solidFill>
+                  <a:srgbClr val="F43F5E"/>
+                </a:solidFill>
+                <a:latin typeface="微软雅黑"/>
+              </a:defRPr>
+            </a:pPr>
+            <a:r>
+              <a:t>📥 原始描述：支架_66-31-02-Q00448-00_限位开关支架_X3_SSB</a:t>
+            </a:r>
+          </a:p>
+        </p:txBody>
+      </p:sp>
+      <p:sp>
+        <p:nvSpPr>
+          <p:cNvPr id="19" name="Rounded Rectangle 18"/>
+          <p:cNvSpPr/>
+          <p:nvPr/>
+        </p:nvSpPr>
+        <p:spPr>
+          <a:xfrm>
+            <a:off x="5897880" y="4233672"/>
+            <a:ext cx="1755648" cy="548640"/>
           </a:xfrm>
           <a:prstGeom prst="roundRect">
             <a:avLst/>
@@ -8826,7 +9584,7 @@
           <a:lstStyle/>
           <a:p>
             <a:pPr algn="ctr">
-              <a:defRPr sz="1000">
+              <a:defRPr sz="950" b="1">
                 <a:solidFill>
                   <a:srgbClr val="047857"/>
                 </a:solidFill>
@@ -8834,40 +9592,137 @@
               </a:defRPr>
             </a:pPr>
             <a:r>
-              <a:t>✨ 制造商</a:t>
-            </a:r>
-          </a:p>
-          <a:p>
-            <a:pPr>
-              <a:defRPr sz="1100" b="1">
-                <a:solidFill>
-                  <a:srgbClr val="0F172A"/>
-                </a:solidFill>
-                <a:latin typeface="微软雅黑"/>
-              </a:defRPr>
-            </a:pPr>
-            <a:r>
-              <a:t>电力电子</a:t>
-            </a:r>
-          </a:p>
-        </p:txBody>
-      </p:sp>
-      <p:sp>
-        <p:nvSpPr>
-          <p:cNvPr id="11" name="Rounded Rectangle 10"/>
+              <a:t>✨ 名称：限位开关支架</a:t>
+            </a:r>
+          </a:p>
+        </p:txBody>
+      </p:sp>
+      <p:sp>
+        <p:nvSpPr>
+          <p:cNvPr id="20" name="Rounded Rectangle 19"/>
           <p:cNvSpPr/>
           <p:nvPr/>
         </p:nvSpPr>
         <p:spPr>
           <a:xfrm>
-            <a:off x="731520" y="3200400"/>
-            <a:ext cx="10728655" cy="1417320"/>
+            <a:off x="7708392" y="4233672"/>
+            <a:ext cx="1755648" cy="548640"/>
           </a:xfrm>
           <a:prstGeom prst="roundRect">
             <a:avLst/>
           </a:prstGeom>
           <a:solidFill>
-            <a:srgbClr val="F8FAFC"/>
+            <a:srgbClr val="ECFDF5"/>
+          </a:solidFill>
+          <a:ln>
+            <a:solidFill>
+              <a:srgbClr val="A7F3D0"/>
+            </a:solidFill>
+          </a:ln>
+        </p:spPr>
+        <p:style>
+          <a:lnRef idx="1">
+            <a:schemeClr val="accent1"/>
+          </a:lnRef>
+          <a:fillRef idx="3">
+            <a:schemeClr val="accent1"/>
+          </a:fillRef>
+          <a:effectRef idx="2">
+            <a:schemeClr val="accent1"/>
+          </a:effectRef>
+          <a:fontRef idx="minor">
+            <a:schemeClr val="lt1"/>
+          </a:fontRef>
+        </p:style>
+        <p:txBody>
+          <a:bodyPr rtlCol="0" anchor="ctr" wrap="square"/>
+          <a:lstStyle/>
+          <a:p>
+            <a:pPr algn="ctr">
+              <a:defRPr sz="950" b="1">
+                <a:solidFill>
+                  <a:srgbClr val="047857"/>
+                </a:solidFill>
+                <a:latin typeface="微软雅黑"/>
+              </a:defRPr>
+            </a:pPr>
+            <a:r>
+              <a:t>✨ 型号：66-31-02-Q00448-00</a:t>
+            </a:r>
+          </a:p>
+        </p:txBody>
+      </p:sp>
+      <p:sp>
+        <p:nvSpPr>
+          <p:cNvPr id="21" name="Rounded Rectangle 20"/>
+          <p:cNvSpPr/>
+          <p:nvPr/>
+        </p:nvSpPr>
+        <p:spPr>
+          <a:xfrm>
+            <a:off x="9518904" y="4233672"/>
+            <a:ext cx="1755648" cy="548640"/>
+          </a:xfrm>
+          <a:prstGeom prst="roundRect">
+            <a:avLst/>
+          </a:prstGeom>
+          <a:solidFill>
+            <a:srgbClr val="ECFDF5"/>
+          </a:solidFill>
+          <a:ln>
+            <a:solidFill>
+              <a:srgbClr val="A7F3D0"/>
+            </a:solidFill>
+          </a:ln>
+        </p:spPr>
+        <p:style>
+          <a:lnRef idx="1">
+            <a:schemeClr val="accent1"/>
+          </a:lnRef>
+          <a:fillRef idx="3">
+            <a:schemeClr val="accent1"/>
+          </a:fillRef>
+          <a:effectRef idx="2">
+            <a:schemeClr val="accent1"/>
+          </a:effectRef>
+          <a:fontRef idx="minor">
+            <a:schemeClr val="lt1"/>
+          </a:fontRef>
+        </p:style>
+        <p:txBody>
+          <a:bodyPr rtlCol="0" anchor="ctr" wrap="square"/>
+          <a:lstStyle/>
+          <a:p>
+            <a:pPr algn="ctr">
+              <a:defRPr sz="950" b="1">
+                <a:solidFill>
+                  <a:srgbClr val="047857"/>
+                </a:solidFill>
+                <a:latin typeface="微软雅黑"/>
+              </a:defRPr>
+            </a:pPr>
+            <a:r>
+              <a:t>✨ 厂商：SSB</a:t>
+            </a:r>
+          </a:p>
+        </p:txBody>
+      </p:sp>
+      <p:sp>
+        <p:nvSpPr>
+          <p:cNvPr id="22" name="Rounded Rectangle 21"/>
+          <p:cNvSpPr/>
+          <p:nvPr/>
+        </p:nvSpPr>
+        <p:spPr>
+          <a:xfrm>
+            <a:off x="5760720" y="4983480"/>
+            <a:ext cx="5699455" cy="1536192"/>
+          </a:xfrm>
+          <a:prstGeom prst="roundRect">
+            <a:avLst/>
+          </a:prstGeom>
+          <a:solidFill>
+            <a:srgbClr val="FFFFFF"/>
           </a:solidFill>
           <a:ln w="12700">
             <a:solidFill>
@@ -8899,14 +9754,14 @@
       </p:sp>
       <p:sp>
         <p:nvSpPr>
-          <p:cNvPr id="12" name="TextBox 11"/>
+          <p:cNvPr id="23" name="TextBox 22"/>
           <p:cNvSpPr txBox="1"/>
           <p:nvPr/>
         </p:nvSpPr>
         <p:spPr>
           <a:xfrm>
-            <a:off x="914400" y="3273552"/>
-            <a:ext cx="10332720" cy="365760"/>
+            <a:off x="5897880" y="5056632"/>
+            <a:ext cx="5394960" cy="292608"/>
           </a:xfrm>
           <a:prstGeom prst="rect">
             <a:avLst/>
@@ -8920,7 +9775,7 @@
           <a:lstStyle/>
           <a:p>
             <a:pPr>
-              <a:defRPr sz="1200" b="1">
+              <a:defRPr sz="1150" b="1">
                 <a:solidFill>
                   <a:srgbClr val="1E3A8A"/>
                 </a:solidFill>
@@ -8928,31 +9783,31 @@
               </a:defRPr>
             </a:pPr>
             <a:r>
-              <a:t>案例 2：词序严重颠倒（前后颠倒排布）</a:t>
-            </a:r>
-          </a:p>
-        </p:txBody>
-      </p:sp>
-      <p:sp>
-        <p:nvSpPr>
-          <p:cNvPr id="13" name="Rounded Rectangle 12"/>
+              <a:t>案例 3：国际外企英文品牌混写（易导致一物多码）</a:t>
+            </a:r>
+          </a:p>
+        </p:txBody>
+      </p:sp>
+      <p:sp>
+        <p:nvSpPr>
+          <p:cNvPr id="24" name="Rounded Rectangle 23"/>
           <p:cNvSpPr/>
           <p:nvPr/>
         </p:nvSpPr>
         <p:spPr>
           <a:xfrm>
-            <a:off x="914400" y="3657600"/>
-            <a:ext cx="3931920" cy="777240"/>
+            <a:off x="5897880" y="5385816"/>
+            <a:ext cx="5394960" cy="438912"/>
           </a:xfrm>
           <a:prstGeom prst="roundRect">
             <a:avLst/>
           </a:prstGeom>
           <a:solidFill>
-            <a:srgbClr val="F1F5F9"/>
+            <a:srgbClr val="FFF1F2"/>
           </a:solidFill>
           <a:ln>
             <a:solidFill>
-              <a:srgbClr val="CBD5E1"/>
+              <a:srgbClr val="FECDD3"/>
             </a:solidFill>
           </a:ln>
         </p:spPr>
@@ -8975,51 +9830,40 @@
           <a:lstStyle/>
           <a:p>
             <a:pPr algn="ctr">
-              <a:defRPr sz="1000" b="1">
-                <a:solidFill>
-                  <a:srgbClr val="64748B"/>
-                </a:solidFill>
-                <a:latin typeface="微软雅黑"/>
-              </a:defRPr>
-            </a:pPr>
-            <a:r>
-              <a:t>📥 原始混乱输入：</a:t>
-            </a:r>
-          </a:p>
-          <a:p>
-            <a:pPr>
-              <a:defRPr sz="1100" b="1">
-                <a:solidFill>
-                  <a:srgbClr val="EF4444"/>
-                </a:solidFill>
-                <a:latin typeface="Arial"/>
-              </a:defRPr>
-            </a:pPr>
-            <a:r>
-              <a:t>支架_66-31-02-Q00448-00_限位开关支架_X3_SSB</a:t>
-            </a:r>
-          </a:p>
-        </p:txBody>
-      </p:sp>
-      <p:sp>
-        <p:nvSpPr>
-          <p:cNvPr id="14" name="Right Arrow 13"/>
+              <a:defRPr sz="950" b="1">
+                <a:solidFill>
+                  <a:srgbClr val="F43F5E"/>
+                </a:solidFill>
+                <a:latin typeface="微软雅黑"/>
+              </a:defRPr>
+            </a:pPr>
+            <a:r>
+              <a:t>📥 原始描述：维护开关_3LD2704-0TK51_Siemens</a:t>
+            </a:r>
+          </a:p>
+        </p:txBody>
+      </p:sp>
+      <p:sp>
+        <p:nvSpPr>
+          <p:cNvPr id="25" name="Rounded Rectangle 24"/>
           <p:cNvSpPr/>
           <p:nvPr/>
         </p:nvSpPr>
         <p:spPr>
           <a:xfrm>
-            <a:off x="4983480" y="3858768"/>
-            <a:ext cx="320040" cy="365760"/>
-          </a:xfrm>
-          <a:prstGeom prst="rightArrow">
-            <a:avLst/>
-          </a:prstGeom>
-          <a:solidFill>
-            <a:srgbClr val="2563EB"/>
+            <a:off x="5897880" y="5879592"/>
+            <a:ext cx="1755648" cy="548640"/>
+          </a:xfrm>
+          <a:prstGeom prst="roundRect">
+            <a:avLst/>
+          </a:prstGeom>
+          <a:solidFill>
+            <a:srgbClr val="ECFDF5"/>
           </a:solidFill>
           <a:ln>
-            <a:noFill/>
+            <a:solidFill>
+              <a:srgbClr val="A7F3D0"/>
+            </a:solidFill>
           </a:ln>
         </p:spPr>
         <p:style>
@@ -9037,23 +9881,33 @@
           </a:fontRef>
         </p:style>
         <p:txBody>
-          <a:bodyPr rtlCol="0" anchor="ctr"/>
-          <a:lstStyle/>
-          <a:p>
-            <a:pPr algn="ctr"/>
-          </a:p>
-        </p:txBody>
-      </p:sp>
-      <p:sp>
-        <p:nvSpPr>
-          <p:cNvPr id="15" name="Rounded Rectangle 14"/>
+          <a:bodyPr rtlCol="0" anchor="ctr" wrap="square"/>
+          <a:lstStyle/>
+          <a:p>
+            <a:pPr algn="ctr">
+              <a:defRPr sz="950" b="1">
+                <a:solidFill>
+                  <a:srgbClr val="047857"/>
+                </a:solidFill>
+                <a:latin typeface="微软雅黑"/>
+              </a:defRPr>
+            </a:pPr>
+            <a:r>
+              <a:t>✨ 名称：维护开关</a:t>
+            </a:r>
+          </a:p>
+        </p:txBody>
+      </p:sp>
+      <p:sp>
+        <p:nvSpPr>
+          <p:cNvPr id="26" name="Rounded Rectangle 25"/>
           <p:cNvSpPr/>
           <p:nvPr/>
         </p:nvSpPr>
         <p:spPr>
           <a:xfrm>
-            <a:off x="5440680" y="3657600"/>
-            <a:ext cx="1874519" cy="777240"/>
+            <a:off x="7708392" y="5879592"/>
+            <a:ext cx="1755648" cy="548640"/>
           </a:xfrm>
           <a:prstGeom prst="roundRect">
             <a:avLst/>
@@ -9086,7 +9940,7 @@
           <a:lstStyle/>
           <a:p>
             <a:pPr algn="ctr">
-              <a:defRPr sz="1000">
+              <a:defRPr sz="950" b="1">
                 <a:solidFill>
                   <a:srgbClr val="047857"/>
                 </a:solidFill>
@@ -9094,34 +9948,21 @@
               </a:defRPr>
             </a:pPr>
             <a:r>
-              <a:t>✨ 物料名称</a:t>
-            </a:r>
-          </a:p>
-          <a:p>
-            <a:pPr>
-              <a:defRPr sz="1100" b="1">
-                <a:solidFill>
-                  <a:srgbClr val="0F172A"/>
-                </a:solidFill>
-                <a:latin typeface="微软雅黑"/>
-              </a:defRPr>
-            </a:pPr>
-            <a:r>
-              <a:t>限位开关支架</a:t>
-            </a:r>
-          </a:p>
-        </p:txBody>
-      </p:sp>
-      <p:sp>
-        <p:nvSpPr>
-          <p:cNvPr id="16" name="Rounded Rectangle 15"/>
+              <a:t>✨ 型号：3LD2704-0TK51</a:t>
+            </a:r>
+          </a:p>
+        </p:txBody>
+      </p:sp>
+      <p:sp>
+        <p:nvSpPr>
+          <p:cNvPr id="27" name="Rounded Rectangle 26"/>
           <p:cNvSpPr/>
           <p:nvPr/>
         </p:nvSpPr>
         <p:spPr>
           <a:xfrm>
-            <a:off x="7406640" y="3657600"/>
-            <a:ext cx="1874519" cy="777240"/>
+            <a:off x="9518904" y="5879592"/>
+            <a:ext cx="1755648" cy="548640"/>
           </a:xfrm>
           <a:prstGeom prst="roundRect">
             <a:avLst/>
@@ -9154,7 +9995,7 @@
           <a:lstStyle/>
           <a:p>
             <a:pPr algn="ctr">
-              <a:defRPr sz="1000">
+              <a:defRPr sz="950" b="1">
                 <a:solidFill>
                   <a:srgbClr val="047857"/>
                 </a:solidFill>
@@ -9162,484 +10003,7 @@
               </a:defRPr>
             </a:pPr>
             <a:r>
-              <a:t>✨ 规格型号</a:t>
-            </a:r>
-          </a:p>
-          <a:p>
-            <a:pPr>
-              <a:defRPr sz="1100" b="1">
-                <a:solidFill>
-                  <a:srgbClr val="0F172A"/>
-                </a:solidFill>
-                <a:latin typeface="微软雅黑"/>
-              </a:defRPr>
-            </a:pPr>
-            <a:r>
-              <a:t>66-31-02-Q00448-00</a:t>
-            </a:r>
-          </a:p>
-        </p:txBody>
-      </p:sp>
-      <p:sp>
-        <p:nvSpPr>
-          <p:cNvPr id="17" name="Rounded Rectangle 16"/>
-          <p:cNvSpPr/>
-          <p:nvPr/>
-        </p:nvSpPr>
-        <p:spPr>
-          <a:xfrm>
-            <a:off x="9372600" y="3657600"/>
-            <a:ext cx="1874519" cy="777240"/>
-          </a:xfrm>
-          <a:prstGeom prst="roundRect">
-            <a:avLst/>
-          </a:prstGeom>
-          <a:solidFill>
-            <a:srgbClr val="ECFDF5"/>
-          </a:solidFill>
-          <a:ln>
-            <a:solidFill>
-              <a:srgbClr val="A7F3D0"/>
-            </a:solidFill>
-          </a:ln>
-        </p:spPr>
-        <p:style>
-          <a:lnRef idx="1">
-            <a:schemeClr val="accent1"/>
-          </a:lnRef>
-          <a:fillRef idx="3">
-            <a:schemeClr val="accent1"/>
-          </a:fillRef>
-          <a:effectRef idx="2">
-            <a:schemeClr val="accent1"/>
-          </a:effectRef>
-          <a:fontRef idx="minor">
-            <a:schemeClr val="lt1"/>
-          </a:fontRef>
-        </p:style>
-        <p:txBody>
-          <a:bodyPr rtlCol="0" anchor="ctr" wrap="square"/>
-          <a:lstStyle/>
-          <a:p>
-            <a:pPr algn="ctr">
-              <a:defRPr sz="1000">
-                <a:solidFill>
-                  <a:srgbClr val="047857"/>
-                </a:solidFill>
-                <a:latin typeface="微软雅黑"/>
-              </a:defRPr>
-            </a:pPr>
-            <a:r>
-              <a:t>✨ 制造商</a:t>
-            </a:r>
-          </a:p>
-          <a:p>
-            <a:pPr>
-              <a:defRPr sz="1100" b="1">
-                <a:solidFill>
-                  <a:srgbClr val="0F172A"/>
-                </a:solidFill>
-                <a:latin typeface="微软雅黑"/>
-              </a:defRPr>
-            </a:pPr>
-            <a:r>
-              <a:t>SSB</a:t>
-            </a:r>
-          </a:p>
-        </p:txBody>
-      </p:sp>
-      <p:sp>
-        <p:nvSpPr>
-          <p:cNvPr id="18" name="Rounded Rectangle 17"/>
-          <p:cNvSpPr/>
-          <p:nvPr/>
-        </p:nvSpPr>
-        <p:spPr>
-          <a:xfrm>
-            <a:off x="731520" y="4754880"/>
-            <a:ext cx="10728655" cy="1417320"/>
-          </a:xfrm>
-          <a:prstGeom prst="roundRect">
-            <a:avLst/>
-          </a:prstGeom>
-          <a:solidFill>
-            <a:srgbClr val="F8FAFC"/>
-          </a:solidFill>
-          <a:ln w="12700">
-            <a:solidFill>
-              <a:srgbClr val="E2E8F0"/>
-            </a:solidFill>
-          </a:ln>
-        </p:spPr>
-        <p:style>
-          <a:lnRef idx="1">
-            <a:schemeClr val="accent1"/>
-          </a:lnRef>
-          <a:fillRef idx="3">
-            <a:schemeClr val="accent1"/>
-          </a:fillRef>
-          <a:effectRef idx="2">
-            <a:schemeClr val="accent1"/>
-          </a:effectRef>
-          <a:fontRef idx="minor">
-            <a:schemeClr val="lt1"/>
-          </a:fontRef>
-        </p:style>
-        <p:txBody>
-          <a:bodyPr rtlCol="0" anchor="ctr"/>
-          <a:lstStyle/>
-          <a:p>
-            <a:pPr algn="ctr"/>
-          </a:p>
-        </p:txBody>
-      </p:sp>
-      <p:sp>
-        <p:nvSpPr>
-          <p:cNvPr id="19" name="TextBox 18"/>
-          <p:cNvSpPr txBox="1"/>
-          <p:nvPr/>
-        </p:nvSpPr>
-        <p:spPr>
-          <a:xfrm>
-            <a:off x="914400" y="4828032"/>
-            <a:ext cx="10332720" cy="365760"/>
-          </a:xfrm>
-          <a:prstGeom prst="rect">
-            <a:avLst/>
-          </a:prstGeom>
-          <a:noFill/>
-        </p:spPr>
-        <p:txBody>
-          <a:bodyPr wrap="none">
-            <a:spAutoFit/>
-          </a:bodyPr>
-          <a:lstStyle/>
-          <a:p>
-            <a:pPr>
-              <a:defRPr sz="1200" b="1">
-                <a:solidFill>
-                  <a:srgbClr val="1E3A8A"/>
-                </a:solidFill>
-                <a:latin typeface="微软雅黑"/>
-              </a:defRPr>
-            </a:pPr>
-            <a:r>
-              <a:t>案例 3：国际外企品牌与英文描述</a:t>
-            </a:r>
-          </a:p>
-        </p:txBody>
-      </p:sp>
-      <p:sp>
-        <p:nvSpPr>
-          <p:cNvPr id="20" name="Rounded Rectangle 19"/>
-          <p:cNvSpPr/>
-          <p:nvPr/>
-        </p:nvSpPr>
-        <p:spPr>
-          <a:xfrm>
-            <a:off x="914400" y="5212080"/>
-            <a:ext cx="3931920" cy="777240"/>
-          </a:xfrm>
-          <a:prstGeom prst="roundRect">
-            <a:avLst/>
-          </a:prstGeom>
-          <a:solidFill>
-            <a:srgbClr val="F1F5F9"/>
-          </a:solidFill>
-          <a:ln>
-            <a:solidFill>
-              <a:srgbClr val="CBD5E1"/>
-            </a:solidFill>
-          </a:ln>
-        </p:spPr>
-        <p:style>
-          <a:lnRef idx="1">
-            <a:schemeClr val="accent1"/>
-          </a:lnRef>
-          <a:fillRef idx="3">
-            <a:schemeClr val="accent1"/>
-          </a:fillRef>
-          <a:effectRef idx="2">
-            <a:schemeClr val="accent1"/>
-          </a:effectRef>
-          <a:fontRef idx="minor">
-            <a:schemeClr val="lt1"/>
-          </a:fontRef>
-        </p:style>
-        <p:txBody>
-          <a:bodyPr rtlCol="0" anchor="ctr" wrap="square"/>
-          <a:lstStyle/>
-          <a:p>
-            <a:pPr algn="ctr">
-              <a:defRPr sz="1000" b="1">
-                <a:solidFill>
-                  <a:srgbClr val="64748B"/>
-                </a:solidFill>
-                <a:latin typeface="微软雅黑"/>
-              </a:defRPr>
-            </a:pPr>
-            <a:r>
-              <a:t>📥 原始混乱输入：</a:t>
-            </a:r>
-          </a:p>
-          <a:p>
-            <a:pPr>
-              <a:defRPr sz="1100" b="1">
-                <a:solidFill>
-                  <a:srgbClr val="EF4444"/>
-                </a:solidFill>
-                <a:latin typeface="Arial"/>
-              </a:defRPr>
-            </a:pPr>
-            <a:r>
-              <a:t>维护开关_3LD2704-0TK51_Siemens</a:t>
-            </a:r>
-          </a:p>
-        </p:txBody>
-      </p:sp>
-      <p:sp>
-        <p:nvSpPr>
-          <p:cNvPr id="21" name="Right Arrow 20"/>
-          <p:cNvSpPr/>
-          <p:nvPr/>
-        </p:nvSpPr>
-        <p:spPr>
-          <a:xfrm>
-            <a:off x="4983480" y="5413248"/>
-            <a:ext cx="320040" cy="365760"/>
-          </a:xfrm>
-          <a:prstGeom prst="rightArrow">
-            <a:avLst/>
-          </a:prstGeom>
-          <a:solidFill>
-            <a:srgbClr val="2563EB"/>
-          </a:solidFill>
-          <a:ln>
-            <a:noFill/>
-          </a:ln>
-        </p:spPr>
-        <p:style>
-          <a:lnRef idx="1">
-            <a:schemeClr val="accent1"/>
-          </a:lnRef>
-          <a:fillRef idx="3">
-            <a:schemeClr val="accent1"/>
-          </a:fillRef>
-          <a:effectRef idx="2">
-            <a:schemeClr val="accent1"/>
-          </a:effectRef>
-          <a:fontRef idx="minor">
-            <a:schemeClr val="lt1"/>
-          </a:fontRef>
-        </p:style>
-        <p:txBody>
-          <a:bodyPr rtlCol="0" anchor="ctr"/>
-          <a:lstStyle/>
-          <a:p>
-            <a:pPr algn="ctr"/>
-          </a:p>
-        </p:txBody>
-      </p:sp>
-      <p:sp>
-        <p:nvSpPr>
-          <p:cNvPr id="22" name="Rounded Rectangle 21"/>
-          <p:cNvSpPr/>
-          <p:nvPr/>
-        </p:nvSpPr>
-        <p:spPr>
-          <a:xfrm>
-            <a:off x="5440680" y="5212080"/>
-            <a:ext cx="1874519" cy="777240"/>
-          </a:xfrm>
-          <a:prstGeom prst="roundRect">
-            <a:avLst/>
-          </a:prstGeom>
-          <a:solidFill>
-            <a:srgbClr val="ECFDF5"/>
-          </a:solidFill>
-          <a:ln>
-            <a:solidFill>
-              <a:srgbClr val="A7F3D0"/>
-            </a:solidFill>
-          </a:ln>
-        </p:spPr>
-        <p:style>
-          <a:lnRef idx="1">
-            <a:schemeClr val="accent1"/>
-          </a:lnRef>
-          <a:fillRef idx="3">
-            <a:schemeClr val="accent1"/>
-          </a:fillRef>
-          <a:effectRef idx="2">
-            <a:schemeClr val="accent1"/>
-          </a:effectRef>
-          <a:fontRef idx="minor">
-            <a:schemeClr val="lt1"/>
-          </a:fontRef>
-        </p:style>
-        <p:txBody>
-          <a:bodyPr rtlCol="0" anchor="ctr" wrap="square"/>
-          <a:lstStyle/>
-          <a:p>
-            <a:pPr algn="ctr">
-              <a:defRPr sz="1000">
-                <a:solidFill>
-                  <a:srgbClr val="047857"/>
-                </a:solidFill>
-                <a:latin typeface="微软雅黑"/>
-              </a:defRPr>
-            </a:pPr>
-            <a:r>
-              <a:t>✨ 物料名称</a:t>
-            </a:r>
-          </a:p>
-          <a:p>
-            <a:pPr>
-              <a:defRPr sz="1100" b="1">
-                <a:solidFill>
-                  <a:srgbClr val="0F172A"/>
-                </a:solidFill>
-                <a:latin typeface="微软雅黑"/>
-              </a:defRPr>
-            </a:pPr>
-            <a:r>
-              <a:t>维护开关</a:t>
-            </a:r>
-          </a:p>
-        </p:txBody>
-      </p:sp>
-      <p:sp>
-        <p:nvSpPr>
-          <p:cNvPr id="23" name="Rounded Rectangle 22"/>
-          <p:cNvSpPr/>
-          <p:nvPr/>
-        </p:nvSpPr>
-        <p:spPr>
-          <a:xfrm>
-            <a:off x="7406640" y="5212080"/>
-            <a:ext cx="1874519" cy="777240"/>
-          </a:xfrm>
-          <a:prstGeom prst="roundRect">
-            <a:avLst/>
-          </a:prstGeom>
-          <a:solidFill>
-            <a:srgbClr val="ECFDF5"/>
-          </a:solidFill>
-          <a:ln>
-            <a:solidFill>
-              <a:srgbClr val="A7F3D0"/>
-            </a:solidFill>
-          </a:ln>
-        </p:spPr>
-        <p:style>
-          <a:lnRef idx="1">
-            <a:schemeClr val="accent1"/>
-          </a:lnRef>
-          <a:fillRef idx="3">
-            <a:schemeClr val="accent1"/>
-          </a:fillRef>
-          <a:effectRef idx="2">
-            <a:schemeClr val="accent1"/>
-          </a:effectRef>
-          <a:fontRef idx="minor">
-            <a:schemeClr val="lt1"/>
-          </a:fontRef>
-        </p:style>
-        <p:txBody>
-          <a:bodyPr rtlCol="0" anchor="ctr" wrap="square"/>
-          <a:lstStyle/>
-          <a:p>
-            <a:pPr algn="ctr">
-              <a:defRPr sz="1000">
-                <a:solidFill>
-                  <a:srgbClr val="047857"/>
-                </a:solidFill>
-                <a:latin typeface="微软雅黑"/>
-              </a:defRPr>
-            </a:pPr>
-            <a:r>
-              <a:t>✨ 规格型号</a:t>
-            </a:r>
-          </a:p>
-          <a:p>
-            <a:pPr>
-              <a:defRPr sz="1100" b="1">
-                <a:solidFill>
-                  <a:srgbClr val="0F172A"/>
-                </a:solidFill>
-                <a:latin typeface="微软雅黑"/>
-              </a:defRPr>
-            </a:pPr>
-            <a:r>
-              <a:t>3LD2704-0TK51</a:t>
-            </a:r>
-          </a:p>
-        </p:txBody>
-      </p:sp>
-      <p:sp>
-        <p:nvSpPr>
-          <p:cNvPr id="24" name="Rounded Rectangle 23"/>
-          <p:cNvSpPr/>
-          <p:nvPr/>
-        </p:nvSpPr>
-        <p:spPr>
-          <a:xfrm>
-            <a:off x="9372600" y="5212080"/>
-            <a:ext cx="1874519" cy="777240"/>
-          </a:xfrm>
-          <a:prstGeom prst="roundRect">
-            <a:avLst/>
-          </a:prstGeom>
-          <a:solidFill>
-            <a:srgbClr val="ECFDF5"/>
-          </a:solidFill>
-          <a:ln>
-            <a:solidFill>
-              <a:srgbClr val="A7F3D0"/>
-            </a:solidFill>
-          </a:ln>
-        </p:spPr>
-        <p:style>
-          <a:lnRef idx="1">
-            <a:schemeClr val="accent1"/>
-          </a:lnRef>
-          <a:fillRef idx="3">
-            <a:schemeClr val="accent1"/>
-          </a:fillRef>
-          <a:effectRef idx="2">
-            <a:schemeClr val="accent1"/>
-          </a:effectRef>
-          <a:fontRef idx="minor">
-            <a:schemeClr val="lt1"/>
-          </a:fontRef>
-        </p:style>
-        <p:txBody>
-          <a:bodyPr rtlCol="0" anchor="ctr" wrap="square"/>
-          <a:lstStyle/>
-          <a:p>
-            <a:pPr algn="ctr">
-              <a:defRPr sz="1000">
-                <a:solidFill>
-                  <a:srgbClr val="047857"/>
-                </a:solidFill>
-                <a:latin typeface="微软雅黑"/>
-              </a:defRPr>
-            </a:pPr>
-            <a:r>
-              <a:t>✨ 制造商</a:t>
-            </a:r>
-          </a:p>
-          <a:p>
-            <a:pPr>
-              <a:defRPr sz="1100" b="1">
-                <a:solidFill>
-                  <a:srgbClr val="0F172A"/>
-                </a:solidFill>
-                <a:latin typeface="微软雅黑"/>
-              </a:defRPr>
-            </a:pPr>
-            <a:r>
-              <a:t>西门子</a:t>
+              <a:t>✨ 厂商：西门子 (规范映射)</a:t>
             </a:r>
           </a:p>
         </p:txBody>
@@ -9664,14 +10028,100 @@
       <p:grpSpPr/>
       <p:sp>
         <p:nvSpPr>
-          <p:cNvPr id="2" name="Rounded Rectangle 1"/>
+          <p:cNvPr id="2" name="Rectangle 1"/>
           <p:cNvSpPr/>
           <p:nvPr/>
         </p:nvSpPr>
         <p:spPr>
           <a:xfrm>
-            <a:off x="731520" y="411480"/>
-            <a:ext cx="2011680" cy="320040"/>
+            <a:off x="0" y="0"/>
+            <a:ext cx="12191695" cy="6858000"/>
+          </a:xfrm>
+          <a:prstGeom prst="rect">
+            <a:avLst/>
+          </a:prstGeom>
+          <a:solidFill>
+            <a:srgbClr val="F8FAFC"/>
+          </a:solidFill>
+          <a:ln>
+            <a:noFill/>
+          </a:ln>
+        </p:spPr>
+        <p:style>
+          <a:lnRef idx="1">
+            <a:schemeClr val="accent1"/>
+          </a:lnRef>
+          <a:fillRef idx="3">
+            <a:schemeClr val="accent1"/>
+          </a:fillRef>
+          <a:effectRef idx="2">
+            <a:schemeClr val="accent1"/>
+          </a:effectRef>
+          <a:fontRef idx="minor">
+            <a:schemeClr val="lt1"/>
+          </a:fontRef>
+        </p:style>
+        <p:txBody>
+          <a:bodyPr rtlCol="0" anchor="ctr"/>
+          <a:lstStyle/>
+          <a:p>
+            <a:pPr algn="ctr"/>
+          </a:p>
+        </p:txBody>
+      </p:sp>
+      <p:sp>
+        <p:nvSpPr>
+          <p:cNvPr id="3" name="Rectangle 2"/>
+          <p:cNvSpPr/>
+          <p:nvPr/>
+        </p:nvSpPr>
+        <p:spPr>
+          <a:xfrm>
+            <a:off x="0" y="0"/>
+            <a:ext cx="12191695" cy="73152"/>
+          </a:xfrm>
+          <a:prstGeom prst="rect">
+            <a:avLst/>
+          </a:prstGeom>
+          <a:solidFill>
+            <a:srgbClr val="1D4ED8"/>
+          </a:solidFill>
+          <a:ln>
+            <a:noFill/>
+          </a:ln>
+        </p:spPr>
+        <p:style>
+          <a:lnRef idx="1">
+            <a:schemeClr val="accent1"/>
+          </a:lnRef>
+          <a:fillRef idx="3">
+            <a:schemeClr val="accent1"/>
+          </a:fillRef>
+          <a:effectRef idx="2">
+            <a:schemeClr val="accent1"/>
+          </a:effectRef>
+          <a:fontRef idx="minor">
+            <a:schemeClr val="lt1"/>
+          </a:fontRef>
+        </p:style>
+        <p:txBody>
+          <a:bodyPr rtlCol="0" anchor="ctr"/>
+          <a:lstStyle/>
+          <a:p>
+            <a:pPr algn="ctr"/>
+          </a:p>
+        </p:txBody>
+      </p:sp>
+      <p:sp>
+        <p:nvSpPr>
+          <p:cNvPr id="4" name="Rounded Rectangle 3"/>
+          <p:cNvSpPr/>
+          <p:nvPr/>
+        </p:nvSpPr>
+        <p:spPr>
+          <a:xfrm>
+            <a:off x="731520" y="384048"/>
+            <a:ext cx="2011680" cy="292608"/>
           </a:xfrm>
           <a:prstGeom prst="roundRect">
             <a:avLst/>
@@ -9700,13 +10150,13 @@
           </a:fontRef>
         </p:style>
         <p:txBody>
-          <a:bodyPr rtlCol="0" anchor="ctr" wrap="none"/>
+          <a:bodyPr rtlCol="0" anchor="ctr"/>
           <a:lstStyle/>
           <a:p>
             <a:pPr algn="ctr">
-              <a:defRPr sz="1100" b="1">
-                <a:solidFill>
-                  <a:srgbClr val="2563EB"/>
+              <a:defRPr sz="1000" b="1">
+                <a:solidFill>
+                  <a:srgbClr val="1D4ED8"/>
                 </a:solidFill>
                 <a:latin typeface="微软雅黑"/>
               </a:defRPr>
@@ -9719,14 +10169,14 @@
       </p:sp>
       <p:sp>
         <p:nvSpPr>
-          <p:cNvPr id="3" name="TextBox 2"/>
+          <p:cNvPr id="5" name="TextBox 4"/>
           <p:cNvSpPr txBox="1"/>
           <p:nvPr/>
         </p:nvSpPr>
         <p:spPr>
           <a:xfrm>
-            <a:off x="731520" y="777240"/>
-            <a:ext cx="10515600" cy="548640"/>
+            <a:off x="731520" y="749808"/>
+            <a:ext cx="10698480" cy="777240"/>
           </a:xfrm>
           <a:prstGeom prst="rect">
             <a:avLst/>
@@ -9740,7 +10190,7 @@
           <a:lstStyle/>
           <a:p>
             <a:pPr>
-              <a:defRPr sz="2200" b="1">
+              <a:defRPr sz="2100" b="1">
                 <a:solidFill>
                   <a:srgbClr val="0F172A"/>
                 </a:solidFill>
@@ -9754,37 +10204,37 @@
           <a:p>
             <a:pPr>
               <a:spcBef>
-                <a:spcPts val="400"/>
+                <a:spcPts val="300"/>
               </a:spcBef>
-              <a:defRPr sz="1200">
-                <a:solidFill>
-                  <a:srgbClr val="64748B"/>
-                </a:solidFill>
-                <a:latin typeface="微软雅黑"/>
-              </a:defRPr>
-            </a:pPr>
-            <a:r>
-              <a:t>无需安装几十 GB 的桌面三维软件，纯浏览器秒级预览 STEP 并截取物料照片</a:t>
-            </a:r>
-          </a:p>
-        </p:txBody>
-      </p:sp>
-      <p:sp>
-        <p:nvSpPr>
-          <p:cNvPr id="4" name="Rounded Rectangle 3"/>
+              <a:defRPr sz="1100">
+                <a:solidFill>
+                  <a:srgbClr val="475569"/>
+                </a:solidFill>
+                <a:latin typeface="微软雅黑"/>
+              </a:defRPr>
+            </a:pPr>
+            <a:r>
+              <a:t>无需安装动辄几十 GB 的桌面专业软件，纯浏览器秒级预览 STEP 并截取物料照片</a:t>
+            </a:r>
+          </a:p>
+        </p:txBody>
+      </p:sp>
+      <p:sp>
+        <p:nvSpPr>
+          <p:cNvPr id="6" name="Rounded Rectangle 5"/>
           <p:cNvSpPr/>
           <p:nvPr/>
         </p:nvSpPr>
         <p:spPr>
           <a:xfrm>
-            <a:off x="731520" y="1645920"/>
-            <a:ext cx="6858000" cy="1051560"/>
+            <a:off x="731520" y="1691640"/>
+            <a:ext cx="6675120" cy="1078992"/>
           </a:xfrm>
           <a:prstGeom prst="roundRect">
             <a:avLst/>
           </a:prstGeom>
           <a:solidFill>
-            <a:srgbClr val="F8FAFC"/>
+            <a:srgbClr val="FFFFFF"/>
           </a:solidFill>
           <a:ln>
             <a:solidFill>
@@ -9813,7 +10263,7 @@
             <a:pPr algn="ctr">
               <a:defRPr sz="1300" b="1">
                 <a:solidFill>
-                  <a:srgbClr val="2563EB"/>
+                  <a:srgbClr val="1D4ED8"/>
                 </a:solidFill>
                 <a:latin typeface="微软雅黑"/>
               </a:defRPr>
@@ -9827,9 +10277,9 @@
               <a:spcBef>
                 <a:spcPts val="400"/>
               </a:spcBef>
-              <a:defRPr sz="1100">
-                <a:solidFill>
-                  <a:srgbClr val="64748B"/>
+              <a:defRPr sz="1050">
+                <a:solidFill>
+                  <a:srgbClr val="475569"/>
                 </a:solidFill>
                 <a:latin typeface="微软雅黑"/>
               </a:defRPr>
@@ -9842,20 +10292,20 @@
       </p:sp>
       <p:sp>
         <p:nvSpPr>
-          <p:cNvPr id="5" name="Rounded Rectangle 4"/>
+          <p:cNvPr id="7" name="Rounded Rectangle 6"/>
           <p:cNvSpPr/>
           <p:nvPr/>
         </p:nvSpPr>
         <p:spPr>
           <a:xfrm>
-            <a:off x="731520" y="2834640"/>
-            <a:ext cx="6858000" cy="1051560"/>
+            <a:off x="731520" y="2880360"/>
+            <a:ext cx="6675120" cy="1078992"/>
           </a:xfrm>
           <a:prstGeom prst="roundRect">
             <a:avLst/>
           </a:prstGeom>
           <a:solidFill>
-            <a:srgbClr val="F8FAFC"/>
+            <a:srgbClr val="FFFFFF"/>
           </a:solidFill>
           <a:ln>
             <a:solidFill>
@@ -9884,7 +10334,7 @@
             <a:pPr algn="ctr">
               <a:defRPr sz="1300" b="1">
                 <a:solidFill>
-                  <a:srgbClr val="2563EB"/>
+                  <a:srgbClr val="1D4ED8"/>
                 </a:solidFill>
                 <a:latin typeface="微软雅黑"/>
               </a:defRPr>
@@ -9898,9 +10348,9 @@
               <a:spcBef>
                 <a:spcPts val="400"/>
               </a:spcBef>
-              <a:defRPr sz="1100">
-                <a:solidFill>
-                  <a:srgbClr val="64748B"/>
+              <a:defRPr sz="1050">
+                <a:solidFill>
+                  <a:srgbClr val="475569"/>
                 </a:solidFill>
                 <a:latin typeface="微软雅黑"/>
               </a:defRPr>
@@ -9913,20 +10363,20 @@
       </p:sp>
       <p:sp>
         <p:nvSpPr>
-          <p:cNvPr id="6" name="Rounded Rectangle 5"/>
+          <p:cNvPr id="8" name="Rounded Rectangle 7"/>
           <p:cNvSpPr/>
           <p:nvPr/>
         </p:nvSpPr>
         <p:spPr>
           <a:xfrm>
-            <a:off x="731520" y="4023360"/>
-            <a:ext cx="6858000" cy="1051560"/>
+            <a:off x="731520" y="4069080"/>
+            <a:ext cx="6675120" cy="1078992"/>
           </a:xfrm>
           <a:prstGeom prst="roundRect">
             <a:avLst/>
           </a:prstGeom>
           <a:solidFill>
-            <a:srgbClr val="F8FAFC"/>
+            <a:srgbClr val="FFFFFF"/>
           </a:solidFill>
           <a:ln>
             <a:solidFill>
@@ -9955,7 +10405,7 @@
             <a:pPr algn="ctr">
               <a:defRPr sz="1300" b="1">
                 <a:solidFill>
-                  <a:srgbClr val="2563EB"/>
+                  <a:srgbClr val="1D4ED8"/>
                 </a:solidFill>
                 <a:latin typeface="微软雅黑"/>
               </a:defRPr>
@@ -9969,9 +10419,9 @@
               <a:spcBef>
                 <a:spcPts val="400"/>
               </a:spcBef>
-              <a:defRPr sz="1100">
-                <a:solidFill>
-                  <a:srgbClr val="64748B"/>
+              <a:defRPr sz="1050">
+                <a:solidFill>
+                  <a:srgbClr val="475569"/>
                 </a:solidFill>
                 <a:latin typeface="微软雅黑"/>
               </a:defRPr>
@@ -9984,20 +10434,20 @@
       </p:sp>
       <p:sp>
         <p:nvSpPr>
-          <p:cNvPr id="7" name="Rounded Rectangle 6"/>
+          <p:cNvPr id="9" name="Rounded Rectangle 8"/>
           <p:cNvSpPr/>
           <p:nvPr/>
         </p:nvSpPr>
         <p:spPr>
           <a:xfrm>
-            <a:off x="731520" y="5212080"/>
-            <a:ext cx="6858000" cy="1051560"/>
+            <a:off x="731520" y="5257800"/>
+            <a:ext cx="6675120" cy="1078992"/>
           </a:xfrm>
           <a:prstGeom prst="roundRect">
             <a:avLst/>
           </a:prstGeom>
           <a:solidFill>
-            <a:srgbClr val="F8FAFC"/>
+            <a:srgbClr val="FFFFFF"/>
           </a:solidFill>
           <a:ln>
             <a:solidFill>
@@ -10026,7 +10476,7 @@
             <a:pPr algn="ctr">
               <a:defRPr sz="1300" b="1">
                 <a:solidFill>
-                  <a:srgbClr val="2563EB"/>
+                  <a:srgbClr val="1D4ED8"/>
                 </a:solidFill>
                 <a:latin typeface="微软雅黑"/>
               </a:defRPr>
@@ -10040,9 +10490,9 @@
               <a:spcBef>
                 <a:spcPts val="400"/>
               </a:spcBef>
-              <a:defRPr sz="1100">
-                <a:solidFill>
-                  <a:srgbClr val="64748B"/>
+              <a:defRPr sz="1050">
+                <a:solidFill>
+                  <a:srgbClr val="475569"/>
                 </a:solidFill>
                 <a:latin typeface="微软雅黑"/>
               </a:defRPr>
@@ -10055,24 +10505,24 @@
       </p:sp>
       <p:sp>
         <p:nvSpPr>
-          <p:cNvPr id="8" name="Rounded Rectangle 7"/>
+          <p:cNvPr id="10" name="Rounded Rectangle 9"/>
           <p:cNvSpPr/>
           <p:nvPr/>
         </p:nvSpPr>
         <p:spPr>
           <a:xfrm>
-            <a:off x="7863840" y="1645920"/>
-            <a:ext cx="3596335" cy="4663440"/>
+            <a:off x="7680960" y="1691640"/>
+            <a:ext cx="3779215" cy="4663440"/>
           </a:xfrm>
           <a:prstGeom prst="roundRect">
             <a:avLst/>
           </a:prstGeom>
           <a:solidFill>
-            <a:srgbClr val="EFF6FF"/>
+            <a:srgbClr val="FFFFFF"/>
           </a:solidFill>
           <a:ln w="19050">
             <a:solidFill>
-              <a:srgbClr val="BFDBFE"/>
+              <a:srgbClr val="1D4ED8"/>
             </a:solidFill>
           </a:ln>
         </p:spPr>
@@ -10097,7 +10547,7 @@
             <a:pPr algn="ctr">
               <a:defRPr sz="1400" b="1">
                 <a:solidFill>
-                  <a:srgbClr val="0F172A"/>
+                  <a:srgbClr val="1E3A8A"/>
                 </a:solidFill>
                 <a:latin typeface="微软雅黑"/>
               </a:defRPr>
@@ -10109,29 +10559,25 @@
           <a:p>
             <a:pPr>
               <a:spcBef>
-                <a:spcPts val="800"/>
+                <a:spcPts val="600"/>
               </a:spcBef>
-              <a:defRPr sz="1100">
-                <a:solidFill>
-                  <a:srgbClr val="64748B"/>
-                </a:solidFill>
-                <a:latin typeface="微软雅黑"/>
-              </a:defRPr>
-            </a:pPr>
-            <a:r>
-              <a:t>系统内置 3D STEP 浏览器解析引擎：</a:t>
+              <a:defRPr sz="1050">
+                <a:solidFill>
+                  <a:srgbClr val="475569"/>
+                </a:solidFill>
+                <a:latin typeface="微软雅黑"/>
+              </a:defRPr>
+            </a:pPr>
+            <a:r>
+              <a:t>实景渲染快照自动关联备件主库：</a:t>
             </a:r>
             <a:br/>
             <a:r>
-              <a:t>• 支持任意机型备件 3D 模型浏览</a:t>
+              <a:t>• 支持任意机型 3D 格式直读</a:t>
             </a:r>
             <a:br/>
             <a:r>
-              <a:t>• 自动匹配主库物料号</a:t>
-            </a:r>
-            <a:br/>
-            <a:r>
-              <a:t>• 自动写入标准化封面与明细</a:t>
+              <a:t>• 自动匹配主库物料号与图册</a:t>
             </a:r>
             <a:br/>
             <a:r>
@@ -10142,7 +10588,7 @@
       </p:sp>
       <p:pic>
         <p:nvPicPr>
-          <p:cNvPr id="9" name="Picture 8" descr="DFB00076351.png"/>
+          <p:cNvPr id="11" name="Picture 10" descr="DFB00076351.png"/>
           <p:cNvPicPr>
             <a:picLocks noChangeAspect="1"/>
           </p:cNvPicPr>
@@ -10156,8 +10602,8 @@
         </p:blipFill>
         <p:spPr>
           <a:xfrm>
-            <a:off x="8138160" y="3474720"/>
-            <a:ext cx="3044952" cy="6141513"/>
+            <a:off x="7955279" y="3383280"/>
+            <a:ext cx="3227832" cy="6510373"/>
           </a:xfrm>
           <a:prstGeom prst="rect">
             <a:avLst/>
@@ -10184,14 +10630,100 @@
       <p:grpSpPr/>
       <p:sp>
         <p:nvSpPr>
-          <p:cNvPr id="2" name="Rounded Rectangle 1"/>
+          <p:cNvPr id="2" name="Rectangle 1"/>
           <p:cNvSpPr/>
           <p:nvPr/>
         </p:nvSpPr>
         <p:spPr>
           <a:xfrm>
-            <a:off x="731520" y="411480"/>
-            <a:ext cx="2011680" cy="320040"/>
+            <a:off x="0" y="0"/>
+            <a:ext cx="12191695" cy="6858000"/>
+          </a:xfrm>
+          <a:prstGeom prst="rect">
+            <a:avLst/>
+          </a:prstGeom>
+          <a:solidFill>
+            <a:srgbClr val="F8FAFC"/>
+          </a:solidFill>
+          <a:ln>
+            <a:noFill/>
+          </a:ln>
+        </p:spPr>
+        <p:style>
+          <a:lnRef idx="1">
+            <a:schemeClr val="accent1"/>
+          </a:lnRef>
+          <a:fillRef idx="3">
+            <a:schemeClr val="accent1"/>
+          </a:fillRef>
+          <a:effectRef idx="2">
+            <a:schemeClr val="accent1"/>
+          </a:effectRef>
+          <a:fontRef idx="minor">
+            <a:schemeClr val="lt1"/>
+          </a:fontRef>
+        </p:style>
+        <p:txBody>
+          <a:bodyPr rtlCol="0" anchor="ctr"/>
+          <a:lstStyle/>
+          <a:p>
+            <a:pPr algn="ctr"/>
+          </a:p>
+        </p:txBody>
+      </p:sp>
+      <p:sp>
+        <p:nvSpPr>
+          <p:cNvPr id="3" name="Rectangle 2"/>
+          <p:cNvSpPr/>
+          <p:nvPr/>
+        </p:nvSpPr>
+        <p:spPr>
+          <a:xfrm>
+            <a:off x="0" y="0"/>
+            <a:ext cx="12191695" cy="73152"/>
+          </a:xfrm>
+          <a:prstGeom prst="rect">
+            <a:avLst/>
+          </a:prstGeom>
+          <a:solidFill>
+            <a:srgbClr val="1D4ED8"/>
+          </a:solidFill>
+          <a:ln>
+            <a:noFill/>
+          </a:ln>
+        </p:spPr>
+        <p:style>
+          <a:lnRef idx="1">
+            <a:schemeClr val="accent1"/>
+          </a:lnRef>
+          <a:fillRef idx="3">
+            <a:schemeClr val="accent1"/>
+          </a:fillRef>
+          <a:effectRef idx="2">
+            <a:schemeClr val="accent1"/>
+          </a:effectRef>
+          <a:fontRef idx="minor">
+            <a:schemeClr val="lt1"/>
+          </a:fontRef>
+        </p:style>
+        <p:txBody>
+          <a:bodyPr rtlCol="0" anchor="ctr"/>
+          <a:lstStyle/>
+          <a:p>
+            <a:pPr algn="ctr"/>
+          </a:p>
+        </p:txBody>
+      </p:sp>
+      <p:sp>
+        <p:nvSpPr>
+          <p:cNvPr id="4" name="Rounded Rectangle 3"/>
+          <p:cNvSpPr/>
+          <p:nvPr/>
+        </p:nvSpPr>
+        <p:spPr>
+          <a:xfrm>
+            <a:off x="731520" y="384048"/>
+            <a:ext cx="2011680" cy="292608"/>
           </a:xfrm>
           <a:prstGeom prst="roundRect">
             <a:avLst/>
@@ -10220,33 +10752,33 @@
           </a:fontRef>
         </p:style>
         <p:txBody>
-          <a:bodyPr rtlCol="0" anchor="ctr" wrap="none"/>
+          <a:bodyPr rtlCol="0" anchor="ctr"/>
           <a:lstStyle/>
           <a:p>
             <a:pPr algn="ctr">
-              <a:defRPr sz="1100" b="1">
-                <a:solidFill>
-                  <a:srgbClr val="2563EB"/>
-                </a:solidFill>
-                <a:latin typeface="微软雅黑"/>
-              </a:defRPr>
-            </a:pPr>
-            <a:r>
-              <a:t>06. 业务全流程闭环</a:t>
-            </a:r>
-          </a:p>
-        </p:txBody>
-      </p:sp>
-      <p:sp>
-        <p:nvSpPr>
-          <p:cNvPr id="3" name="TextBox 2"/>
+              <a:defRPr sz="1000" b="1">
+                <a:solidFill>
+                  <a:srgbClr val="1D4ED8"/>
+                </a:solidFill>
+                <a:latin typeface="微软雅黑"/>
+              </a:defRPr>
+            </a:pPr>
+            <a:r>
+              <a:t>06. 最终界面与业务全流程闭环</a:t>
+            </a:r>
+          </a:p>
+        </p:txBody>
+      </p:sp>
+      <p:sp>
+        <p:nvSpPr>
+          <p:cNvPr id="5" name="TextBox 4"/>
           <p:cNvSpPr txBox="1"/>
           <p:nvPr/>
         </p:nvSpPr>
         <p:spPr>
           <a:xfrm>
-            <a:off x="731520" y="777240"/>
-            <a:ext cx="10515600" cy="548640"/>
+            <a:off x="731520" y="749808"/>
+            <a:ext cx="10698480" cy="777240"/>
           </a:xfrm>
           <a:prstGeom prst="rect">
             <a:avLst/>
@@ -10260,7 +10792,7 @@
           <a:lstStyle/>
           <a:p>
             <a:pPr>
-              <a:defRPr sz="2200" b="1">
+              <a:defRPr sz="2100" b="1">
                 <a:solidFill>
                   <a:srgbClr val="0F172A"/>
                 </a:solidFill>
@@ -10268,43 +10800,165 @@
               </a:defRPr>
             </a:pPr>
             <a:r>
-              <a:t>从物料推断到受控 Service BOM 自动生成</a:t>
+              <a:t>Service BOM 智能工作站实机运行与受控规范落地</a:t>
             </a:r>
           </a:p>
           <a:p>
             <a:pPr>
               <a:spcBef>
-                <a:spcPts val="400"/>
+                <a:spcPts val="300"/>
               </a:spcBef>
-              <a:defRPr sz="1200">
-                <a:solidFill>
-                  <a:srgbClr val="64748B"/>
-                </a:solidFill>
-                <a:latin typeface="微软雅黑"/>
-              </a:defRPr>
-            </a:pPr>
-            <a:r>
-              <a:t>严格遵循公司受控规范，兼具灵活编制与严谨的版本控制机制</a:t>
-            </a:r>
-          </a:p>
-        </p:txBody>
-      </p:sp>
-      <p:sp>
-        <p:nvSpPr>
-          <p:cNvPr id="4" name="Rounded Rectangle 3"/>
+              <a:defRPr sz="1100">
+                <a:solidFill>
+                  <a:srgbClr val="475569"/>
+                </a:solidFill>
+                <a:latin typeface="微软雅黑"/>
+              </a:defRPr>
+            </a:pPr>
+            <a:r>
+              <a:t>集统一物料库、装配层级点阵、实物图谱与受控保护于一体的端到端交付平台</a:t>
+            </a:r>
+          </a:p>
+        </p:txBody>
+      </p:sp>
+      <p:sp>
+        <p:nvSpPr>
+          <p:cNvPr id="6" name="Rounded Rectangle 5"/>
           <p:cNvSpPr/>
           <p:nvPr/>
         </p:nvSpPr>
         <p:spPr>
           <a:xfrm>
-            <a:off x="731520" y="1645920"/>
-            <a:ext cx="5257800" cy="2194560"/>
+            <a:off x="731520" y="1691640"/>
+            <a:ext cx="7635240" cy="4846320"/>
           </a:xfrm>
           <a:prstGeom prst="roundRect">
             <a:avLst/>
           </a:prstGeom>
           <a:solidFill>
-            <a:srgbClr val="F8FAFC"/>
+            <a:srgbClr val="FFFFFF"/>
+          </a:solidFill>
+          <a:ln w="19050">
+            <a:solidFill>
+              <a:srgbClr val="1D4ED8"/>
+            </a:solidFill>
+          </a:ln>
+        </p:spPr>
+        <p:style>
+          <a:lnRef idx="1">
+            <a:schemeClr val="accent1"/>
+          </a:lnRef>
+          <a:fillRef idx="3">
+            <a:schemeClr val="accent1"/>
+          </a:fillRef>
+          <a:effectRef idx="2">
+            <a:schemeClr val="accent1"/>
+          </a:effectRef>
+          <a:fontRef idx="minor">
+            <a:schemeClr val="lt1"/>
+          </a:fontRef>
+        </p:style>
+        <p:txBody>
+          <a:bodyPr rtlCol="0" anchor="ctr"/>
+          <a:lstStyle/>
+          <a:p>
+            <a:pPr algn="ctr"/>
+          </a:p>
+        </p:txBody>
+      </p:sp>
+      <p:sp>
+        <p:nvSpPr>
+          <p:cNvPr id="7" name="Rounded Rectangle 6"/>
+          <p:cNvSpPr/>
+          <p:nvPr/>
+        </p:nvSpPr>
+        <p:spPr>
+          <a:xfrm>
+            <a:off x="731520" y="1691640"/>
+            <a:ext cx="7635240" cy="347472"/>
+          </a:xfrm>
+          <a:prstGeom prst="roundRect">
+            <a:avLst/>
+          </a:prstGeom>
+          <a:solidFill>
+            <a:srgbClr val="0F172A"/>
+          </a:solidFill>
+          <a:ln>
+            <a:noFill/>
+          </a:ln>
+        </p:spPr>
+        <p:style>
+          <a:lnRef idx="1">
+            <a:schemeClr val="accent1"/>
+          </a:lnRef>
+          <a:fillRef idx="3">
+            <a:schemeClr val="accent1"/>
+          </a:fillRef>
+          <a:effectRef idx="2">
+            <a:schemeClr val="accent1"/>
+          </a:effectRef>
+          <a:fontRef idx="minor">
+            <a:schemeClr val="lt1"/>
+          </a:fontRef>
+        </p:style>
+        <p:txBody>
+          <a:bodyPr rtlCol="0" anchor="ctr"/>
+          <a:lstStyle/>
+          <a:p>
+            <a:pPr algn="ctr">
+              <a:defRPr sz="1000" b="1">
+                <a:solidFill>
+                  <a:srgbClr val="FFFFFF"/>
+                </a:solidFill>
+                <a:latin typeface="微软雅黑"/>
+              </a:defRPr>
+            </a:pPr>
+            <a:r>
+              <a:t>🌐 风电机组 Service BOM 智能工作站 · 实时运行界面 (受控项目实机截图)</a:t>
+            </a:r>
+          </a:p>
+        </p:txBody>
+      </p:sp>
+      <p:pic>
+        <p:nvPicPr>
+          <p:cNvPr id="8" name="Picture 7" descr="ui_dashboard_real.png"/>
+          <p:cNvPicPr>
+            <a:picLocks noChangeAspect="1"/>
+          </p:cNvPicPr>
+          <p:nvPr/>
+        </p:nvPicPr>
+        <p:blipFill>
+          <a:blip r:embed="rId2"/>
+          <a:stretch>
+            <a:fillRect/>
+          </a:stretch>
+        </p:blipFill>
+        <p:spPr>
+          <a:xfrm>
+            <a:off x="777240" y="2084831"/>
+            <a:ext cx="7543800" cy="4389120"/>
+          </a:xfrm>
+          <a:prstGeom prst="rect">
+            <a:avLst/>
+          </a:prstGeom>
+        </p:spPr>
+      </p:pic>
+      <p:sp>
+        <p:nvSpPr>
+          <p:cNvPr id="9" name="Rounded Rectangle 8"/>
+          <p:cNvSpPr/>
+          <p:nvPr/>
+        </p:nvSpPr>
+        <p:spPr>
+          <a:xfrm>
+            <a:off x="8503920" y="1691640"/>
+            <a:ext cx="2956255" cy="1133856"/>
+          </a:xfrm>
+          <a:prstGeom prst="roundRect">
+            <a:avLst/>
+          </a:prstGeom>
+          <a:solidFill>
+            <a:srgbClr val="FFFFFF"/>
           </a:solidFill>
           <a:ln w="12700">
             <a:solidFill>
@@ -10336,20 +10990,20 @@
       </p:sp>
       <p:sp>
         <p:nvSpPr>
-          <p:cNvPr id="5" name="Rounded Rectangle 4"/>
+          <p:cNvPr id="10" name="Rounded Rectangle 9"/>
           <p:cNvSpPr/>
           <p:nvPr/>
         </p:nvSpPr>
         <p:spPr>
           <a:xfrm>
-            <a:off x="914400" y="1828800"/>
-            <a:ext cx="365760" cy="365760"/>
+            <a:off x="8503920" y="1691640"/>
+            <a:ext cx="91440" cy="1133856"/>
           </a:xfrm>
           <a:prstGeom prst="roundRect">
             <a:avLst/>
           </a:prstGeom>
           <a:solidFill>
-            <a:srgbClr val="2563EB"/>
+            <a:srgbClr val="1D4ED8"/>
           </a:solidFill>
           <a:ln>
             <a:noFill/>
@@ -10373,30 +11027,20 @@
           <a:bodyPr rtlCol="0" anchor="ctr"/>
           <a:lstStyle/>
           <a:p>
-            <a:pPr algn="ctr">
-              <a:defRPr sz="1300" b="1">
-                <a:solidFill>
-                  <a:srgbClr val="FFFFFF"/>
-                </a:solidFill>
-                <a:latin typeface="微软雅黑"/>
-              </a:defRPr>
-            </a:pPr>
-            <a:r>
-              <a:t>1</a:t>
-            </a:r>
-          </a:p>
-        </p:txBody>
-      </p:sp>
-      <p:sp>
-        <p:nvSpPr>
-          <p:cNvPr id="6" name="TextBox 5"/>
+            <a:pPr algn="ctr"/>
+          </a:p>
+        </p:txBody>
+      </p:sp>
+      <p:sp>
+        <p:nvSpPr>
+          <p:cNvPr id="11" name="TextBox 10"/>
           <p:cNvSpPr txBox="1"/>
           <p:nvPr/>
         </p:nvSpPr>
         <p:spPr>
           <a:xfrm>
-            <a:off x="1371600" y="1783080"/>
-            <a:ext cx="4389120" cy="1920240"/>
+            <a:off x="8668512" y="1746504"/>
+            <a:ext cx="2724912" cy="1051560"/>
           </a:xfrm>
           <a:prstGeom prst="rect">
             <a:avLst/>
@@ -10410,51 +11054,51 @@
           <a:lstStyle/>
           <a:p>
             <a:pPr>
-              <a:defRPr sz="1400" b="1">
-                <a:solidFill>
-                  <a:srgbClr val="0F172A"/>
-                </a:solidFill>
-                <a:latin typeface="微软雅黑"/>
-              </a:defRPr>
-            </a:pPr>
-            <a:r>
-              <a:t>封面与基本信息受控</a:t>
+              <a:defRPr sz="1100" b="1">
+                <a:solidFill>
+                  <a:srgbClr val="1D4ED8"/>
+                </a:solidFill>
+                <a:latin typeface="微软雅黑"/>
+              </a:defRPr>
+            </a:pPr>
+            <a:r>
+              <a:t>🔐 受控工程锁 &amp; 统一命名</a:t>
             </a:r>
           </a:p>
           <a:p>
             <a:pPr>
               <a:spcBef>
-                <a:spcPts val="600"/>
+                <a:spcPts val="300"/>
               </a:spcBef>
-              <a:defRPr sz="1100">
-                <a:solidFill>
-                  <a:srgbClr val="64748B"/>
-                </a:solidFill>
-                <a:latin typeface="微软雅黑"/>
-              </a:defRPr>
-            </a:pPr>
-            <a:r>
-              <a:t>自动填充受控表单号（FDJL-JS-037）、文件号、机型代号（如 EW6.25-220）、所属平台（如 WL平台）。封面与导出的文件名全流程自动同步，告别手工填写的低级错误。</a:t>
-            </a:r>
-          </a:p>
-        </p:txBody>
-      </p:sp>
-      <p:sp>
-        <p:nvSpPr>
-          <p:cNvPr id="7" name="Rounded Rectangle 6"/>
+              <a:defRPr sz="950">
+                <a:solidFill>
+                  <a:srgbClr val="475569"/>
+                </a:solidFill>
+                <a:latin typeface="微软雅黑"/>
+              </a:defRPr>
+            </a:pPr>
+            <a:r>
+              <a:t>项目命名统一遵循：`变桨系统SBOM_电力电子[WL平台][EW6.25-220]`；带工程锁与心跳保护，协同互不冲撞。</a:t>
+            </a:r>
+          </a:p>
+        </p:txBody>
+      </p:sp>
+      <p:sp>
+        <p:nvSpPr>
+          <p:cNvPr id="12" name="Rounded Rectangle 11"/>
           <p:cNvSpPr/>
           <p:nvPr/>
         </p:nvSpPr>
         <p:spPr>
           <a:xfrm>
-            <a:off x="6172200" y="1645920"/>
-            <a:ext cx="5257800" cy="2194560"/>
+            <a:off x="8503920" y="2935224"/>
+            <a:ext cx="2956255" cy="1133856"/>
           </a:xfrm>
           <a:prstGeom prst="roundRect">
             <a:avLst/>
           </a:prstGeom>
           <a:solidFill>
-            <a:srgbClr val="F8FAFC"/>
+            <a:srgbClr val="FFFFFF"/>
           </a:solidFill>
           <a:ln w="12700">
             <a:solidFill>
@@ -10486,20 +11130,20 @@
       </p:sp>
       <p:sp>
         <p:nvSpPr>
-          <p:cNvPr id="8" name="Rounded Rectangle 7"/>
+          <p:cNvPr id="13" name="Rounded Rectangle 12"/>
           <p:cNvSpPr/>
           <p:nvPr/>
         </p:nvSpPr>
         <p:spPr>
           <a:xfrm>
-            <a:off x="6355080" y="1828800"/>
-            <a:ext cx="365760" cy="365760"/>
+            <a:off x="8503920" y="2935224"/>
+            <a:ext cx="91440" cy="1133856"/>
           </a:xfrm>
           <a:prstGeom prst="roundRect">
             <a:avLst/>
           </a:prstGeom>
           <a:solidFill>
-            <a:srgbClr val="2563EB"/>
+            <a:srgbClr val="10B981"/>
           </a:solidFill>
           <a:ln>
             <a:noFill/>
@@ -10523,30 +11167,20 @@
           <a:bodyPr rtlCol="0" anchor="ctr"/>
           <a:lstStyle/>
           <a:p>
-            <a:pPr algn="ctr">
-              <a:defRPr sz="1300" b="1">
-                <a:solidFill>
-                  <a:srgbClr val="FFFFFF"/>
-                </a:solidFill>
-                <a:latin typeface="微软雅黑"/>
-              </a:defRPr>
-            </a:pPr>
-            <a:r>
-              <a:t>2</a:t>
-            </a:r>
-          </a:p>
-        </p:txBody>
-      </p:sp>
-      <p:sp>
-        <p:nvSpPr>
-          <p:cNvPr id="9" name="TextBox 8"/>
+            <a:pPr algn="ctr"/>
+          </a:p>
+        </p:txBody>
+      </p:sp>
+      <p:sp>
+        <p:nvSpPr>
+          <p:cNvPr id="14" name="TextBox 13"/>
           <p:cNvSpPr txBox="1"/>
           <p:nvPr/>
         </p:nvSpPr>
         <p:spPr>
           <a:xfrm>
-            <a:off x="6812280" y="1783080"/>
-            <a:ext cx="4389120" cy="1920240"/>
+            <a:off x="8668512" y="2990088"/>
+            <a:ext cx="2724912" cy="1051560"/>
           </a:xfrm>
           <a:prstGeom prst="rect">
             <a:avLst/>
@@ -10560,51 +11194,51 @@
           <a:lstStyle/>
           <a:p>
             <a:pPr>
-              <a:defRPr sz="1400" b="1">
-                <a:solidFill>
-                  <a:srgbClr val="0F172A"/>
-                </a:solidFill>
-                <a:latin typeface="微软雅黑"/>
-              </a:defRPr>
-            </a:pPr>
-            <a:r>
-              <a:t>六级清单签字与变更页 (ECN)</a:t>
+              <a:defRPr sz="1100" b="1">
+                <a:solidFill>
+                  <a:srgbClr val="10B981"/>
+                </a:solidFill>
+                <a:latin typeface="微软雅黑"/>
+              </a:defRPr>
+            </a:pPr>
+            <a:r>
+              <a:t>🌲 树状层级点阵 &amp; 步进序号</a:t>
             </a:r>
           </a:p>
           <a:p>
             <a:pPr>
               <a:spcBef>
-                <a:spcPts val="600"/>
+                <a:spcPts val="300"/>
               </a:spcBef>
-              <a:defRPr sz="1100">
-                <a:solidFill>
-                  <a:srgbClr val="64748B"/>
-                </a:solidFill>
-                <a:latin typeface="微软雅黑"/>
-              </a:defRPr>
-            </a:pPr>
-            <a:r>
-              <a:t>严格支持【编制、校对、审核、会签、标审】完整签字责任链；每次机型升级自动生成 ECN 修改通知单记录与更改标记，全流程合规可溯。</a:t>
-            </a:r>
-          </a:p>
-        </p:txBody>
-      </p:sp>
-      <p:sp>
-        <p:nvSpPr>
-          <p:cNvPr id="10" name="Rounded Rectangle 9"/>
+              <a:defRPr sz="950">
+                <a:solidFill>
+                  <a:srgbClr val="475569"/>
+                </a:solidFill>
+                <a:latin typeface="微软雅黑"/>
+              </a:defRPr>
+            </a:pPr>
+            <a:r>
+              <a:t>规范“10, 20, 30”步进序号编码；自动计算并生成 `• 一级组件` / `•• 二级` 层级缩进，导出完美还原。</a:t>
+            </a:r>
+          </a:p>
+        </p:txBody>
+      </p:sp>
+      <p:sp>
+        <p:nvSpPr>
+          <p:cNvPr id="15" name="Rounded Rectangle 14"/>
           <p:cNvSpPr/>
           <p:nvPr/>
         </p:nvSpPr>
         <p:spPr>
           <a:xfrm>
-            <a:off x="731520" y="4023360"/>
-            <a:ext cx="5257800" cy="2194560"/>
+            <a:off x="8503920" y="4178808"/>
+            <a:ext cx="2956255" cy="1133856"/>
           </a:xfrm>
           <a:prstGeom prst="roundRect">
             <a:avLst/>
           </a:prstGeom>
           <a:solidFill>
-            <a:srgbClr val="F8FAFC"/>
+            <a:srgbClr val="FFFFFF"/>
           </a:solidFill>
           <a:ln w="12700">
             <a:solidFill>
@@ -10636,20 +11270,20 @@
       </p:sp>
       <p:sp>
         <p:nvSpPr>
-          <p:cNvPr id="11" name="Rounded Rectangle 10"/>
+          <p:cNvPr id="16" name="Rounded Rectangle 15"/>
           <p:cNvSpPr/>
           <p:nvPr/>
         </p:nvSpPr>
         <p:spPr>
           <a:xfrm>
-            <a:off x="914400" y="4206240"/>
-            <a:ext cx="365760" cy="365760"/>
+            <a:off x="8503920" y="4178808"/>
+            <a:ext cx="91440" cy="1133856"/>
           </a:xfrm>
           <a:prstGeom prst="roundRect">
             <a:avLst/>
           </a:prstGeom>
           <a:solidFill>
-            <a:srgbClr val="2563EB"/>
+            <a:srgbClr val="0EA5E9"/>
           </a:solidFill>
           <a:ln>
             <a:noFill/>
@@ -10673,30 +11307,20 @@
           <a:bodyPr rtlCol="0" anchor="ctr"/>
           <a:lstStyle/>
           <a:p>
-            <a:pPr algn="ctr">
-              <a:defRPr sz="1300" b="1">
-                <a:solidFill>
-                  <a:srgbClr val="FFFFFF"/>
-                </a:solidFill>
-                <a:latin typeface="微软雅黑"/>
-              </a:defRPr>
-            </a:pPr>
-            <a:r>
-              <a:t>3</a:t>
-            </a:r>
-          </a:p>
-        </p:txBody>
-      </p:sp>
-      <p:sp>
-        <p:nvSpPr>
-          <p:cNvPr id="12" name="TextBox 11"/>
+            <a:pPr algn="ctr"/>
+          </a:p>
+        </p:txBody>
+      </p:sp>
+      <p:sp>
+        <p:nvSpPr>
+          <p:cNvPr id="17" name="TextBox 16"/>
           <p:cNvSpPr txBox="1"/>
           <p:nvPr/>
         </p:nvSpPr>
         <p:spPr>
           <a:xfrm>
-            <a:off x="1371600" y="4160520"/>
-            <a:ext cx="4389120" cy="1920240"/>
+            <a:off x="8668512" y="4233672"/>
+            <a:ext cx="2724912" cy="1051560"/>
           </a:xfrm>
           <a:prstGeom prst="rect">
             <a:avLst/>
@@ -10710,51 +11334,51 @@
           <a:lstStyle/>
           <a:p>
             <a:pPr>
-              <a:defRPr sz="1400" b="1">
-                <a:solidFill>
-                  <a:srgbClr val="0F172A"/>
-                </a:solidFill>
-                <a:latin typeface="微软雅黑"/>
-              </a:defRPr>
-            </a:pPr>
-            <a:r>
-              <a:t>树状层级序号规则 (Step 10)</a:t>
+              <a:defRPr sz="1100" b="1">
+                <a:solidFill>
+                  <a:srgbClr val="0EA5E9"/>
+                </a:solidFill>
+                <a:latin typeface="微软雅黑"/>
+              </a:defRPr>
+            </a:pPr>
+            <a:r>
+              <a:t>📸 多模态实物图册 &amp; 手册</a:t>
             </a:r>
           </a:p>
           <a:p>
             <a:pPr>
               <a:spcBef>
-                <a:spcPts val="600"/>
+                <a:spcPts val="300"/>
               </a:spcBef>
-              <a:defRPr sz="1100">
-                <a:solidFill>
-                  <a:srgbClr val="64748B"/>
-                </a:solidFill>
-                <a:latin typeface="微软雅黑"/>
-              </a:defRPr>
-            </a:pPr>
-            <a:r>
-              <a:t>支持国际通行标准“10、20、30”步进序号编码，并自动生成 B 列层级点阵缩进（•、••、•••），多层级关系一目了然，Excel 导出完美还原。</a:t>
-            </a:r>
-          </a:p>
-        </p:txBody>
-      </p:sp>
-      <p:sp>
-        <p:nvSpPr>
-          <p:cNvPr id="13" name="Rounded Rectangle 12"/>
+              <a:defRPr sz="950">
+                <a:solidFill>
+                  <a:srgbClr val="475569"/>
+                </a:solidFill>
+                <a:latin typeface="微软雅黑"/>
+              </a:defRPr>
+            </a:pPr>
+            <a:r>
+              <a:t>清单内嵌继电器、电源、电机等实物缩略图，现场领料秒级核对；一键调阅对应 PDF 技术手册。</a:t>
+            </a:r>
+          </a:p>
+        </p:txBody>
+      </p:sp>
+      <p:sp>
+        <p:nvSpPr>
+          <p:cNvPr id="18" name="Rounded Rectangle 17"/>
           <p:cNvSpPr/>
           <p:nvPr/>
         </p:nvSpPr>
         <p:spPr>
           <a:xfrm>
-            <a:off x="6172200" y="4023360"/>
-            <a:ext cx="5257800" cy="2194560"/>
+            <a:off x="8503920" y="5422392"/>
+            <a:ext cx="2956255" cy="1133856"/>
           </a:xfrm>
           <a:prstGeom prst="roundRect">
             <a:avLst/>
           </a:prstGeom>
           <a:solidFill>
-            <a:srgbClr val="F8FAFC"/>
+            <a:srgbClr val="FFFFFF"/>
           </a:solidFill>
           <a:ln w="12700">
             <a:solidFill>
@@ -10786,20 +11410,20 @@
       </p:sp>
       <p:sp>
         <p:nvSpPr>
-          <p:cNvPr id="14" name="Rounded Rectangle 13"/>
+          <p:cNvPr id="19" name="Rounded Rectangle 18"/>
           <p:cNvSpPr/>
           <p:nvPr/>
         </p:nvSpPr>
         <p:spPr>
           <a:xfrm>
-            <a:off x="6355080" y="4206240"/>
-            <a:ext cx="365760" cy="365760"/>
+            <a:off x="8503920" y="5422392"/>
+            <a:ext cx="91440" cy="1133856"/>
           </a:xfrm>
           <a:prstGeom prst="roundRect">
             <a:avLst/>
           </a:prstGeom>
           <a:solidFill>
-            <a:srgbClr val="2563EB"/>
+            <a:srgbClr val="7C3AED"/>
           </a:solidFill>
           <a:ln>
             <a:noFill/>
@@ -10823,30 +11447,20 @@
           <a:bodyPr rtlCol="0" anchor="ctr"/>
           <a:lstStyle/>
           <a:p>
-            <a:pPr algn="ctr">
-              <a:defRPr sz="1300" b="1">
-                <a:solidFill>
-                  <a:srgbClr val="FFFFFF"/>
-                </a:solidFill>
-                <a:latin typeface="微软雅黑"/>
-              </a:defRPr>
-            </a:pPr>
-            <a:r>
-              <a:t>4</a:t>
-            </a:r>
-          </a:p>
-        </p:txBody>
-      </p:sp>
-      <p:sp>
-        <p:nvSpPr>
-          <p:cNvPr id="15" name="TextBox 14"/>
+            <a:pPr algn="ctr"/>
+          </a:p>
+        </p:txBody>
+      </p:sp>
+      <p:sp>
+        <p:nvSpPr>
+          <p:cNvPr id="20" name="TextBox 19"/>
           <p:cNvSpPr txBox="1"/>
           <p:nvPr/>
         </p:nvSpPr>
         <p:spPr>
           <a:xfrm>
-            <a:off x="6812280" y="4160520"/>
-            <a:ext cx="4389120" cy="1920240"/>
+            <a:off x="8668512" y="5477256"/>
+            <a:ext cx="2724912" cy="1051560"/>
           </a:xfrm>
           <a:prstGeom prst="rect">
             <a:avLst/>
@@ -10860,31 +11474,31 @@
           <a:lstStyle/>
           <a:p>
             <a:pPr>
-              <a:defRPr sz="1400" b="1">
-                <a:solidFill>
-                  <a:srgbClr val="0F172A"/>
-                </a:solidFill>
-                <a:latin typeface="微软雅黑"/>
-              </a:defRPr>
-            </a:pPr>
-            <a:r>
-              <a:t>独立工程锁保护机制</a:t>
+              <a:defRPr sz="1100" b="1">
+                <a:solidFill>
+                  <a:srgbClr val="7C3AED"/>
+                </a:solidFill>
+                <a:latin typeface="微软雅黑"/>
+              </a:defRPr>
+            </a:pPr>
+            <a:r>
+              <a:t>📤 受控规范标准交付闭环</a:t>
             </a:r>
           </a:p>
           <a:p>
             <a:pPr>
               <a:spcBef>
-                <a:spcPts val="600"/>
+                <a:spcPts val="300"/>
               </a:spcBef>
-              <a:defRPr sz="1100">
-                <a:solidFill>
-                  <a:srgbClr val="64748B"/>
-                </a:solidFill>
-                <a:latin typeface="微软雅黑"/>
-              </a:defRPr>
-            </a:pPr>
-            <a:r>
-              <a:t>细粒度机型工程锁（锁定只读 / 解锁编辑），多位同事并发协作不会互相冲撞覆盖，自带心跳监测与离线自动释放，兼顾安全与效率。</a:t>
+              <a:defRPr sz="950">
+                <a:solidFill>
+                  <a:srgbClr val="475569"/>
+                </a:solidFill>
+                <a:latin typeface="微软雅黑"/>
+              </a:defRPr>
+            </a:pPr>
+            <a:r>
+              <a:t>100% 契合 FDJL-JS-037 受控表单规范，含封面、签字与更改页；一键打包离线运维工程包 (.zip)。</a:t>
             </a:r>
           </a:p>
         </p:txBody>
@@ -10909,14 +11523,100 @@
       <p:grpSpPr/>
       <p:sp>
         <p:nvSpPr>
-          <p:cNvPr id="2" name="Rounded Rectangle 1"/>
+          <p:cNvPr id="2" name="Rectangle 1"/>
           <p:cNvSpPr/>
           <p:nvPr/>
         </p:nvSpPr>
         <p:spPr>
           <a:xfrm>
-            <a:off x="731520" y="411480"/>
-            <a:ext cx="2011680" cy="320040"/>
+            <a:off x="0" y="0"/>
+            <a:ext cx="12191695" cy="6858000"/>
+          </a:xfrm>
+          <a:prstGeom prst="rect">
+            <a:avLst/>
+          </a:prstGeom>
+          <a:solidFill>
+            <a:srgbClr val="F8FAFC"/>
+          </a:solidFill>
+          <a:ln>
+            <a:noFill/>
+          </a:ln>
+        </p:spPr>
+        <p:style>
+          <a:lnRef idx="1">
+            <a:schemeClr val="accent1"/>
+          </a:lnRef>
+          <a:fillRef idx="3">
+            <a:schemeClr val="accent1"/>
+          </a:fillRef>
+          <a:effectRef idx="2">
+            <a:schemeClr val="accent1"/>
+          </a:effectRef>
+          <a:fontRef idx="minor">
+            <a:schemeClr val="lt1"/>
+          </a:fontRef>
+        </p:style>
+        <p:txBody>
+          <a:bodyPr rtlCol="0" anchor="ctr"/>
+          <a:lstStyle/>
+          <a:p>
+            <a:pPr algn="ctr"/>
+          </a:p>
+        </p:txBody>
+      </p:sp>
+      <p:sp>
+        <p:nvSpPr>
+          <p:cNvPr id="3" name="Rectangle 2"/>
+          <p:cNvSpPr/>
+          <p:nvPr/>
+        </p:nvSpPr>
+        <p:spPr>
+          <a:xfrm>
+            <a:off x="0" y="0"/>
+            <a:ext cx="12191695" cy="73152"/>
+          </a:xfrm>
+          <a:prstGeom prst="rect">
+            <a:avLst/>
+          </a:prstGeom>
+          <a:solidFill>
+            <a:srgbClr val="1D4ED8"/>
+          </a:solidFill>
+          <a:ln>
+            <a:noFill/>
+          </a:ln>
+        </p:spPr>
+        <p:style>
+          <a:lnRef idx="1">
+            <a:schemeClr val="accent1"/>
+          </a:lnRef>
+          <a:fillRef idx="3">
+            <a:schemeClr val="accent1"/>
+          </a:fillRef>
+          <a:effectRef idx="2">
+            <a:schemeClr val="accent1"/>
+          </a:effectRef>
+          <a:fontRef idx="minor">
+            <a:schemeClr val="lt1"/>
+          </a:fontRef>
+        </p:style>
+        <p:txBody>
+          <a:bodyPr rtlCol="0" anchor="ctr"/>
+          <a:lstStyle/>
+          <a:p>
+            <a:pPr algn="ctr"/>
+          </a:p>
+        </p:txBody>
+      </p:sp>
+      <p:sp>
+        <p:nvSpPr>
+          <p:cNvPr id="4" name="Rounded Rectangle 3"/>
+          <p:cNvSpPr/>
+          <p:nvPr/>
+        </p:nvSpPr>
+        <p:spPr>
+          <a:xfrm>
+            <a:off x="731520" y="384048"/>
+            <a:ext cx="2011680" cy="292608"/>
           </a:xfrm>
           <a:prstGeom prst="roundRect">
             <a:avLst/>
@@ -10945,13 +11645,13 @@
           </a:fontRef>
         </p:style>
         <p:txBody>
-          <a:bodyPr rtlCol="0" anchor="ctr" wrap="none"/>
+          <a:bodyPr rtlCol="0" anchor="ctr"/>
           <a:lstStyle/>
           <a:p>
             <a:pPr algn="ctr">
-              <a:defRPr sz="1100" b="1">
-                <a:solidFill>
-                  <a:srgbClr val="2563EB"/>
+              <a:defRPr sz="1000" b="1">
+                <a:solidFill>
+                  <a:srgbClr val="1D4ED8"/>
                 </a:solidFill>
                 <a:latin typeface="微软雅黑"/>
               </a:defRPr>
@@ -10964,14 +11664,14 @@
       </p:sp>
       <p:sp>
         <p:nvSpPr>
-          <p:cNvPr id="3" name="TextBox 2"/>
+          <p:cNvPr id="5" name="TextBox 4"/>
           <p:cNvSpPr txBox="1"/>
           <p:nvPr/>
         </p:nvSpPr>
         <p:spPr>
           <a:xfrm>
-            <a:off x="731520" y="777240"/>
-            <a:ext cx="10515600" cy="548640"/>
+            <a:off x="731520" y="749808"/>
+            <a:ext cx="10698480" cy="777240"/>
           </a:xfrm>
           <a:prstGeom prst="rect">
             <a:avLst/>
@@ -10985,7 +11685,7 @@
           <a:lstStyle/>
           <a:p>
             <a:pPr>
-              <a:defRPr sz="2200" b="1">
+              <a:defRPr sz="2100" b="1">
                 <a:solidFill>
                   <a:srgbClr val="0F172A"/>
                 </a:solidFill>
@@ -10999,11 +11699,11 @@
           <a:p>
             <a:pPr>
               <a:spcBef>
-                <a:spcPts val="400"/>
+                <a:spcPts val="300"/>
               </a:spcBef>
-              <a:defRPr sz="1200">
-                <a:solidFill>
-                  <a:srgbClr val="64748B"/>
+              <a:defRPr sz="1100">
+                <a:solidFill>
+                  <a:srgbClr val="475569"/>
                 </a:solidFill>
                 <a:latin typeface="微软雅黑"/>
               </a:defRPr>
@@ -11016,14 +11716,14 @@
       </p:sp>
       <p:sp>
         <p:nvSpPr>
-          <p:cNvPr id="4" name="Rounded Rectangle 3"/>
+          <p:cNvPr id="6" name="Rounded Rectangle 5"/>
           <p:cNvSpPr/>
           <p:nvPr/>
         </p:nvSpPr>
         <p:spPr>
           <a:xfrm>
-            <a:off x="731520" y="1645920"/>
-            <a:ext cx="2560320" cy="4663440"/>
+            <a:off x="731520" y="1691640"/>
+            <a:ext cx="2560320" cy="4572000"/>
           </a:xfrm>
           <a:prstGeom prst="roundRect">
             <a:avLst/>
@@ -11061,20 +11761,20 @@
       </p:sp>
       <p:sp>
         <p:nvSpPr>
-          <p:cNvPr id="5" name="Rectangle 4"/>
+          <p:cNvPr id="7" name="Rounded Rectangle 6"/>
           <p:cNvSpPr/>
           <p:nvPr/>
         </p:nvSpPr>
         <p:spPr>
           <a:xfrm>
-            <a:off x="731520" y="1645920"/>
+            <a:off x="731520" y="1691640"/>
             <a:ext cx="2560320" cy="91440"/>
           </a:xfrm>
-          <a:prstGeom prst="rect">
-            <a:avLst/>
-          </a:prstGeom>
-          <a:solidFill>
-            <a:srgbClr val="2563EB"/>
+          <a:prstGeom prst="roundRect">
+            <a:avLst/>
+          </a:prstGeom>
+          <a:solidFill>
+            <a:srgbClr val="1D4ED8"/>
           </a:solidFill>
           <a:ln>
             <a:noFill/>
@@ -11104,14 +11804,14 @@
       </p:sp>
       <p:sp>
         <p:nvSpPr>
-          <p:cNvPr id="6" name="TextBox 5"/>
+          <p:cNvPr id="8" name="TextBox 7"/>
           <p:cNvSpPr txBox="1"/>
           <p:nvPr/>
         </p:nvSpPr>
         <p:spPr>
           <a:xfrm>
-            <a:off x="868680" y="1920240"/>
-            <a:ext cx="2286000" cy="4114800"/>
+            <a:off x="896112" y="1920240"/>
+            <a:ext cx="2231136" cy="4114800"/>
           </a:xfrm>
           <a:prstGeom prst="rect">
             <a:avLst/>
@@ -11127,7 +11827,7 @@
             <a:pPr>
               <a:defRPr sz="1300" b="1">
                 <a:solidFill>
-                  <a:srgbClr val="64748B"/>
+                  <a:srgbClr val="475569"/>
                 </a:solidFill>
                 <a:latin typeface="微软雅黑"/>
               </a:defRPr>
@@ -11139,13 +11839,13 @@
           <a:p>
             <a:pPr>
               <a:spcBef>
-                <a:spcPts val="1000"/>
+                <a:spcPts val="1400"/>
               </a:spcBef>
-              <a:defRPr sz="2000" b="1">
-                <a:solidFill>
-                  <a:srgbClr val="2563EB"/>
-                </a:solidFill>
-                <a:latin typeface="Arial"/>
+              <a:defRPr sz="2200" b="1">
+                <a:solidFill>
+                  <a:srgbClr val="1D4ED8"/>
+                </a:solidFill>
+                <a:latin typeface="Segoe UI"/>
               </a:defRPr>
             </a:pPr>
             <a:r>
@@ -11155,11 +11855,66 @@
           <a:p>
             <a:pPr>
               <a:spcBef>
-                <a:spcPts val="600"/>
+                <a:spcPts val="4500"/>
               </a:spcBef>
-              <a:defRPr sz="1100" b="1">
-                <a:solidFill>
-                  <a:srgbClr val="10B981"/>
+              <a:defRPr sz="1050">
+                <a:solidFill>
+                  <a:srgbClr val="475569"/>
+                </a:solidFill>
+                <a:latin typeface="微软雅黑"/>
+              </a:defRPr>
+            </a:pPr>
+            <a:r>
+              <a:t>云端 AI 一秒自动完成名称、规格型号与厂商的三段式抽取拆解</a:t>
+            </a:r>
+          </a:p>
+        </p:txBody>
+      </p:sp>
+      <p:sp>
+        <p:nvSpPr>
+          <p:cNvPr id="9" name="Rounded Rectangle 8"/>
+          <p:cNvSpPr/>
+          <p:nvPr/>
+        </p:nvSpPr>
+        <p:spPr>
+          <a:xfrm>
+            <a:off x="896112" y="3108960"/>
+            <a:ext cx="2231136" cy="320040"/>
+          </a:xfrm>
+          <a:prstGeom prst="roundRect">
+            <a:avLst/>
+          </a:prstGeom>
+          <a:solidFill>
+            <a:srgbClr val="EFF6FF"/>
+          </a:solidFill>
+          <a:ln w="12700">
+            <a:solidFill>
+              <a:srgbClr val="1D4ED8"/>
+            </a:solidFill>
+          </a:ln>
+        </p:spPr>
+        <p:style>
+          <a:lnRef idx="1">
+            <a:schemeClr val="accent1"/>
+          </a:lnRef>
+          <a:fillRef idx="3">
+            <a:schemeClr val="accent1"/>
+          </a:fillRef>
+          <a:effectRef idx="2">
+            <a:schemeClr val="accent1"/>
+          </a:effectRef>
+          <a:fontRef idx="minor">
+            <a:schemeClr val="lt1"/>
+          </a:fontRef>
+        </p:style>
+        <p:txBody>
+          <a:bodyPr rtlCol="0" anchor="ctr"/>
+          <a:lstStyle/>
+          <a:p>
+            <a:pPr algn="ctr">
+              <a:defRPr sz="1050" b="1">
+                <a:solidFill>
+                  <a:srgbClr val="1D4ED8"/>
                 </a:solidFill>
                 <a:latin typeface="微软雅黑"/>
               </a:defRPr>
@@ -11168,34 +11923,18 @@
               <a:t>▲ 效率提升 85%+</a:t>
             </a:r>
           </a:p>
-          <a:p>
-            <a:pPr>
-              <a:spcBef>
-                <a:spcPts val="1600"/>
-              </a:spcBef>
-              <a:defRPr sz="1100">
-                <a:solidFill>
-                  <a:srgbClr val="64748B"/>
-                </a:solidFill>
-                <a:latin typeface="微软雅黑"/>
-              </a:defRPr>
-            </a:pPr>
-            <a:r>
-              <a:t>AI 一秒自动完成名称、规格型号与厂商的三段式抽取拆解</a:t>
-            </a:r>
-          </a:p>
-        </p:txBody>
-      </p:sp>
-      <p:sp>
-        <p:nvSpPr>
-          <p:cNvPr id="7" name="Rounded Rectangle 6"/>
+        </p:txBody>
+      </p:sp>
+      <p:sp>
+        <p:nvSpPr>
+          <p:cNvPr id="10" name="Rounded Rectangle 9"/>
           <p:cNvSpPr/>
           <p:nvPr/>
         </p:nvSpPr>
         <p:spPr>
           <a:xfrm>
-            <a:off x="3429000" y="1645920"/>
-            <a:ext cx="2560320" cy="4663440"/>
+            <a:off x="3429000" y="1691640"/>
+            <a:ext cx="2560320" cy="4572000"/>
           </a:xfrm>
           <a:prstGeom prst="roundRect">
             <a:avLst/>
@@ -11233,16 +11972,16 @@
       </p:sp>
       <p:sp>
         <p:nvSpPr>
-          <p:cNvPr id="8" name="Rectangle 7"/>
+          <p:cNvPr id="11" name="Rounded Rectangle 10"/>
           <p:cNvSpPr/>
           <p:nvPr/>
         </p:nvSpPr>
         <p:spPr>
           <a:xfrm>
-            <a:off x="3429000" y="1645920"/>
+            <a:off x="3429000" y="1691640"/>
             <a:ext cx="2560320" cy="91440"/>
           </a:xfrm>
-          <a:prstGeom prst="rect">
+          <a:prstGeom prst="roundRect">
             <a:avLst/>
           </a:prstGeom>
           <a:solidFill>
@@ -11276,14 +12015,14 @@
       </p:sp>
       <p:sp>
         <p:nvSpPr>
-          <p:cNvPr id="9" name="TextBox 8"/>
+          <p:cNvPr id="12" name="TextBox 11"/>
           <p:cNvSpPr txBox="1"/>
           <p:nvPr/>
         </p:nvSpPr>
         <p:spPr>
           <a:xfrm>
-            <a:off x="3566160" y="1920240"/>
-            <a:ext cx="2286000" cy="4114800"/>
+            <a:off x="3593592" y="1920240"/>
+            <a:ext cx="2231136" cy="4114800"/>
           </a:xfrm>
           <a:prstGeom prst="rect">
             <a:avLst/>
@@ -11299,7 +12038,7 @@
             <a:pPr>
               <a:defRPr sz="1300" b="1">
                 <a:solidFill>
-                  <a:srgbClr val="64748B"/>
+                  <a:srgbClr val="475569"/>
                 </a:solidFill>
                 <a:latin typeface="微软雅黑"/>
               </a:defRPr>
@@ -11311,13 +12050,13 @@
           <a:p>
             <a:pPr>
               <a:spcBef>
-                <a:spcPts val="1000"/>
+                <a:spcPts val="1400"/>
               </a:spcBef>
-              <a:defRPr sz="2000" b="1">
+              <a:defRPr sz="2200" b="1">
                 <a:solidFill>
                   <a:srgbClr val="10B981"/>
                 </a:solidFill>
-                <a:latin typeface="Arial"/>
+                <a:latin typeface="Segoe UI"/>
               </a:defRPr>
             </a:pPr>
             <a:r>
@@ -11327,9 +12066,64 @@
           <a:p>
             <a:pPr>
               <a:spcBef>
-                <a:spcPts val="600"/>
+                <a:spcPts val="4500"/>
               </a:spcBef>
-              <a:defRPr sz="1100" b="1">
+              <a:defRPr sz="1050">
+                <a:solidFill>
+                  <a:srgbClr val="475569"/>
+                </a:solidFill>
+                <a:latin typeface="微软雅黑"/>
+              </a:defRPr>
+            </a:pPr>
+            <a:r>
+              <a:t>从传统逐项翻找、录入，变为批量导入与模板一键解析导出</a:t>
+            </a:r>
+          </a:p>
+        </p:txBody>
+      </p:sp>
+      <p:sp>
+        <p:nvSpPr>
+          <p:cNvPr id="13" name="Rounded Rectangle 12"/>
+          <p:cNvSpPr/>
+          <p:nvPr/>
+        </p:nvSpPr>
+        <p:spPr>
+          <a:xfrm>
+            <a:off x="3593592" y="3108960"/>
+            <a:ext cx="2231136" cy="320040"/>
+          </a:xfrm>
+          <a:prstGeom prst="roundRect">
+            <a:avLst/>
+          </a:prstGeom>
+          <a:solidFill>
+            <a:srgbClr val="ECFDF5"/>
+          </a:solidFill>
+          <a:ln w="12700">
+            <a:solidFill>
+              <a:srgbClr val="10B981"/>
+            </a:solidFill>
+          </a:ln>
+        </p:spPr>
+        <p:style>
+          <a:lnRef idx="1">
+            <a:schemeClr val="accent1"/>
+          </a:lnRef>
+          <a:fillRef idx="3">
+            <a:schemeClr val="accent1"/>
+          </a:fillRef>
+          <a:effectRef idx="2">
+            <a:schemeClr val="accent1"/>
+          </a:effectRef>
+          <a:fontRef idx="minor">
+            <a:schemeClr val="lt1"/>
+          </a:fontRef>
+        </p:style>
+        <p:txBody>
+          <a:bodyPr rtlCol="0" anchor="ctr"/>
+          <a:lstStyle/>
+          <a:p>
+            <a:pPr algn="ctr">
+              <a:defRPr sz="1050" b="1">
                 <a:solidFill>
                   <a:srgbClr val="10B981"/>
                 </a:solidFill>
@@ -11340,34 +12134,18 @@
               <a:t>▲ 周期缩短 70%+</a:t>
             </a:r>
           </a:p>
-          <a:p>
-            <a:pPr>
-              <a:spcBef>
-                <a:spcPts val="1600"/>
-              </a:spcBef>
-              <a:defRPr sz="1100">
-                <a:solidFill>
-                  <a:srgbClr val="64748B"/>
-                </a:solidFill>
-                <a:latin typeface="微软雅黑"/>
-              </a:defRPr>
-            </a:pPr>
-            <a:r>
-              <a:t>从传统逐项翻找、录入，变为批量导入与智能一键解析</a:t>
-            </a:r>
-          </a:p>
-        </p:txBody>
-      </p:sp>
-      <p:sp>
-        <p:nvSpPr>
-          <p:cNvPr id="10" name="Rounded Rectangle 9"/>
+        </p:txBody>
+      </p:sp>
+      <p:sp>
+        <p:nvSpPr>
+          <p:cNvPr id="14" name="Rounded Rectangle 13"/>
           <p:cNvSpPr/>
           <p:nvPr/>
         </p:nvSpPr>
         <p:spPr>
           <a:xfrm>
-            <a:off x="6126480" y="1645920"/>
-            <a:ext cx="2560320" cy="4663440"/>
+            <a:off x="6126480" y="1691640"/>
+            <a:ext cx="2560320" cy="4572000"/>
           </a:xfrm>
           <a:prstGeom prst="roundRect">
             <a:avLst/>
@@ -11405,16 +12183,16 @@
       </p:sp>
       <p:sp>
         <p:nvSpPr>
-          <p:cNvPr id="11" name="Rectangle 10"/>
+          <p:cNvPr id="15" name="Rounded Rectangle 14"/>
           <p:cNvSpPr/>
           <p:nvPr/>
         </p:nvSpPr>
         <p:spPr>
           <a:xfrm>
-            <a:off x="6126480" y="1645920"/>
+            <a:off x="6126480" y="1691640"/>
             <a:ext cx="2560320" cy="91440"/>
           </a:xfrm>
-          <a:prstGeom prst="rect">
+          <a:prstGeom prst="roundRect">
             <a:avLst/>
           </a:prstGeom>
           <a:solidFill>
@@ -11448,14 +12226,14 @@
       </p:sp>
       <p:sp>
         <p:nvSpPr>
-          <p:cNvPr id="12" name="TextBox 11"/>
+          <p:cNvPr id="16" name="TextBox 15"/>
           <p:cNvSpPr txBox="1"/>
           <p:nvPr/>
         </p:nvSpPr>
         <p:spPr>
           <a:xfrm>
-            <a:off x="6263640" y="1920240"/>
-            <a:ext cx="2286000" cy="4114800"/>
+            <a:off x="6291072" y="1920240"/>
+            <a:ext cx="2231136" cy="4114800"/>
           </a:xfrm>
           <a:prstGeom prst="rect">
             <a:avLst/>
@@ -11471,7 +12249,7 @@
             <a:pPr>
               <a:defRPr sz="1300" b="1">
                 <a:solidFill>
-                  <a:srgbClr val="64748B"/>
+                  <a:srgbClr val="475569"/>
                 </a:solidFill>
                 <a:latin typeface="微软雅黑"/>
               </a:defRPr>
@@ -11483,13 +12261,13 @@
           <a:p>
             <a:pPr>
               <a:spcBef>
-                <a:spcPts val="1000"/>
+                <a:spcPts val="1400"/>
               </a:spcBef>
-              <a:defRPr sz="2000" b="1">
+              <a:defRPr sz="2200" b="1">
                 <a:solidFill>
                   <a:srgbClr val="1E3A8A"/>
                 </a:solidFill>
-                <a:latin typeface="Arial"/>
+                <a:latin typeface="Segoe UI"/>
               </a:defRPr>
             </a:pPr>
             <a:r>
@@ -11499,11 +12277,66 @@
           <a:p>
             <a:pPr>
               <a:spcBef>
-                <a:spcPts val="600"/>
+                <a:spcPts val="4500"/>
               </a:spcBef>
-              <a:defRPr sz="1100" b="1">
-                <a:solidFill>
-                  <a:srgbClr val="10B981"/>
+              <a:defRPr sz="1050">
+                <a:solidFill>
+                  <a:srgbClr val="475569"/>
+                </a:solidFill>
+                <a:latin typeface="微软雅黑"/>
+              </a:defRPr>
+            </a:pPr>
+            <a:r>
+              <a:t>规范过滤前缀干扰，纯净保留图纸代号，消除重码温床</a:t>
+            </a:r>
+          </a:p>
+        </p:txBody>
+      </p:sp>
+      <p:sp>
+        <p:nvSpPr>
+          <p:cNvPr id="17" name="Rounded Rectangle 16"/>
+          <p:cNvSpPr/>
+          <p:nvPr/>
+        </p:nvSpPr>
+        <p:spPr>
+          <a:xfrm>
+            <a:off x="6291072" y="3108960"/>
+            <a:ext cx="2231136" cy="320040"/>
+          </a:xfrm>
+          <a:prstGeom prst="roundRect">
+            <a:avLst/>
+          </a:prstGeom>
+          <a:solidFill>
+            <a:srgbClr val="EFF6FF"/>
+          </a:solidFill>
+          <a:ln w="12700">
+            <a:solidFill>
+              <a:srgbClr val="1E3A8A"/>
+            </a:solidFill>
+          </a:ln>
+        </p:spPr>
+        <p:style>
+          <a:lnRef idx="1">
+            <a:schemeClr val="accent1"/>
+          </a:lnRef>
+          <a:fillRef idx="3">
+            <a:schemeClr val="accent1"/>
+          </a:fillRef>
+          <a:effectRef idx="2">
+            <a:schemeClr val="accent1"/>
+          </a:effectRef>
+          <a:fontRef idx="minor">
+            <a:schemeClr val="lt1"/>
+          </a:fontRef>
+        </p:style>
+        <p:txBody>
+          <a:bodyPr rtlCol="0" anchor="ctr"/>
+          <a:lstStyle/>
+          <a:p>
+            <a:pPr algn="ctr">
+              <a:defRPr sz="1050" b="1">
+                <a:solidFill>
+                  <a:srgbClr val="1E3A8A"/>
                 </a:solidFill>
                 <a:latin typeface="微软雅黑"/>
               </a:defRPr>
@@ -11512,34 +12345,18 @@
               <a:t>▲ 规范率提升 26%</a:t>
             </a:r>
           </a:p>
-          <a:p>
-            <a:pPr>
-              <a:spcBef>
-                <a:spcPts val="1600"/>
-              </a:spcBef>
-              <a:defRPr sz="1100">
-                <a:solidFill>
-                  <a:srgbClr val="64748B"/>
-                </a:solidFill>
-                <a:latin typeface="微软雅黑"/>
-              </a:defRPr>
-            </a:pPr>
-            <a:r>
-              <a:t>规范过滤前缀干扰，纯净保留图纸代号，消除重码温床</a:t>
-            </a:r>
-          </a:p>
-        </p:txBody>
-      </p:sp>
-      <p:sp>
-        <p:nvSpPr>
-          <p:cNvPr id="13" name="Rounded Rectangle 12"/>
+        </p:txBody>
+      </p:sp>
+      <p:sp>
+        <p:nvSpPr>
+          <p:cNvPr id="18" name="Rounded Rectangle 17"/>
           <p:cNvSpPr/>
           <p:nvPr/>
         </p:nvSpPr>
         <p:spPr>
           <a:xfrm>
-            <a:off x="8823960" y="1645920"/>
-            <a:ext cx="2560320" cy="4663440"/>
+            <a:off x="8823960" y="1691640"/>
+            <a:ext cx="2560320" cy="4572000"/>
           </a:xfrm>
           <a:prstGeom prst="roundRect">
             <a:avLst/>
@@ -11577,20 +12394,20 @@
       </p:sp>
       <p:sp>
         <p:nvSpPr>
-          <p:cNvPr id="14" name="Rectangle 13"/>
+          <p:cNvPr id="19" name="Rounded Rectangle 18"/>
           <p:cNvSpPr/>
           <p:nvPr/>
         </p:nvSpPr>
         <p:spPr>
           <a:xfrm>
-            <a:off x="8823960" y="1645920"/>
+            <a:off x="8823960" y="1691640"/>
             <a:ext cx="2560320" cy="91440"/>
           </a:xfrm>
-          <a:prstGeom prst="rect">
-            <a:avLst/>
-          </a:prstGeom>
-          <a:solidFill>
-            <a:srgbClr val="9333EA"/>
+          <a:prstGeom prst="roundRect">
+            <a:avLst/>
+          </a:prstGeom>
+          <a:solidFill>
+            <a:srgbClr val="7C3AED"/>
           </a:solidFill>
           <a:ln>
             <a:noFill/>
@@ -11620,14 +12437,14 @@
       </p:sp>
       <p:sp>
         <p:nvSpPr>
-          <p:cNvPr id="15" name="TextBox 14"/>
+          <p:cNvPr id="20" name="TextBox 19"/>
           <p:cNvSpPr txBox="1"/>
           <p:nvPr/>
         </p:nvSpPr>
         <p:spPr>
           <a:xfrm>
-            <a:off x="8961120" y="1920240"/>
-            <a:ext cx="2286000" cy="4114800"/>
+            <a:off x="8988552" y="1920240"/>
+            <a:ext cx="2231136" cy="4114800"/>
           </a:xfrm>
           <a:prstGeom prst="rect">
             <a:avLst/>
@@ -11643,61 +12460,100 @@
             <a:pPr>
               <a:defRPr sz="1300" b="1">
                 <a:solidFill>
-                  <a:srgbClr val="64748B"/>
-                </a:solidFill>
-                <a:latin typeface="微软雅黑"/>
-              </a:defRPr>
-            </a:pPr>
-            <a:r>
-              <a:t>🛡️ 系统可用性</a:t>
+                  <a:srgbClr val="475569"/>
+                </a:solidFill>
+                <a:latin typeface="微软雅黑"/>
+              </a:defRPr>
+            </a:pPr>
+            <a:r>
+              <a:t>⚡ 极速云端响应</a:t>
             </a:r>
           </a:p>
           <a:p>
             <a:pPr>
               <a:spcBef>
-                <a:spcPts val="1000"/>
+                <a:spcPts val="1400"/>
               </a:spcBef>
-              <a:defRPr sz="2000" b="1">
-                <a:solidFill>
-                  <a:srgbClr val="9333EA"/>
-                </a:solidFill>
-                <a:latin typeface="Arial"/>
-              </a:defRPr>
-            </a:pPr>
-            <a:r>
-              <a:t>99.9%</a:t>
+              <a:defRPr sz="2200" b="1">
+                <a:solidFill>
+                  <a:srgbClr val="7C3AED"/>
+                </a:solidFill>
+                <a:latin typeface="Segoe UI"/>
+              </a:defRPr>
+            </a:pPr>
+            <a:r>
+              <a:t>&lt; 1.0 秒</a:t>
             </a:r>
           </a:p>
           <a:p>
             <a:pPr>
               <a:spcBef>
-                <a:spcPts val="600"/>
+                <a:spcPts val="4500"/>
               </a:spcBef>
-              <a:defRPr sz="1100" b="1">
-                <a:solidFill>
-                  <a:srgbClr val="10B981"/>
-                </a:solidFill>
-                <a:latin typeface="微软雅黑"/>
-              </a:defRPr>
-            </a:pPr>
-            <a:r>
-              <a:t>▲ 三级容灾无死角</a:t>
-            </a:r>
-          </a:p>
-          <a:p>
-            <a:pPr>
-              <a:spcBef>
-                <a:spcPts val="1600"/>
-              </a:spcBef>
-              <a:defRPr sz="1100">
-                <a:solidFill>
-                  <a:srgbClr val="64748B"/>
-                </a:solidFill>
-                <a:latin typeface="微软雅黑"/>
-              </a:defRPr>
-            </a:pPr>
-            <a:r>
-              <a:t>云端极速优先，断网自动保底，极端情况规则终极兜底</a:t>
+              <a:defRPr sz="1050">
+                <a:solidFill>
+                  <a:srgbClr val="475569"/>
+                </a:solidFill>
+                <a:latin typeface="微软雅黑"/>
+              </a:defRPr>
+            </a:pPr>
+            <a:r>
+              <a:t>调用智谱云端大模型，无需购置高配 GPU 服务器，普通工位电脑即开即用</a:t>
+            </a:r>
+          </a:p>
+        </p:txBody>
+      </p:sp>
+      <p:sp>
+        <p:nvSpPr>
+          <p:cNvPr id="21" name="Rounded Rectangle 20"/>
+          <p:cNvSpPr/>
+          <p:nvPr/>
+        </p:nvSpPr>
+        <p:spPr>
+          <a:xfrm>
+            <a:off x="8988552" y="3108960"/>
+            <a:ext cx="2231136" cy="320040"/>
+          </a:xfrm>
+          <a:prstGeom prst="roundRect">
+            <a:avLst/>
+          </a:prstGeom>
+          <a:solidFill>
+            <a:srgbClr val="F5F3FF"/>
+          </a:solidFill>
+          <a:ln w="12700">
+            <a:solidFill>
+              <a:srgbClr val="7C3AED"/>
+            </a:solidFill>
+          </a:ln>
+        </p:spPr>
+        <p:style>
+          <a:lnRef idx="1">
+            <a:schemeClr val="accent1"/>
+          </a:lnRef>
+          <a:fillRef idx="3">
+            <a:schemeClr val="accent1"/>
+          </a:fillRef>
+          <a:effectRef idx="2">
+            <a:schemeClr val="accent1"/>
+          </a:effectRef>
+          <a:fontRef idx="minor">
+            <a:schemeClr val="lt1"/>
+          </a:fontRef>
+        </p:style>
+        <p:txBody>
+          <a:bodyPr rtlCol="0" anchor="ctr"/>
+          <a:lstStyle/>
+          <a:p>
+            <a:pPr algn="ctr">
+              <a:defRPr sz="1050" b="1">
+                <a:solidFill>
+                  <a:srgbClr val="7C3AED"/>
+                </a:solidFill>
+                <a:latin typeface="微软雅黑"/>
+              </a:defRPr>
+            </a:pPr>
+            <a:r>
+              <a:t>★ 零本地硬件门槛</a:t>
             </a:r>
           </a:p>
         </p:txBody>
@@ -11722,14 +12578,100 @@
       <p:grpSpPr/>
       <p:sp>
         <p:nvSpPr>
-          <p:cNvPr id="2" name="Rounded Rectangle 1"/>
+          <p:cNvPr id="2" name="Rectangle 1"/>
           <p:cNvSpPr/>
           <p:nvPr/>
         </p:nvSpPr>
         <p:spPr>
           <a:xfrm>
-            <a:off x="731520" y="411480"/>
-            <a:ext cx="2011680" cy="320040"/>
+            <a:off x="0" y="0"/>
+            <a:ext cx="12191695" cy="6858000"/>
+          </a:xfrm>
+          <a:prstGeom prst="rect">
+            <a:avLst/>
+          </a:prstGeom>
+          <a:solidFill>
+            <a:srgbClr val="F8FAFC"/>
+          </a:solidFill>
+          <a:ln>
+            <a:noFill/>
+          </a:ln>
+        </p:spPr>
+        <p:style>
+          <a:lnRef idx="1">
+            <a:schemeClr val="accent1"/>
+          </a:lnRef>
+          <a:fillRef idx="3">
+            <a:schemeClr val="accent1"/>
+          </a:fillRef>
+          <a:effectRef idx="2">
+            <a:schemeClr val="accent1"/>
+          </a:effectRef>
+          <a:fontRef idx="minor">
+            <a:schemeClr val="lt1"/>
+          </a:fontRef>
+        </p:style>
+        <p:txBody>
+          <a:bodyPr rtlCol="0" anchor="ctr"/>
+          <a:lstStyle/>
+          <a:p>
+            <a:pPr algn="ctr"/>
+          </a:p>
+        </p:txBody>
+      </p:sp>
+      <p:sp>
+        <p:nvSpPr>
+          <p:cNvPr id="3" name="Rectangle 2"/>
+          <p:cNvSpPr/>
+          <p:nvPr/>
+        </p:nvSpPr>
+        <p:spPr>
+          <a:xfrm>
+            <a:off x="0" y="0"/>
+            <a:ext cx="12191695" cy="73152"/>
+          </a:xfrm>
+          <a:prstGeom prst="rect">
+            <a:avLst/>
+          </a:prstGeom>
+          <a:solidFill>
+            <a:srgbClr val="1D4ED8"/>
+          </a:solidFill>
+          <a:ln>
+            <a:noFill/>
+          </a:ln>
+        </p:spPr>
+        <p:style>
+          <a:lnRef idx="1">
+            <a:schemeClr val="accent1"/>
+          </a:lnRef>
+          <a:fillRef idx="3">
+            <a:schemeClr val="accent1"/>
+          </a:fillRef>
+          <a:effectRef idx="2">
+            <a:schemeClr val="accent1"/>
+          </a:effectRef>
+          <a:fontRef idx="minor">
+            <a:schemeClr val="lt1"/>
+          </a:fontRef>
+        </p:style>
+        <p:txBody>
+          <a:bodyPr rtlCol="0" anchor="ctr"/>
+          <a:lstStyle/>
+          <a:p>
+            <a:pPr algn="ctr"/>
+          </a:p>
+        </p:txBody>
+      </p:sp>
+      <p:sp>
+        <p:nvSpPr>
+          <p:cNvPr id="4" name="Rounded Rectangle 3"/>
+          <p:cNvSpPr/>
+          <p:nvPr/>
+        </p:nvSpPr>
+        <p:spPr>
+          <a:xfrm>
+            <a:off x="731520" y="384048"/>
+            <a:ext cx="2011680" cy="292608"/>
           </a:xfrm>
           <a:prstGeom prst="roundRect">
             <a:avLst/>
@@ -11758,33 +12700,33 @@
           </a:fontRef>
         </p:style>
         <p:txBody>
-          <a:bodyPr rtlCol="0" anchor="ctr" wrap="none"/>
+          <a:bodyPr rtlCol="0" anchor="ctr"/>
           <a:lstStyle/>
           <a:p>
             <a:pPr algn="ctr">
-              <a:defRPr sz="1100" b="1">
-                <a:solidFill>
-                  <a:srgbClr val="2563EB"/>
-                </a:solidFill>
-                <a:latin typeface="微软雅黑"/>
-              </a:defRPr>
-            </a:pPr>
-            <a:r>
-              <a:t>08. 实践心得与认知升级</a:t>
-            </a:r>
-          </a:p>
-        </p:txBody>
-      </p:sp>
-      <p:sp>
-        <p:nvSpPr>
-          <p:cNvPr id="3" name="TextBox 2"/>
+              <a:defRPr sz="1000" b="1">
+                <a:solidFill>
+                  <a:srgbClr val="1D4ED8"/>
+                </a:solidFill>
+                <a:latin typeface="微软雅黑"/>
+              </a:defRPr>
+            </a:pPr>
+            <a:r>
+              <a:t>08. 实践心得与思考</a:t>
+            </a:r>
+          </a:p>
+        </p:txBody>
+      </p:sp>
+      <p:sp>
+        <p:nvSpPr>
+          <p:cNvPr id="5" name="TextBox 4"/>
           <p:cNvSpPr txBox="1"/>
           <p:nvPr/>
         </p:nvSpPr>
         <p:spPr>
           <a:xfrm>
-            <a:off x="731520" y="777240"/>
-            <a:ext cx="10515600" cy="548640"/>
+            <a:off x="731520" y="749808"/>
+            <a:ext cx="10698480" cy="777240"/>
           </a:xfrm>
           <a:prstGeom prst="rect">
             <a:avLst/>
@@ -11798,7 +12740,7 @@
           <a:lstStyle/>
           <a:p>
             <a:pPr>
-              <a:defRPr sz="2200" b="1">
+              <a:defRPr sz="2100" b="1">
                 <a:solidFill>
                   <a:srgbClr val="0F172A"/>
                 </a:solidFill>
@@ -11806,45 +12748,45 @@
               </a:defRPr>
             </a:pPr>
             <a:r>
-              <a:t>工业大模型落地方法论：“从 Demo 到生产级系统”</a:t>
+              <a:t>大模型在工业工程落地的方法论：“从玩具到生产力”</a:t>
             </a:r>
           </a:p>
           <a:p>
             <a:pPr>
               <a:spcBef>
-                <a:spcPts val="400"/>
+                <a:spcPts val="300"/>
               </a:spcBef>
-              <a:defRPr sz="1200">
-                <a:solidFill>
-                  <a:srgbClr val="64748B"/>
-                </a:solidFill>
-                <a:latin typeface="微软雅黑"/>
-              </a:defRPr>
-            </a:pPr>
-            <a:r>
-              <a:t>不仅是技术选型，更是对工业场景深度理解与工程哲学的实践</a:t>
-            </a:r>
-          </a:p>
-        </p:txBody>
-      </p:sp>
-      <p:sp>
-        <p:nvSpPr>
-          <p:cNvPr id="4" name="Rounded Rectangle 3"/>
+              <a:defRPr sz="1100">
+                <a:solidFill>
+                  <a:srgbClr val="475569"/>
+                </a:solidFill>
+                <a:latin typeface="微软雅黑"/>
+              </a:defRPr>
+            </a:pPr>
+            <a:r>
+              <a:t>超越通用对话框概念，真正将大模型自然语言能力融入企业严谨业务流程</a:t>
+            </a:r>
+          </a:p>
+        </p:txBody>
+      </p:sp>
+      <p:sp>
+        <p:nvSpPr>
+          <p:cNvPr id="6" name="Rounded Rectangle 5"/>
           <p:cNvSpPr/>
           <p:nvPr/>
         </p:nvSpPr>
         <p:spPr>
           <a:xfrm>
-            <a:off x="731520" y="1645920"/>
+            <a:off x="731520" y="1691640"/>
             <a:ext cx="10728655" cy="1371600"/>
           </a:xfrm>
           <a:prstGeom prst="roundRect">
             <a:avLst/>
           </a:prstGeom>
           <a:solidFill>
-            <a:srgbClr val="F8FAFC"/>
-          </a:solidFill>
-          <a:ln>
+            <a:srgbClr val="FFFFFF"/>
+          </a:solidFill>
+          <a:ln w="12700">
             <a:solidFill>
               <a:srgbClr val="E2E8F0"/>
             </a:solidFill>
@@ -11874,20 +12816,20 @@
       </p:sp>
       <p:sp>
         <p:nvSpPr>
-          <p:cNvPr id="5" name="Rounded Rectangle 4"/>
+          <p:cNvPr id="7" name="Rounded Rectangle 6"/>
           <p:cNvSpPr/>
           <p:nvPr/>
         </p:nvSpPr>
         <p:spPr>
           <a:xfrm>
-            <a:off x="1005840" y="1874520"/>
+            <a:off x="1005840" y="1920240"/>
             <a:ext cx="914400" cy="914400"/>
           </a:xfrm>
           <a:prstGeom prst="roundRect">
             <a:avLst/>
           </a:prstGeom>
           <a:solidFill>
-            <a:srgbClr val="0F172A"/>
+            <a:srgbClr val="1D4ED8"/>
           </a:solidFill>
           <a:ln>
             <a:noFill/>
@@ -11916,7 +12858,7 @@
                 <a:solidFill>
                   <a:srgbClr val="FFFFFF"/>
                 </a:solidFill>
-                <a:latin typeface="Arial"/>
+                <a:latin typeface="Segoe UI"/>
               </a:defRPr>
             </a:pPr>
             <a:r>
@@ -11927,14 +12869,14 @@
       </p:sp>
       <p:sp>
         <p:nvSpPr>
-          <p:cNvPr id="6" name="TextBox 5"/>
+          <p:cNvPr id="8" name="TextBox 7"/>
           <p:cNvSpPr txBox="1"/>
           <p:nvPr/>
         </p:nvSpPr>
         <p:spPr>
           <a:xfrm>
-            <a:off x="2103120" y="1783080"/>
-            <a:ext cx="9144000" cy="1097280"/>
+            <a:off x="2148840" y="1856232"/>
+            <a:ext cx="8961120" cy="1097280"/>
           </a:xfrm>
           <a:prstGeom prst="rect">
             <a:avLst/>
@@ -11966,7 +12908,7 @@
               </a:spcBef>
               <a:defRPr sz="1100">
                 <a:solidFill>
-                  <a:srgbClr val="64748B"/>
+                  <a:srgbClr val="475569"/>
                 </a:solidFill>
                 <a:latin typeface="微软雅黑"/>
               </a:defRPr>
@@ -11979,22 +12921,22 @@
       </p:sp>
       <p:sp>
         <p:nvSpPr>
-          <p:cNvPr id="7" name="Rounded Rectangle 6"/>
+          <p:cNvPr id="9" name="Rounded Rectangle 8"/>
           <p:cNvSpPr/>
           <p:nvPr/>
         </p:nvSpPr>
         <p:spPr>
           <a:xfrm>
-            <a:off x="731520" y="3200400"/>
+            <a:off x="731520" y="3246120"/>
             <a:ext cx="10728655" cy="1371600"/>
           </a:xfrm>
           <a:prstGeom prst="roundRect">
             <a:avLst/>
           </a:prstGeom>
           <a:solidFill>
-            <a:srgbClr val="F8FAFC"/>
-          </a:solidFill>
-          <a:ln>
+            <a:srgbClr val="FFFFFF"/>
+          </a:solidFill>
+          <a:ln w="12700">
             <a:solidFill>
               <a:srgbClr val="E2E8F0"/>
             </a:solidFill>
@@ -12024,20 +12966,20 @@
       </p:sp>
       <p:sp>
         <p:nvSpPr>
-          <p:cNvPr id="8" name="Rounded Rectangle 7"/>
+          <p:cNvPr id="10" name="Rounded Rectangle 9"/>
           <p:cNvSpPr/>
           <p:nvPr/>
         </p:nvSpPr>
         <p:spPr>
           <a:xfrm>
-            <a:off x="1005840" y="3429000"/>
+            <a:off x="1005840" y="3474720"/>
             <a:ext cx="914400" cy="914400"/>
           </a:xfrm>
           <a:prstGeom prst="roundRect">
             <a:avLst/>
           </a:prstGeom>
           <a:solidFill>
-            <a:srgbClr val="0F172A"/>
+            <a:srgbClr val="0EA5E9"/>
           </a:solidFill>
           <a:ln>
             <a:noFill/>
@@ -12066,7 +13008,7 @@
                 <a:solidFill>
                   <a:srgbClr val="FFFFFF"/>
                 </a:solidFill>
-                <a:latin typeface="Arial"/>
+                <a:latin typeface="Segoe UI"/>
               </a:defRPr>
             </a:pPr>
             <a:r>
@@ -12077,14 +13019,14 @@
       </p:sp>
       <p:sp>
         <p:nvSpPr>
-          <p:cNvPr id="9" name="TextBox 8"/>
+          <p:cNvPr id="11" name="TextBox 10"/>
           <p:cNvSpPr txBox="1"/>
           <p:nvPr/>
         </p:nvSpPr>
         <p:spPr>
           <a:xfrm>
-            <a:off x="2103120" y="3337560"/>
-            <a:ext cx="9144000" cy="1097280"/>
+            <a:off x="2148840" y="3410712"/>
+            <a:ext cx="8961120" cy="1097280"/>
           </a:xfrm>
           <a:prstGeom prst="rect">
             <a:avLst/>
@@ -12106,7 +13048,7 @@
               </a:defRPr>
             </a:pPr>
             <a:r>
-              <a:t>端云协同与离线兜底是工业生命线 (Hybrid Reliability)</a:t>
+              <a:t>轻量实用，善用成熟云端大模型 (Lean Cloud-First)</a:t>
             </a:r>
           </a:p>
           <a:p>
@@ -12116,35 +13058,35 @@
               </a:spcBef>
               <a:defRPr sz="1100">
                 <a:solidFill>
-                  <a:srgbClr val="64748B"/>
-                </a:solidFill>
-                <a:latin typeface="微软雅黑"/>
-              </a:defRPr>
-            </a:pPr>
-            <a:r>
-              <a:t>互联网 AI 拼模型参数，工业 AI 拼‘极端情况不掉链子’。不能把宝全部押在外网 API 上；离线模型与规则引擎兜底，是系统真正能进驻风电场车间的底气。</a:t>
-            </a:r>
-          </a:p>
-        </p:txBody>
-      </p:sp>
-      <p:sp>
-        <p:nvSpPr>
-          <p:cNvPr id="10" name="Rounded Rectangle 9"/>
+                  <a:srgbClr val="475569"/>
+                </a:solidFill>
+                <a:latin typeface="微软雅黑"/>
+              </a:defRPr>
+            </a:pPr>
+            <a:r>
+              <a:t>工业软件研发不必盲目自建昂贵的大模型硬件服务器。依托成熟高性价比的云端 API，将精力完全聚焦在业务逻辑与物料治理本身，实现极低成本、快速见效。</a:t>
+            </a:r>
+          </a:p>
+        </p:txBody>
+      </p:sp>
+      <p:sp>
+        <p:nvSpPr>
+          <p:cNvPr id="12" name="Rounded Rectangle 11"/>
           <p:cNvSpPr/>
           <p:nvPr/>
         </p:nvSpPr>
         <p:spPr>
           <a:xfrm>
-            <a:off x="731520" y="4754880"/>
+            <a:off x="731520" y="4800600"/>
             <a:ext cx="10728655" cy="1371600"/>
           </a:xfrm>
           <a:prstGeom prst="roundRect">
             <a:avLst/>
           </a:prstGeom>
           <a:solidFill>
-            <a:srgbClr val="F8FAFC"/>
-          </a:solidFill>
-          <a:ln>
+            <a:srgbClr val="FFFFFF"/>
+          </a:solidFill>
+          <a:ln w="12700">
             <a:solidFill>
               <a:srgbClr val="E2E8F0"/>
             </a:solidFill>
@@ -12174,20 +13116,20 @@
       </p:sp>
       <p:sp>
         <p:nvSpPr>
-          <p:cNvPr id="11" name="Rounded Rectangle 10"/>
+          <p:cNvPr id="13" name="Rounded Rectangle 12"/>
           <p:cNvSpPr/>
           <p:nvPr/>
         </p:nvSpPr>
         <p:spPr>
           <a:xfrm>
-            <a:off x="1005840" y="4983480"/>
+            <a:off x="1005840" y="5029200"/>
             <a:ext cx="914400" cy="914400"/>
           </a:xfrm>
           <a:prstGeom prst="roundRect">
             <a:avLst/>
           </a:prstGeom>
           <a:solidFill>
-            <a:srgbClr val="0F172A"/>
+            <a:srgbClr val="10B981"/>
           </a:solidFill>
           <a:ln>
             <a:noFill/>
@@ -12216,7 +13158,7 @@
                 <a:solidFill>
                   <a:srgbClr val="FFFFFF"/>
                 </a:solidFill>
-                <a:latin typeface="Arial"/>
+                <a:latin typeface="Segoe UI"/>
               </a:defRPr>
             </a:pPr>
             <a:r>
@@ -12227,14 +13169,14 @@
       </p:sp>
       <p:sp>
         <p:nvSpPr>
-          <p:cNvPr id="12" name="TextBox 11"/>
+          <p:cNvPr id="14" name="TextBox 13"/>
           <p:cNvSpPr txBox="1"/>
           <p:nvPr/>
         </p:nvSpPr>
         <p:spPr>
           <a:xfrm>
-            <a:off x="2103120" y="4892040"/>
-            <a:ext cx="9144000" cy="1097280"/>
+            <a:off x="2148840" y="4965192"/>
+            <a:ext cx="8961120" cy="1097280"/>
           </a:xfrm>
           <a:prstGeom prst="rect">
             <a:avLst/>
@@ -12266,13 +13208,13 @@
               </a:spcBef>
               <a:defRPr sz="1100">
                 <a:solidFill>
-                  <a:srgbClr val="64748B"/>
-                </a:solidFill>
-                <a:latin typeface="微软雅黑"/>
-              </a:defRPr>
-            </a:pPr>
-            <a:r>
-              <a:t>大模型极其擅长处理模糊、倒置、多变的人类语言输入；但工业工程需要 100% 严谨的格式受控。两者结合，大模型做前端提取，规则系统做后端校验，才是工业生产级系统的正解。</a:t>
+                  <a:srgbClr val="475569"/>
+                </a:solidFill>
+                <a:latin typeface="微软雅黑"/>
+              </a:defRPr>
+            </a:pPr>
+            <a:r>
+              <a:t>大模型极其擅长处理模糊多变的人类语言输入；但工业工程需要 100% 严谨的格式受控。两者结合，大模型做前端提取，规则系统做后端校验，才是工业生产级系统的正解。</a:t>
             </a:r>
           </a:p>
         </p:txBody>
